--- a/Communication Orale_JDA1_sujets_enfant_30mai.pptx
+++ b/Communication Orale_JDA1_sujets_enfant_30mai.pptx
@@ -5,7 +5,7 @@
     <p:sldMasterId id="2147483749" r:id="rId1"/>
   </p:sldMasterIdLst>
   <p:notesMasterIdLst>
-    <p:notesMasterId r:id="rId21"/>
+    <p:notesMasterId r:id="rId20"/>
   </p:notesMasterIdLst>
   <p:sldIdLst>
     <p:sldId id="256" r:id="rId2"/>
@@ -22,11 +22,10 @@
     <p:sldId id="320" r:id="rId13"/>
     <p:sldId id="325" r:id="rId14"/>
     <p:sldId id="322" r:id="rId15"/>
-    <p:sldId id="324" r:id="rId16"/>
+    <p:sldId id="335" r:id="rId16"/>
     <p:sldId id="318" r:id="rId17"/>
     <p:sldId id="314" r:id="rId18"/>
-    <p:sldId id="315" r:id="rId19"/>
-    <p:sldId id="326" r:id="rId20"/>
+    <p:sldId id="326" r:id="rId19"/>
   </p:sldIdLst>
   <p:sldSz cx="12192000" cy="6858000"/>
   <p:notesSz cx="6858000" cy="9144000"/>
@@ -13066,7 +13065,7 @@
           <a:p>
             <a:fld id="{7D4E4A3F-3A45-4DFA-9A72-E663841A2421}" type="datetimeFigureOut">
               <a:rPr lang="fr-FR" smtClean="0"/>
-              <a:t>05/06/2026</a:t>
+              <a:t>06/06/2026</a:t>
             </a:fld>
             <a:endParaRPr lang="fr-FR"/>
           </a:p>
@@ -13523,7 +13522,7 @@
             </a:pPr>
             <a:r>
               <a:rPr lang="fr-FR" sz="1200" b="1" dirty="0"/>
-              <a:t>Analyse détaillée — Étendue lésionnelle des dermatoses bulleuses gériatriques : stratification par surface corporelle atteinte</a:t>
+              <a:t>Analyse détaillée — Étendue lésionnelle des dermatoses bulleuses pédiatriques : stratification par surface corporelle atteinte</a:t>
             </a:r>
           </a:p>
           <a:p>
@@ -13654,24 +13653,7 @@
             </a:pPr>
             <a:r>
               <a:rPr lang="fr-FR" sz="1200" dirty="0"/>
-              <a:t>5. </a:t>
-            </a:r>
-            <a:r>
-              <a:rPr lang="fr-FR" sz="1200"/>
-              <a:t>Convergence numérique remarquable. La proportion globale de formes étendues (55,81 %) coïncide exactement avec la proportion d'hommes dans la cohorte (55,81 %, 24/43). Ce parallélisme n'est qu'arithmétique mais il fixe un repère mnémotechnique fort pour la diapositive.</a:t>
-            </a:r>
-          </a:p>
-          <a:p>
-            <a:pPr marL="0" lvl="0" indent="0" algn="l" rtl="0">
-              <a:buNone/>
-            </a:pPr>
-            <a:r>
-              <a:rPr lang="fr-FR" sz="1200"/>
-              <a:t>6. </a:t>
-            </a:r>
-            <a:r>
-              <a:rPr lang="fr-FR" sz="1200" dirty="0"/>
-              <a:t>Sex-ratio légèrement majoré dans la tranche ≥ 30 %. Le sex-ratio H/F atteint 1,4 (7/5) parmi les formes les plus sévères, contre 1,26 (24/19) sur l'ensemble de la cohorte. L'écart reste modéré, mais signale une tendance à un excès masculin marginal dans le segment de gravité maximale.</a:t>
+              <a:t>5. Sex-ratio légèrement majoré dans la tranche ≥ 30 %. Le sex-ratio H/F atteint 1,4 (7/5) parmi les formes les plus sévères, contre 1,26 (24/19) sur l'ensemble de la cohorte. L'écart reste modéré, mais signale une tendance à un excès masculin marginal dans le segment de gravité maximale.</a:t>
             </a:r>
           </a:p>
           <a:p>
@@ -13831,7 +13813,7 @@
             </a:pPr>
             <a:r>
               <a:rPr lang="fr-FR" sz="1200" b="1" dirty="0"/>
-              <a:t>Analyse détaillée — Étendue lésionnelle des dermatoses bulleuses gériatriques : stratification par surface corporelle atteinte</a:t>
+              <a:t>Analyse approfondie — Croisement catégorie étiologique × sexe × étendue lésionnelle des dermatoses bulleuses de l’enfant</a:t>
             </a:r>
           </a:p>
           <a:p>
@@ -13840,15 +13822,7 @@
             </a:pPr>
             <a:r>
               <a:rPr lang="fr-FR" sz="1200" dirty="0"/>
-              <a:t>Cette diapositive prolonge la caractérisation clinique de la cohorte en stratifiant les 43 patients selon la surface corporelle atteinte, déclinée en trois tranches — ≤ 10 %, [11 %, 29 %] et ≥ 30 % — et en croisant cette stratification avec le sexe. Elle introduit ainsi un axe de gravité objectif venant compléter la lecture </a:t>
-            </a:r>
-            <a:r>
-              <a:rPr lang="fr-FR" sz="1200" dirty="0" err="1"/>
-              <a:t>étiopathogénique</a:t>
-            </a:r>
-            <a:r>
-              <a:rPr lang="fr-FR" sz="1200" dirty="0"/>
-              <a:t> précédente.</a:t>
+              <a:t>Cette diapositive procède à un croisement à trois entrées — catégorie étiologique, sexe et tranche de surface corporelle atteinte (≤ 10 %, [11 %, 29 %], ≥ 30 %) — sur l’effectif total de 43 patients. Elle articule en un seul tableau les axes nosologique, démographique et de gravité surfacique précédemment exposés, ce qui permet de dégager le poids relatif de chaque catégorie au sein de chaque tranche, et la signature surfacique propre à chaque entité.</a:t>
             </a:r>
           </a:p>
           <a:p>
@@ -13857,7 +13831,7 @@
             </a:pPr>
             <a:r>
               <a:rPr lang="fr-FR" sz="1200" b="1" dirty="0"/>
-              <a:t>Lecture globale — Répartition par tranche de surface (n = 43)</a:t>
+              <a:t>Lecture globale — Hiérarchie étiologique (n = 43)</a:t>
             </a:r>
           </a:p>
           <a:p>
@@ -13866,7 +13840,7 @@
             </a:pPr>
             <a:r>
               <a:rPr lang="fr-FR" sz="1200" dirty="0"/>
-              <a:t>La tranche ≤ 10 % regroupe 19 patients, soit 44,19 % de l'effectif, et constitue la tranche modale de la série. Les tranches [11 %, 29 %] et ≥ 30 % comptent rigoureusement le même effectif, soit 12 patients chacune (27,91 %). Cumulées, les deux tranches d'atteinte étendue (≥ 11 %) totalisent 24 patients, soit 55,81 % de la cohorte.</a:t>
+              <a:t>La toxidermie regroupe 27 patients, soit 62,79 % de la cohorte, et constitue la catégorie écrasante dominante. La dermatose infectieuse compte 13 cas (30,23 %), l’auto-immune 2 cas (4,65 %) et l’immunoallergique 1 cas (2,33 %). À elles deux, toxidermie et infectieuse totalisent 40/43 patients, soit 93,02 % de la série, laissant aux catégories auto-immune et immunoallergique un statut résiduel (3/43, 6,98 %).</a:t>
             </a:r>
           </a:p>
           <a:p>
@@ -13875,7 +13849,7 @@
             </a:pPr>
             <a:r>
               <a:rPr lang="fr-FR" sz="1200" b="1" dirty="0"/>
-              <a:t>Lecture stratifiée — Femmes (n = 19, 44,19 %)</a:t>
+              <a:t>Lecture stratifiée — Toxidermie (n = 27, 62,79 %)</a:t>
             </a:r>
           </a:p>
           <a:p>
@@ -13884,7 +13858,7 @@
             </a:pPr>
             <a:r>
               <a:rPr lang="fr-FR" sz="1200" dirty="0"/>
-              <a:t>Le contingent féminin se distribue en 9 patientes ≤ 10 % (20,93 %), 5 patientes entre 11 et 29 % (11,63 %) et 5 patientes ≥ 30 % (11,63 %). La répartition reproduit la hiérarchie globale, avec une parfaite équivalence numérique entre tranche intermédiaire et tranche sévère.</a:t>
+              <a:t>Le contingent féminin compte 13 patientes (30,23 %), distribuées en 4 cas ≤ 10 % (9,30 %), 5 cas entre 11 et 29 % (11,63 %) et 4 cas ≥ 30 % (9,30 %). Le contingent masculin compte 14 patients (32,56 %), distribués en 4 cas ≤ 10 % (9,30 %), 4 cas entre 11 et 29 % (9,30 %) et 6 cas ≥ 30 % (13,95 %). Le sex-ratio H/F intra-toxidermie atteint 1,08 (14/13) sur l’ensemble, mais grimpe à 1,50 (6/4) dans la tranche ≥ 30 %.</a:t>
             </a:r>
           </a:p>
           <a:p>
@@ -13893,7 +13867,7 @@
             </a:pPr>
             <a:r>
               <a:rPr lang="fr-FR" sz="1200" b="1" dirty="0"/>
-              <a:t>Lecture stratifiée — Hommes (n = 24, 55,81 %)</a:t>
+              <a:t>Lecture stratifiée — Dermatose infectieuse (n = 13, 30,23 %)</a:t>
             </a:r>
           </a:p>
           <a:p>
@@ -13902,22 +13876,25 @@
             </a:pPr>
             <a:r>
               <a:rPr lang="fr-FR" sz="1200" dirty="0"/>
-              <a:t>Le contingent masculin se distribue en 10 patients ≤ 10 % (23,26 %), 7 patients entre 11 et 29 % (16,28 %) et 7 patients ≥ 30 % (16,28 %). La même hiérarchie et la même symétrie [11 %, 29 %] = ≥ 30 % sont retrouvées, traduisant un schéma reproductible d'un sexe à l'autre.</a:t>
+              <a:t>Le contingent féminin compte 5 patientes (11,63 %), intégralement situées dans la tranche ≤ 10 % (5/5). Le contingent masculin compte 8 patients (18,60 %), répartis en 6 cas ≤ 10 % (13,95 %) et 2 cas entre 11 et 29 % (4,65 %). Aucune patiente infectieuse, des deux sexes confondus, n’atteint le seuil ≥ 30 %. Le sex-ratio H/F intra-infectieux est de 1,60 (8/5), supérieur à celui de la cohorte globale.</a:t>
             </a:r>
           </a:p>
           <a:p>
             <a:pPr marL="0" lvl="0" indent="0" algn="l" rtl="0">
               <a:buNone/>
             </a:pPr>
-            <a:endParaRPr lang="fr-FR" sz="1200" b="1" dirty="0"/>
+            <a:r>
+              <a:rPr lang="fr-FR" sz="1200" b="1" dirty="0"/>
+              <a:t>Lecture stratifiée — Dermatose auto-immune (n = 2, 4,65 %)</a:t>
+            </a:r>
           </a:p>
           <a:p>
             <a:pPr marL="0" lvl="0" indent="0" algn="l" rtl="0">
               <a:buNone/>
             </a:pPr>
             <a:r>
-              <a:rPr lang="fr-FR" sz="1200" b="1" dirty="0"/>
-              <a:t>Insights</a:t>
+              <a:rPr lang="fr-FR" sz="1200" dirty="0"/>
+              <a:t>Les deux cas se répartissent en 1 patiente (2,33 %) dans la tranche ≥ 30 % et 1 patient (2,33 %) dans la tranche [11 %, 29 %]. Aucune forme localisée ≤ 10 % n’est observée.</a:t>
             </a:r>
           </a:p>
           <a:p>
@@ -13925,8 +13902,8 @@
               <a:buNone/>
             </a:pPr>
             <a:r>
-              <a:rPr lang="fr-FR" sz="1200" dirty="0"/>
-              <a:t>1. La forme localisée est modale mais non majoritaire. Avec 19 cas (44,19 %), la tranche ≤ 10 % domine numériquement chaque tranche prise isolément, mais elle ne rassemble pas la majorité absolue de la cohorte. Plus d'un patient sur deux (55,81 %, 24/43) présente en réalité une atteinte dépassant 10 % de surface corporelle.</a:t>
+              <a:rPr lang="fr-FR" sz="1200" b="1" dirty="0"/>
+              <a:t>Lecture stratifiée — Dermatose immunoallergique (n = 1, 2,33 %)</a:t>
             </a:r>
           </a:p>
           <a:p>
@@ -13935,7 +13912,7 @@
             </a:pPr>
             <a:r>
               <a:rPr lang="fr-FR" sz="1200" dirty="0"/>
-              <a:t>2. Un quart de la cohorte franchit le seuil critique de 30 %. Les 12 patients (27,91 %) de la tranche ≥ 30 % identifient d'emblée un sous-groupe substantiel à gravité maximale, justifiant une prise en charge en milieu spécialisé.</a:t>
+              <a:t>Cas unique, masculin, classé d’emblée dans la tranche ≥ 30 % (2,33 %).</a:t>
             </a:r>
           </a:p>
           <a:p>
@@ -13943,8 +13920,8 @@
               <a:buNone/>
             </a:pPr>
             <a:r>
-              <a:rPr lang="fr-FR" sz="1200" dirty="0"/>
-              <a:t>3. Symétrie parfaite entre formes intermédiaires et formes sévères. Les tranches [11 %, 29 %] et ≥ 30 % comptent strictement le même effectif (12 cas chacune, 27,91 %). Cette symétrie n'est pas seulement agrégée : elle se reproduit à l'identique chez les femmes (5/5) comme chez les hommes (7/7), ce qui structure la gravité surfacique selon un schéma reproductible et non aléatoire.</a:t>
+              <a:rPr lang="fr-FR" sz="1200" b="1" dirty="0"/>
+              <a:t>Insights percutants</a:t>
             </a:r>
           </a:p>
           <a:p>
@@ -13953,7 +13930,7 @@
             </a:pPr>
             <a:r>
               <a:rPr lang="fr-FR" sz="1200" dirty="0"/>
-              <a:t>4. Indépendance de l'étendue lésionnelle vis-à-vis du sexe. La hiérarchie « ≤ 10 % &gt; [11 %, 29 %] = ≥ 30 % » est qualitativement superposable entre les deux sexes, et la proportion intra-sexe de formes étendues (≥ 11 %) reste comparable (10/19, soit 52,63 % chez les femmes ; 14/24, soit 58,33 % chez les hommes). La sévérité surfacique ne se sexualise donc pas dans cette série.</a:t>
+              <a:t>1. Ubiquité surfacique exclusive de la toxidermie. La toxidermie est la seule catégorie présente simultanément dans les trois tranches de surface, avec une répartition 8/9/10 sur ≤ 10 %, [11 %, 29 %] et ≥ 30 % respectivement. Cette ubiquité traduit un spectre clinique extrêmement étendu, allant de la forme purement localisée jusqu’à l’épidermolyse extensive, et explique à elle seule pourquoi la toxidermie pèse autant dans chaque tranche prise séparément.</a:t>
             </a:r>
           </a:p>
           <a:p>
@@ -13962,11 +13939,15 @@
             </a:pPr>
             <a:r>
               <a:rPr lang="fr-FR" sz="1200" dirty="0"/>
-              <a:t>5. </a:t>
-            </a:r>
-            <a:r>
-              <a:rPr lang="fr-FR" sz="1200"/>
-              <a:t>Convergence numérique remarquable. La proportion globale de formes étendues (55,81 %) coïncide exactement avec la proportion d'hommes dans la cohorte (55,81 %, 24/43). Ce parallélisme n'est qu'arithmétique mais il fixe un repère mnémotechnique fort pour la diapositive.</a:t>
+              <a:t>2. Quasi-monopole </a:t>
+            </a:r>
+            <a:r>
+              <a:rPr lang="fr-FR" sz="1200" dirty="0" err="1"/>
+              <a:t>toxidermique</a:t>
+            </a:r>
+            <a:r>
+              <a:rPr lang="fr-FR" sz="1200" dirty="0"/>
+              <a:t> au sommet de gravité. La tranche ≥ 30 % rassemble 12 patients, dont 10 toxidermies (83,33 %), 1 auto-immune et 1 immunoallergique. La gravité surfacique maximale est donc, dans cette cohorte, presque systématiquement médicamenteuse : la toxidermie agit comme le moteur quasi exclusif des formes les plus étendues.</a:t>
             </a:r>
           </a:p>
           <a:p>
@@ -13974,12 +13955,8 @@
               <a:buNone/>
             </a:pPr>
             <a:r>
-              <a:rPr lang="fr-FR" sz="1200"/>
-              <a:t>6. </a:t>
-            </a:r>
-            <a:r>
               <a:rPr lang="fr-FR" sz="1200" dirty="0"/>
-              <a:t>Sex-ratio légèrement majoré dans la tranche ≥ 30 %. Le sex-ratio H/F atteint 1,4 (7/5) parmi les formes les plus sévères, contre 1,26 (24/19) sur l'ensemble de la cohorte. L'écart reste modéré, mais signale une tendance à un excès masculin marginal dans le segment de gravité maximale.</a:t>
+              <a:t>3. Confinement strict de la dermatose infectieuse aux formes localisées. 11 cas infectieux sur 13 (84,62 %) sont ≤ 10 %, les 2 restants se situent entre 11 et 29 %, et aucun ne franchit le seuil de 30 %. La pathologie infectieuse signe ici une expression clinique limitée, en miroir inverse de la toxidermie.</a:t>
             </a:r>
           </a:p>
           <a:p>
@@ -13987,8 +13964,8 @@
               <a:buNone/>
             </a:pPr>
             <a:r>
-              <a:rPr lang="fr-FR" sz="1200" b="1" dirty="0"/>
-              <a:t>Limites</a:t>
+              <a:rPr lang="fr-FR" sz="1200" dirty="0"/>
+              <a:t>4. Gradient de gravité étiologique majeur. La probabilité d’atteinte ≥ 11 % est de 70,37 % en toxidermie (19/27) contre 15,38 % en infectieux (2/13), soit un risque d’extension surfacique plus de 4,5 fois supérieur lorsque l’étiologie est médicamenteuse. Ce différentiel constitue le marqueur pronostique le plus saillant de la série.</a:t>
             </a:r>
           </a:p>
           <a:p>
@@ -13997,7 +13974,15 @@
             </a:pPr>
             <a:r>
               <a:rPr lang="fr-FR" sz="1200" dirty="0"/>
-              <a:t>Les effectifs par tranche restent restreints (12 patients dans chacune des deux tranches d'atteinte ≥ 11 %) et imposent prudence dans l'interprétation des écarts de quelques unités. Les tranches utilisées sont par ailleurs préfixées par seuils [≤ 10 %, 11–29 %, ≥ 30 %] et ne permettent pas une lecture continue de la surface atteinte.</a:t>
+              <a:t>5. Surreprésentation masculine au pic de gravité </a:t>
+            </a:r>
+            <a:r>
+              <a:rPr lang="fr-FR" sz="1200" dirty="0" err="1"/>
+              <a:t>toxidermique</a:t>
+            </a:r>
+            <a:r>
+              <a:rPr lang="fr-FR" sz="1200" dirty="0"/>
+              <a:t>. La tranche ≥ 30 % de toxidermie compte 6 garçons et 4 filles, soit un sex-ratio H/F de 1,50 contre 1,08 en toxidermie globale. Le surcroît masculin se concentre donc sélectivement dans le segment de gravité maximale, et non sur l’ensemble du spectre.</a:t>
             </a:r>
           </a:p>
           <a:p>
@@ -14005,8 +13990,8 @@
               <a:buNone/>
             </a:pPr>
             <a:r>
-              <a:rPr lang="fr-FR" sz="1200" b="1" dirty="0"/>
-              <a:t>Transition vers la diapositive suivante</a:t>
+              <a:rPr lang="fr-FR" sz="1200" dirty="0"/>
+              <a:t>6. Asymétrie surfacique sexuelle dans l’infectieux. Toutes les patientes infectieuses (5/5, 100 %) sont ≤ 10 %, tandis que 25 % des garçons infectieux (2/8) basculent en [11 %, 29 %]. Le sex-ratio H/F intra-infectieux (1,60) est supérieur à celui de la cohorte (1,26), et la totalité des formes infectieuses étendues est masculine.</a:t>
             </a:r>
           </a:p>
           <a:p>
@@ -14015,7 +14000,78 @@
             </a:pPr>
             <a:r>
               <a:rPr lang="fr-FR" sz="1200" dirty="0"/>
-              <a:t>Après avoir objectivé l'étendue lésionnelle et son indépendance vis-à-vis du sexe, la diapositive suivante prolongera la caractérisation clinique de la cohorte en abordant un nouvel axe descriptif.</a:t>
+              <a:t>7. Catégories rares jamais localisées. Les 3 cas auto-immuns et immunoallergique cumulés se trouvent tous (3/3, 100 %) en atteinte ≥ 11 %, dont 2/3 en ≥ 30 %. Aucun de ces 3 patients ne se présente sous une forme localisée ≤ 10 % : rareté nosologique et présentation d’emblée étendue coexistent dans cette série.</a:t>
+            </a:r>
+          </a:p>
+          <a:p>
+            <a:pPr marL="0" lvl="0" indent="0" algn="l" rtl="0">
+              <a:buNone/>
+            </a:pPr>
+            <a:r>
+              <a:rPr lang="fr-FR" sz="1200" dirty="0"/>
+              <a:t>8. Exclusion mutuelle ≤ 10 %/catégories rares. La tranche ≤ 10 % (n = 19) est intégralement partagée entre infectieux (11/19, 57,89 %) et toxidermie (8/19, 42,11 %), sans aucun cas auto-immun ni immunoallergique. La forme localisée constitue ainsi un espace clinique nosologiquement bipolaire.</a:t>
+            </a:r>
+          </a:p>
+          <a:p>
+            <a:pPr marL="0" lvl="0" indent="0" algn="l" rtl="0">
+              <a:buNone/>
+            </a:pPr>
+            <a:r>
+              <a:rPr lang="fr-FR" sz="1200" b="1" dirty="0"/>
+              <a:t>Lecture comparée </a:t>
+            </a:r>
+            <a:r>
+              <a:rPr lang="fr-FR" sz="1200" b="1" dirty="0" err="1"/>
+              <a:t>intercatégorielle</a:t>
+            </a:r>
+            <a:r>
+              <a:rPr lang="fr-FR" sz="1200" b="1" dirty="0"/>
+              <a:t> par tranche</a:t>
+            </a:r>
+          </a:p>
+          <a:p>
+            <a:pPr marL="0" lvl="0" indent="0" algn="l" rtl="0">
+              <a:buNone/>
+            </a:pPr>
+            <a:r>
+              <a:rPr lang="fr-FR" sz="1200" dirty="0"/>
+              <a:t>Dans la tranche ≤ 10 % (n = 19), la dermatose infectieuse représente 11/19 (57,89 %) et la toxidermie 8/19 (42,11 %). Dans la tranche [11 %, 29 %] (n = 12), la toxidermie représente 9/12 (75,00 %), l’infectieuse 2/12 (16,67 %) et l’auto-immune 1/12 (8,33 %). Dans la tranche ≥ 30 % (n = 12), la toxidermie représente 10/12 (83,33 %), l’auto-immune 1/12 (8,33 %) et l’immunoallergique 1/12 (8,33 %). La part de la toxidermie progresse donc linéairement avec la gravité surfacique (42,11 % → 75,00 % → 83,33 %), tandis que celle de l’infectieuse décroît de manière symétrique (57,89 % → 16,67 % → 0 %).</a:t>
+            </a:r>
+          </a:p>
+          <a:p>
+            <a:pPr marL="0" lvl="0" indent="0" algn="l" rtl="0">
+              <a:buNone/>
+            </a:pPr>
+            <a:r>
+              <a:rPr lang="fr-FR" sz="1200" b="1" dirty="0"/>
+              <a:t>Limites</a:t>
+            </a:r>
+          </a:p>
+          <a:p>
+            <a:pPr marL="0" lvl="0" indent="0" algn="l" rtl="0">
+              <a:buNone/>
+            </a:pPr>
+            <a:r>
+              <a:rPr lang="fr-FR" sz="1200" dirty="0"/>
+              <a:t>Les effectifs des catégories auto-immune (n = 2) et immunoallergique (n = 1) sont trop restreints pour permettre une lecture inférentielle ; les pourcentages associés (4,65 % et 2,33 %) doivent être lus comme descriptifs et non comparatifs. La catégorisation par tranches préfixées de surface ne permet pas une lecture continue de la surface corporelle atteinte.</a:t>
+            </a:r>
+          </a:p>
+          <a:p>
+            <a:pPr marL="0" lvl="0" indent="0" algn="l" rtl="0">
+              <a:buNone/>
+            </a:pPr>
+            <a:r>
+              <a:rPr lang="fr-FR" sz="1200" b="1" dirty="0"/>
+              <a:t>Transition vers la diapositive suivante</a:t>
+            </a:r>
+          </a:p>
+          <a:p>
+            <a:pPr marL="0" lvl="0" indent="0" algn="l" rtl="0">
+              <a:buNone/>
+            </a:pPr>
+            <a:r>
+              <a:rPr lang="fr-FR" sz="1200" dirty="0"/>
+              <a:t>Après ce croisement catégorie × sexe × surface qui boucle la lecture descriptive croisée de la cohorte, la diapositive suivante nous conduira a la discussion des résultats obtenus.</a:t>
             </a:r>
           </a:p>
         </p:txBody>
@@ -14125,7 +14181,7 @@
               </a:spcAft>
               <a:buNone/>
             </a:pPr>
-            <a:endParaRPr/>
+            <a:endParaRPr dirty="0"/>
           </a:p>
         </p:txBody>
       </p:sp>
@@ -14243,16 +14299,383 @@
           </a:bodyPr>
           <a:lstStyle/>
           <a:p>
-            <a:pPr marL="0" lvl="0" indent="0" algn="l" rtl="0">
+            <a:pPr marL="0" marR="0" lvl="0" indent="0" algn="l" defTabSz="914400" rtl="0" eaLnBrk="1" fontAlgn="t" latinLnBrk="0" hangingPunct="1">
+              <a:lnSpc>
+                <a:spcPct val="100000"/>
+              </a:lnSpc>
               <a:spcBef>
                 <a:spcPts val="0"/>
               </a:spcBef>
               <a:spcAft>
                 <a:spcPts val="0"/>
               </a:spcAft>
+              <a:buClrTx/>
+              <a:buSzTx/>
+              <a:buFontTx/>
               <a:buNone/>
+              <a:tabLst/>
+              <a:defRPr/>
             </a:pPr>
-            <a:endParaRPr lang="fr-FR" i="1" dirty="0"/>
+            <a:r>
+              <a:rPr lang="fr-FR" sz="1200" b="0" i="0" kern="1200" dirty="0">
+                <a:solidFill>
+                  <a:schemeClr val="tx1"/>
+                </a:solidFill>
+                <a:effectLst/>
+                <a:latin typeface="+mn-lt"/>
+                <a:ea typeface="+mn-ea"/>
+                <a:cs typeface="+mn-cs"/>
+              </a:rPr>
+              <a:t>Cette cohorte pédiatrique montre une </a:t>
+            </a:r>
+            <a:r>
+              <a:rPr lang="fr-FR" sz="1200" b="1" i="0" kern="1200" dirty="0">
+                <a:solidFill>
+                  <a:schemeClr val="tx1"/>
+                </a:solidFill>
+                <a:effectLst/>
+                <a:latin typeface="+mn-lt"/>
+                <a:ea typeface="+mn-ea"/>
+                <a:cs typeface="+mn-cs"/>
+              </a:rPr>
+              <a:t>domination nette des toxidermies</a:t>
+            </a:r>
+            <a:r>
+              <a:rPr lang="fr-FR" sz="1200" b="0" i="0" kern="1200" dirty="0">
+                <a:solidFill>
+                  <a:schemeClr val="tx1"/>
+                </a:solidFill>
+                <a:effectLst/>
+                <a:latin typeface="+mn-lt"/>
+                <a:ea typeface="+mn-ea"/>
+                <a:cs typeface="+mn-cs"/>
+              </a:rPr>
+              <a:t>, responsables de près de deux tiers des cas, suivies des </a:t>
+            </a:r>
+            <a:r>
+              <a:rPr lang="fr-FR" sz="1200" b="1" i="0" kern="1200" dirty="0">
+                <a:solidFill>
+                  <a:schemeClr val="tx1"/>
+                </a:solidFill>
+                <a:effectLst/>
+                <a:latin typeface="+mn-lt"/>
+                <a:ea typeface="+mn-ea"/>
+                <a:cs typeface="+mn-cs"/>
+              </a:rPr>
+              <a:t>infections staphylococciques</a:t>
+            </a:r>
+            <a:r>
+              <a:rPr lang="fr-FR" sz="1200" b="0" i="0" kern="1200" dirty="0">
+                <a:solidFill>
+                  <a:schemeClr val="tx1"/>
+                </a:solidFill>
+                <a:effectLst/>
+                <a:latin typeface="+mn-lt"/>
+                <a:ea typeface="+mn-ea"/>
+                <a:cs typeface="+mn-cs"/>
+              </a:rPr>
+              <a:t>. À elles deux, ces causes expliquent </a:t>
+            </a:r>
+            <a:r>
+              <a:rPr lang="fr-FR" sz="1200" b="1" i="0" kern="1200" dirty="0">
+                <a:solidFill>
+                  <a:schemeClr val="tx1"/>
+                </a:solidFill>
+                <a:effectLst/>
+                <a:latin typeface="+mn-lt"/>
+                <a:ea typeface="+mn-ea"/>
+                <a:cs typeface="+mn-cs"/>
+              </a:rPr>
+              <a:t>93 %</a:t>
+            </a:r>
+            <a:r>
+              <a:rPr lang="fr-FR" sz="1200" b="0" i="0" kern="1200" dirty="0">
+                <a:solidFill>
+                  <a:schemeClr val="tx1"/>
+                </a:solidFill>
+                <a:effectLst/>
+                <a:latin typeface="+mn-lt"/>
+                <a:ea typeface="+mn-ea"/>
+                <a:cs typeface="+mn-cs"/>
+              </a:rPr>
+              <a:t> des dermatoses bulleuses observées, ce qui hiérarchise d’emblée la démarche diagnostique. » « Les </a:t>
+            </a:r>
+            <a:r>
+              <a:rPr lang="fr-FR" sz="1200" b="1" i="0" kern="1200" dirty="0">
+                <a:solidFill>
+                  <a:schemeClr val="tx1"/>
+                </a:solidFill>
+                <a:effectLst/>
+                <a:latin typeface="+mn-lt"/>
+                <a:ea typeface="+mn-ea"/>
+                <a:cs typeface="+mn-cs"/>
+              </a:rPr>
+              <a:t>formes </a:t>
+            </a:r>
+            <a:r>
+              <a:rPr lang="fr-FR" sz="1200" b="1" i="0" kern="1200" dirty="0" err="1">
+                <a:solidFill>
+                  <a:schemeClr val="tx1"/>
+                </a:solidFill>
+                <a:effectLst/>
+                <a:latin typeface="+mn-lt"/>
+                <a:ea typeface="+mn-ea"/>
+                <a:cs typeface="+mn-cs"/>
+              </a:rPr>
+              <a:t>nécrolytiques</a:t>
+            </a:r>
+            <a:r>
+              <a:rPr lang="fr-FR" sz="1200" b="1" i="0" kern="1200" dirty="0">
+                <a:solidFill>
+                  <a:schemeClr val="tx1"/>
+                </a:solidFill>
+                <a:effectLst/>
+                <a:latin typeface="+mn-lt"/>
+                <a:ea typeface="+mn-ea"/>
+                <a:cs typeface="+mn-cs"/>
+              </a:rPr>
+              <a:t> épidermiques</a:t>
+            </a:r>
+            <a:r>
+              <a:rPr lang="fr-FR" sz="1200" b="0" i="0" kern="1200" dirty="0">
+                <a:solidFill>
+                  <a:schemeClr val="tx1"/>
+                </a:solidFill>
+                <a:effectLst/>
+                <a:latin typeface="+mn-lt"/>
+                <a:ea typeface="+mn-ea"/>
+                <a:cs typeface="+mn-cs"/>
+              </a:rPr>
+              <a:t> — Stevens‑Johnson et Lyell — pèsent </a:t>
+            </a:r>
+            <a:r>
+              <a:rPr lang="fr-FR" sz="1200" b="1" i="0" kern="1200" dirty="0">
+                <a:solidFill>
+                  <a:schemeClr val="tx1"/>
+                </a:solidFill>
+                <a:effectLst/>
+                <a:latin typeface="+mn-lt"/>
+                <a:ea typeface="+mn-ea"/>
+                <a:cs typeface="+mn-cs"/>
+              </a:rPr>
+              <a:t>44 %</a:t>
+            </a:r>
+            <a:r>
+              <a:rPr lang="fr-FR" sz="1200" b="0" i="0" kern="1200" dirty="0">
+                <a:solidFill>
+                  <a:schemeClr val="tx1"/>
+                </a:solidFill>
+                <a:effectLst/>
+                <a:latin typeface="+mn-lt"/>
+                <a:ea typeface="+mn-ea"/>
+                <a:cs typeface="+mn-cs"/>
+              </a:rPr>
+              <a:t> de l’ensemble des cas, soulignant un </a:t>
+            </a:r>
+            <a:r>
+              <a:rPr lang="fr-FR" sz="1200" b="1" i="0" kern="1200" dirty="0">
+                <a:solidFill>
+                  <a:schemeClr val="tx1"/>
+                </a:solidFill>
+                <a:effectLst/>
+                <a:latin typeface="+mn-lt"/>
+                <a:ea typeface="+mn-ea"/>
+                <a:cs typeface="+mn-cs"/>
+              </a:rPr>
+              <a:t>enjeu pronostique majeur</a:t>
+            </a:r>
+            <a:r>
+              <a:rPr lang="fr-FR" sz="1200" b="0" i="0" kern="1200" dirty="0">
+                <a:solidFill>
+                  <a:schemeClr val="tx1"/>
+                </a:solidFill>
+                <a:effectLst/>
+                <a:latin typeface="+mn-lt"/>
+                <a:ea typeface="+mn-ea"/>
+                <a:cs typeface="+mn-cs"/>
+              </a:rPr>
+              <a:t> dans notre contexte. » « Un </a:t>
+            </a:r>
+            <a:r>
+              <a:rPr lang="fr-FR" sz="1200" b="1" i="0" kern="1200" dirty="0">
+                <a:solidFill>
+                  <a:schemeClr val="tx1"/>
+                </a:solidFill>
+                <a:effectLst/>
+                <a:latin typeface="+mn-lt"/>
+                <a:ea typeface="+mn-ea"/>
+                <a:cs typeface="+mn-cs"/>
+              </a:rPr>
+              <a:t>gradient de gravité étiologique</a:t>
+            </a:r>
+            <a:r>
+              <a:rPr lang="fr-FR" sz="1200" b="0" i="0" kern="1200" dirty="0">
+                <a:solidFill>
+                  <a:schemeClr val="tx1"/>
+                </a:solidFill>
+                <a:effectLst/>
+                <a:latin typeface="+mn-lt"/>
+                <a:ea typeface="+mn-ea"/>
+                <a:cs typeface="+mn-cs"/>
+              </a:rPr>
+              <a:t> se dégage clairement : les toxidermies sont </a:t>
+            </a:r>
+            <a:r>
+              <a:rPr lang="fr-FR" sz="1200" b="1" i="0" kern="1200" dirty="0">
+                <a:solidFill>
+                  <a:schemeClr val="tx1"/>
+                </a:solidFill>
+                <a:effectLst/>
+                <a:latin typeface="+mn-lt"/>
+                <a:ea typeface="+mn-ea"/>
+                <a:cs typeface="+mn-cs"/>
+              </a:rPr>
+              <a:t>4,5 fois plus susceptibles</a:t>
+            </a:r>
+            <a:r>
+              <a:rPr lang="fr-FR" sz="1200" b="0" i="0" kern="1200" dirty="0">
+                <a:solidFill>
+                  <a:schemeClr val="tx1"/>
+                </a:solidFill>
+                <a:effectLst/>
+                <a:latin typeface="+mn-lt"/>
+                <a:ea typeface="+mn-ea"/>
+                <a:cs typeface="+mn-cs"/>
+              </a:rPr>
+              <a:t> d’être étendues que les formes infectieuses, ce qui en fait le </a:t>
+            </a:r>
+            <a:r>
+              <a:rPr lang="fr-FR" sz="1200" b="1" i="0" kern="1200" dirty="0">
+                <a:solidFill>
+                  <a:schemeClr val="tx1"/>
+                </a:solidFill>
+                <a:effectLst/>
+                <a:latin typeface="+mn-lt"/>
+                <a:ea typeface="+mn-ea"/>
+                <a:cs typeface="+mn-cs"/>
+              </a:rPr>
+              <a:t>principal moteur des atteintes sévères</a:t>
+            </a:r>
+            <a:r>
+              <a:rPr lang="fr-FR" sz="1200" b="0" i="0" kern="1200" dirty="0">
+                <a:solidFill>
+                  <a:schemeClr val="tx1"/>
+                </a:solidFill>
+                <a:effectLst/>
+                <a:latin typeface="+mn-lt"/>
+                <a:ea typeface="+mn-ea"/>
+                <a:cs typeface="+mn-cs"/>
+              </a:rPr>
+              <a:t>. » « À l’inverse, les infections staphylococciques restent </a:t>
+            </a:r>
+            <a:r>
+              <a:rPr lang="fr-FR" sz="1200" b="1" i="0" kern="1200" dirty="0">
+                <a:solidFill>
+                  <a:schemeClr val="tx1"/>
+                </a:solidFill>
+                <a:effectLst/>
+                <a:latin typeface="+mn-lt"/>
+                <a:ea typeface="+mn-ea"/>
+                <a:cs typeface="+mn-cs"/>
+              </a:rPr>
+              <a:t>majoritairement localisées</a:t>
+            </a:r>
+            <a:r>
+              <a:rPr lang="fr-FR" sz="1200" b="0" i="0" kern="1200" dirty="0">
+                <a:solidFill>
+                  <a:schemeClr val="tx1"/>
+                </a:solidFill>
+                <a:effectLst/>
+                <a:latin typeface="+mn-lt"/>
+                <a:ea typeface="+mn-ea"/>
+                <a:cs typeface="+mn-cs"/>
+              </a:rPr>
+              <a:t>, confirmant leur moindre gravité surfacique. » « Enfin, la </a:t>
+            </a:r>
+            <a:r>
+              <a:rPr lang="fr-FR" sz="1200" b="1" i="0" kern="1200" dirty="0">
+                <a:solidFill>
+                  <a:schemeClr val="tx1"/>
+                </a:solidFill>
+                <a:effectLst/>
+                <a:latin typeface="+mn-lt"/>
+                <a:ea typeface="+mn-ea"/>
+                <a:cs typeface="+mn-cs"/>
+              </a:rPr>
+              <a:t>prédominance masculine</a:t>
+            </a:r>
+            <a:r>
+              <a:rPr lang="fr-FR" sz="1200" b="0" i="0" kern="1200" dirty="0">
+                <a:solidFill>
+                  <a:schemeClr val="tx1"/>
+                </a:solidFill>
+                <a:effectLst/>
+                <a:latin typeface="+mn-lt"/>
+                <a:ea typeface="+mn-ea"/>
+                <a:cs typeface="+mn-cs"/>
+              </a:rPr>
+              <a:t>, modérée globalement, devient plus marquée dans les formes </a:t>
+            </a:r>
+            <a:r>
+              <a:rPr lang="fr-FR" sz="1200" b="0" i="0" kern="1200" dirty="0" err="1">
+                <a:solidFill>
+                  <a:schemeClr val="tx1"/>
+                </a:solidFill>
+                <a:effectLst/>
+                <a:latin typeface="+mn-lt"/>
+                <a:ea typeface="+mn-ea"/>
+                <a:cs typeface="+mn-cs"/>
+              </a:rPr>
+              <a:t>toxidermiques</a:t>
+            </a:r>
+            <a:r>
+              <a:rPr lang="fr-FR" sz="1200" b="0" i="0" kern="1200" dirty="0">
+                <a:solidFill>
+                  <a:schemeClr val="tx1"/>
+                </a:solidFill>
+                <a:effectLst/>
+                <a:latin typeface="+mn-lt"/>
+                <a:ea typeface="+mn-ea"/>
+                <a:cs typeface="+mn-cs"/>
+              </a:rPr>
+              <a:t> sévères, suggérant une </a:t>
+            </a:r>
+            <a:r>
+              <a:rPr lang="fr-FR" sz="1200" b="1" i="0" kern="1200" dirty="0">
+                <a:solidFill>
+                  <a:schemeClr val="tx1"/>
+                </a:solidFill>
+                <a:effectLst/>
+                <a:latin typeface="+mn-lt"/>
+                <a:ea typeface="+mn-ea"/>
+                <a:cs typeface="+mn-cs"/>
+              </a:rPr>
+              <a:t>vulnérabilité masculine</a:t>
+            </a:r>
+            <a:r>
+              <a:rPr lang="fr-FR" sz="1200" b="0" i="0" kern="1200" dirty="0">
+                <a:solidFill>
+                  <a:schemeClr val="tx1"/>
+                </a:solidFill>
+                <a:effectLst/>
+                <a:latin typeface="+mn-lt"/>
+                <a:ea typeface="+mn-ea"/>
+                <a:cs typeface="+mn-cs"/>
+              </a:rPr>
+              <a:t> aux formes extensives.</a:t>
+            </a:r>
+          </a:p>
+          <a:p>
+            <a:pPr fontAlgn="t"/>
+            <a:endParaRPr lang="fr-FR" sz="1200" b="0" i="0" kern="1200" dirty="0">
+              <a:solidFill>
+                <a:schemeClr val="tx1"/>
+              </a:solidFill>
+              <a:effectLst/>
+              <a:latin typeface="+mn-lt"/>
+              <a:ea typeface="+mn-ea"/>
+              <a:cs typeface="+mn-cs"/>
+            </a:endParaRPr>
           </a:p>
         </p:txBody>
       </p:sp>
@@ -14352,16 +14775,283 @@
           </a:bodyPr>
           <a:lstStyle/>
           <a:p>
-            <a:pPr marL="0" lvl="0" indent="0" algn="l" rtl="0">
-              <a:spcBef>
-                <a:spcPts val="0"/>
-              </a:spcBef>
-              <a:spcAft>
-                <a:spcPts val="0"/>
-              </a:spcAft>
-              <a:buNone/>
-            </a:pPr>
-            <a:endParaRPr/>
+            <a:pPr fontAlgn="t"/>
+            <a:r>
+              <a:rPr lang="fr-FR" sz="1200" b="0" i="0" kern="1200" dirty="0">
+                <a:solidFill>
+                  <a:schemeClr val="tx1"/>
+                </a:solidFill>
+                <a:effectLst/>
+                <a:latin typeface="+mn-lt"/>
+                <a:ea typeface="+mn-ea"/>
+                <a:cs typeface="+mn-cs"/>
+              </a:rPr>
+              <a:t>Nos résultats s’alignent sur les </a:t>
+            </a:r>
+            <a:r>
+              <a:rPr lang="fr-FR" sz="1200" b="1" i="0" kern="1200" dirty="0">
+                <a:solidFill>
+                  <a:schemeClr val="tx1"/>
+                </a:solidFill>
+                <a:effectLst/>
+                <a:latin typeface="+mn-lt"/>
+                <a:ea typeface="+mn-ea"/>
+                <a:cs typeface="+mn-cs"/>
+              </a:rPr>
+              <a:t>séries africaines</a:t>
+            </a:r>
+            <a:r>
+              <a:rPr lang="fr-FR" sz="1200" b="0" i="0" kern="1200" dirty="0">
+                <a:solidFill>
+                  <a:schemeClr val="tx1"/>
+                </a:solidFill>
+                <a:effectLst/>
+                <a:latin typeface="+mn-lt"/>
+                <a:ea typeface="+mn-ea"/>
+                <a:cs typeface="+mn-cs"/>
+              </a:rPr>
+              <a:t>, où les toxidermies dominent largement, contrairement aux séries occidentales pédiatriques davantage marquées par les dermatoses auto‑immunes. » « La </a:t>
+            </a:r>
+            <a:r>
+              <a:rPr lang="fr-FR" sz="1200" b="1" i="0" kern="1200" dirty="0">
+                <a:solidFill>
+                  <a:schemeClr val="tx1"/>
+                </a:solidFill>
+                <a:effectLst/>
+                <a:latin typeface="+mn-lt"/>
+                <a:ea typeface="+mn-ea"/>
+                <a:cs typeface="+mn-cs"/>
+              </a:rPr>
+              <a:t>forte représentation des SJS/TEN</a:t>
+            </a:r>
+            <a:r>
+              <a:rPr lang="fr-FR" sz="1200" b="0" i="0" kern="1200" dirty="0">
+                <a:solidFill>
+                  <a:schemeClr val="tx1"/>
+                </a:solidFill>
+                <a:effectLst/>
+                <a:latin typeface="+mn-lt"/>
+                <a:ea typeface="+mn-ea"/>
+                <a:cs typeface="+mn-cs"/>
+              </a:rPr>
+              <a:t> dépasse celle rapportée dans les pays à revenu élevé et reflète probablement un </a:t>
+            </a:r>
+            <a:r>
+              <a:rPr lang="fr-FR" sz="1200" b="1" i="0" kern="1200" dirty="0">
+                <a:solidFill>
+                  <a:schemeClr val="tx1"/>
+                </a:solidFill>
+                <a:effectLst/>
+                <a:latin typeface="+mn-lt"/>
+                <a:ea typeface="+mn-ea"/>
+                <a:cs typeface="+mn-cs"/>
+              </a:rPr>
+              <a:t>biais de gravité hospitalière</a:t>
+            </a:r>
+            <a:r>
+              <a:rPr lang="fr-FR" sz="1200" b="0" i="0" kern="1200" dirty="0">
+                <a:solidFill>
+                  <a:schemeClr val="tx1"/>
+                </a:solidFill>
+                <a:effectLst/>
+                <a:latin typeface="+mn-lt"/>
+                <a:ea typeface="+mn-ea"/>
+                <a:cs typeface="+mn-cs"/>
+              </a:rPr>
+              <a:t>, mais aussi une </a:t>
+            </a:r>
+            <a:r>
+              <a:rPr lang="fr-FR" sz="1200" b="1" i="0" kern="1200" dirty="0">
+                <a:solidFill>
+                  <a:schemeClr val="tx1"/>
+                </a:solidFill>
+                <a:effectLst/>
+                <a:latin typeface="+mn-lt"/>
+                <a:ea typeface="+mn-ea"/>
+                <a:cs typeface="+mn-cs"/>
+              </a:rPr>
+              <a:t>exposition médicamenteuse plus intense</a:t>
+            </a:r>
+            <a:r>
+              <a:rPr lang="fr-FR" sz="1200" b="0" i="0" kern="1200" dirty="0">
+                <a:solidFill>
+                  <a:schemeClr val="tx1"/>
+                </a:solidFill>
+                <a:effectLst/>
+                <a:latin typeface="+mn-lt"/>
+                <a:ea typeface="+mn-ea"/>
+                <a:cs typeface="+mn-cs"/>
+              </a:rPr>
+              <a:t>. » « Le rôle central des </a:t>
+            </a:r>
+            <a:r>
+              <a:rPr lang="fr-FR" sz="1200" b="1" i="0" kern="1200" dirty="0">
+                <a:solidFill>
+                  <a:schemeClr val="tx1"/>
+                </a:solidFill>
+                <a:effectLst/>
+                <a:latin typeface="+mn-lt"/>
+                <a:ea typeface="+mn-ea"/>
+                <a:cs typeface="+mn-cs"/>
+              </a:rPr>
+              <a:t>sulfamides antipaludiques</a:t>
+            </a:r>
+            <a:r>
+              <a:rPr lang="fr-FR" sz="1200" b="0" i="0" kern="1200" dirty="0">
+                <a:solidFill>
+                  <a:schemeClr val="tx1"/>
+                </a:solidFill>
+                <a:effectLst/>
+                <a:latin typeface="+mn-lt"/>
+                <a:ea typeface="+mn-ea"/>
+                <a:cs typeface="+mn-cs"/>
+              </a:rPr>
+              <a:t>, notamment la </a:t>
+            </a:r>
+            <a:r>
+              <a:rPr lang="fr-FR" sz="1200" b="0" i="0" kern="1200" dirty="0" err="1">
+                <a:solidFill>
+                  <a:schemeClr val="tx1"/>
+                </a:solidFill>
+                <a:effectLst/>
+                <a:latin typeface="+mn-lt"/>
+                <a:ea typeface="+mn-ea"/>
+                <a:cs typeface="+mn-cs"/>
+              </a:rPr>
+              <a:t>sulfadoxine</a:t>
+            </a:r>
+            <a:r>
+              <a:rPr lang="fr-FR" sz="1200" b="0" i="0" kern="1200" dirty="0">
+                <a:solidFill>
+                  <a:schemeClr val="tx1"/>
+                </a:solidFill>
+                <a:effectLst/>
+                <a:latin typeface="+mn-lt"/>
+                <a:ea typeface="+mn-ea"/>
+                <a:cs typeface="+mn-cs"/>
+              </a:rPr>
+              <a:t>‑pyriméthamine, est cohérent avec la </a:t>
+            </a:r>
+            <a:r>
+              <a:rPr lang="fr-FR" sz="1200" b="1" i="0" kern="1200" dirty="0">
+                <a:solidFill>
+                  <a:schemeClr val="tx1"/>
+                </a:solidFill>
+                <a:effectLst/>
+                <a:latin typeface="+mn-lt"/>
+                <a:ea typeface="+mn-ea"/>
+                <a:cs typeface="+mn-cs"/>
+              </a:rPr>
+              <a:t>pression thérapeutique liée à l’endémie palustre</a:t>
+            </a:r>
+            <a:r>
+              <a:rPr lang="fr-FR" sz="1200" b="0" i="0" kern="1200" dirty="0">
+                <a:solidFill>
+                  <a:schemeClr val="tx1"/>
+                </a:solidFill>
+                <a:effectLst/>
+                <a:latin typeface="+mn-lt"/>
+                <a:ea typeface="+mn-ea"/>
+                <a:cs typeface="+mn-cs"/>
+              </a:rPr>
+              <a:t> en Afrique de l’Ouest. » « Le poids des </a:t>
+            </a:r>
+            <a:r>
+              <a:rPr lang="fr-FR" sz="1200" b="1" i="0" kern="1200" dirty="0">
+                <a:solidFill>
+                  <a:schemeClr val="tx1"/>
+                </a:solidFill>
+                <a:effectLst/>
+                <a:latin typeface="+mn-lt"/>
+                <a:ea typeface="+mn-ea"/>
+                <a:cs typeface="+mn-cs"/>
+              </a:rPr>
+              <a:t>infections staphylococciques</a:t>
+            </a:r>
+            <a:r>
+              <a:rPr lang="fr-FR" sz="1200" b="0" i="0" kern="1200" dirty="0">
+                <a:solidFill>
+                  <a:schemeClr val="tx1"/>
+                </a:solidFill>
+                <a:effectLst/>
+                <a:latin typeface="+mn-lt"/>
+                <a:ea typeface="+mn-ea"/>
+                <a:cs typeface="+mn-cs"/>
+              </a:rPr>
+              <a:t> est conforme aux données tropicales, où l’impétigo bulleux demeure fréquent chez l’enfant. » « La </a:t>
+            </a:r>
+            <a:r>
+              <a:rPr lang="fr-FR" sz="1200" b="1" i="0" kern="1200" dirty="0">
+                <a:solidFill>
+                  <a:schemeClr val="tx1"/>
+                </a:solidFill>
+                <a:effectLst/>
+                <a:latin typeface="+mn-lt"/>
+                <a:ea typeface="+mn-ea"/>
+                <a:cs typeface="+mn-cs"/>
+              </a:rPr>
+              <a:t>rareté des dermatoses auto‑immunes</a:t>
+            </a:r>
+            <a:r>
+              <a:rPr lang="fr-FR" sz="1200" b="0" i="0" kern="1200" dirty="0">
+                <a:solidFill>
+                  <a:schemeClr val="tx1"/>
+                </a:solidFill>
+                <a:effectLst/>
+                <a:latin typeface="+mn-lt"/>
+                <a:ea typeface="+mn-ea"/>
+                <a:cs typeface="+mn-cs"/>
+              </a:rPr>
+              <a:t> observée ici est conforme aux constantes pédiatriques, mais pourrait être </a:t>
+            </a:r>
+            <a:r>
+              <a:rPr lang="fr-FR" sz="1200" b="1" i="0" kern="1200" dirty="0">
+                <a:solidFill>
+                  <a:schemeClr val="tx1"/>
+                </a:solidFill>
+                <a:effectLst/>
+                <a:latin typeface="+mn-lt"/>
+                <a:ea typeface="+mn-ea"/>
+                <a:cs typeface="+mn-cs"/>
+              </a:rPr>
+              <a:t>sous‑estimée</a:t>
+            </a:r>
+            <a:r>
+              <a:rPr lang="fr-FR" sz="1200" b="0" i="0" kern="1200" dirty="0">
+                <a:solidFill>
+                  <a:schemeClr val="tx1"/>
+                </a:solidFill>
+                <a:effectLst/>
+                <a:latin typeface="+mn-lt"/>
+                <a:ea typeface="+mn-ea"/>
+                <a:cs typeface="+mn-cs"/>
+              </a:rPr>
+              <a:t> en raison de l’accès limité aux examens </a:t>
+            </a:r>
+            <a:r>
+              <a:rPr lang="fr-FR" sz="1200" b="0" i="0" kern="1200" dirty="0" err="1">
+                <a:solidFill>
+                  <a:schemeClr val="tx1"/>
+                </a:solidFill>
+                <a:effectLst/>
+                <a:latin typeface="+mn-lt"/>
+                <a:ea typeface="+mn-ea"/>
+                <a:cs typeface="+mn-cs"/>
+              </a:rPr>
+              <a:t>immunopathologiques</a:t>
+            </a:r>
+            <a:r>
+              <a:rPr lang="fr-FR" sz="1200" b="0" i="0" kern="1200" dirty="0">
+                <a:solidFill>
+                  <a:schemeClr val="tx1"/>
+                </a:solidFill>
+                <a:effectLst/>
+                <a:latin typeface="+mn-lt"/>
+                <a:ea typeface="+mn-ea"/>
+                <a:cs typeface="+mn-cs"/>
+              </a:rPr>
+              <a:t>. </a:t>
+            </a:r>
           </a:p>
         </p:txBody>
       </p:sp>
@@ -14386,7 +15076,7 @@
         <p:cNvPr id="1" name="Shape 606">
           <a:extLst>
             <a:ext uri="{FF2B5EF4-FFF2-40B4-BE49-F238E27FC236}">
-              <a16:creationId xmlns:a16="http://schemas.microsoft.com/office/drawing/2014/main" id="{28EFF2DE-56ED-A6AE-D762-C831C1295E9D}"/>
+              <a16:creationId xmlns:a16="http://schemas.microsoft.com/office/drawing/2014/main" id="{90F87351-FE54-EE19-7322-4D179EECFED6}"/>
             </a:ext>
           </a:extLst>
         </p:cNvPr>
@@ -14406,7 +15096,7 @@
           <p:cNvPr id="607" name="Google Shape;607;ga7387b1acf_0_457:notes">
             <a:extLst>
               <a:ext uri="{FF2B5EF4-FFF2-40B4-BE49-F238E27FC236}">
-                <a16:creationId xmlns:a16="http://schemas.microsoft.com/office/drawing/2014/main" id="{EEC528EF-3F95-D3EC-9AD0-7668B54CF104}"/>
+                <a16:creationId xmlns:a16="http://schemas.microsoft.com/office/drawing/2014/main" id="{32CC6FD9-87DF-32C8-23D3-0D857CB9B709}"/>
               </a:ext>
             </a:extLst>
           </p:cNvPr>
@@ -14453,7 +15143,7 @@
           <p:cNvPr id="608" name="Google Shape;608;ga7387b1acf_0_457:notes">
             <a:extLst>
               <a:ext uri="{FF2B5EF4-FFF2-40B4-BE49-F238E27FC236}">
-                <a16:creationId xmlns:a16="http://schemas.microsoft.com/office/drawing/2014/main" id="{E0C8B542-B063-F004-6E10-1B48D077B117}"/>
+                <a16:creationId xmlns:a16="http://schemas.microsoft.com/office/drawing/2014/main" id="{AA45CCBA-BD47-EA57-8194-CEC64C192F02}"/>
               </a:ext>
             </a:extLst>
           </p:cNvPr>
@@ -14479,23 +15169,311 @@
           </a:bodyPr>
           <a:lstStyle/>
           <a:p>
-            <a:pPr marL="0" lvl="0" indent="0" algn="l" rtl="0">
-              <a:spcBef>
-                <a:spcPts val="0"/>
-              </a:spcBef>
-              <a:spcAft>
-                <a:spcPts val="0"/>
-              </a:spcAft>
-              <a:buNone/>
-            </a:pPr>
-            <a:endParaRPr/>
+            <a:pPr fontAlgn="t"/>
+            <a:r>
+              <a:rPr lang="fr-FR" sz="1200" b="0" i="0" kern="1200" dirty="0">
+                <a:solidFill>
+                  <a:schemeClr val="tx1"/>
+                </a:solidFill>
+                <a:effectLst/>
+                <a:latin typeface="+mn-lt"/>
+                <a:ea typeface="+mn-ea"/>
+                <a:cs typeface="+mn-cs"/>
+              </a:rPr>
+              <a:t>Sur le plan clinique, ces résultats imposent un </a:t>
+            </a:r>
+            <a:r>
+              <a:rPr lang="fr-FR" sz="1200" b="1" i="0" kern="1200" dirty="0">
+                <a:solidFill>
+                  <a:schemeClr val="tx1"/>
+                </a:solidFill>
+                <a:effectLst/>
+                <a:latin typeface="+mn-lt"/>
+                <a:ea typeface="+mn-ea"/>
+                <a:cs typeface="+mn-cs"/>
+              </a:rPr>
+              <a:t>interrogatoire médicamenteux systématique</a:t>
+            </a:r>
+            <a:r>
+              <a:rPr lang="fr-FR" sz="1200" b="0" i="0" kern="1200" dirty="0">
+                <a:solidFill>
+                  <a:schemeClr val="tx1"/>
+                </a:solidFill>
+                <a:effectLst/>
+                <a:latin typeface="+mn-lt"/>
+                <a:ea typeface="+mn-ea"/>
+                <a:cs typeface="+mn-cs"/>
+              </a:rPr>
+              <a:t>, une vigilance particulière vis‑à‑vis des </a:t>
+            </a:r>
+            <a:r>
+              <a:rPr lang="fr-FR" sz="1200" b="1" i="0" kern="1200" dirty="0">
+                <a:solidFill>
+                  <a:schemeClr val="tx1"/>
+                </a:solidFill>
+                <a:effectLst/>
+                <a:latin typeface="+mn-lt"/>
+                <a:ea typeface="+mn-ea"/>
+                <a:cs typeface="+mn-cs"/>
+              </a:rPr>
+              <a:t>antipaludiques</a:t>
+            </a:r>
+            <a:r>
+              <a:rPr lang="fr-FR" sz="1200" b="0" i="0" kern="1200" dirty="0">
+                <a:solidFill>
+                  <a:schemeClr val="tx1"/>
+                </a:solidFill>
+                <a:effectLst/>
+                <a:latin typeface="+mn-lt"/>
+                <a:ea typeface="+mn-ea"/>
+                <a:cs typeface="+mn-cs"/>
+              </a:rPr>
+              <a:t>, et une </a:t>
+            </a:r>
+            <a:r>
+              <a:rPr lang="fr-FR" sz="1200" b="1" i="0" kern="1200" dirty="0">
+                <a:solidFill>
+                  <a:schemeClr val="tx1"/>
+                </a:solidFill>
+                <a:effectLst/>
+                <a:latin typeface="+mn-lt"/>
+                <a:ea typeface="+mn-ea"/>
+                <a:cs typeface="+mn-cs"/>
+              </a:rPr>
+              <a:t>orientation rapide</a:t>
+            </a:r>
+            <a:r>
+              <a:rPr lang="fr-FR" sz="1200" b="0" i="0" kern="1200" dirty="0">
+                <a:solidFill>
+                  <a:schemeClr val="tx1"/>
+                </a:solidFill>
+                <a:effectLst/>
+                <a:latin typeface="+mn-lt"/>
+                <a:ea typeface="+mn-ea"/>
+                <a:cs typeface="+mn-cs"/>
+              </a:rPr>
+              <a:t> des formes étendues vers des structures spécialisées. </a:t>
+            </a:r>
+          </a:p>
+          <a:p>
+            <a:pPr fontAlgn="t"/>
+            <a:r>
+              <a:rPr lang="fr-FR" sz="1200" b="0" i="0" kern="1200" dirty="0">
+                <a:solidFill>
+                  <a:schemeClr val="tx1"/>
+                </a:solidFill>
+                <a:effectLst/>
+                <a:latin typeface="+mn-lt"/>
+                <a:ea typeface="+mn-ea"/>
+                <a:cs typeface="+mn-cs"/>
+              </a:rPr>
+              <a:t> En santé publique, ils plaident pour une </a:t>
+            </a:r>
+            <a:r>
+              <a:rPr lang="fr-FR" sz="1200" b="1" i="0" kern="1200" dirty="0">
+                <a:solidFill>
+                  <a:schemeClr val="tx1"/>
+                </a:solidFill>
+                <a:effectLst/>
+                <a:latin typeface="+mn-lt"/>
+                <a:ea typeface="+mn-ea"/>
+                <a:cs typeface="+mn-cs"/>
+              </a:rPr>
+              <a:t>prescription plus rationnelle</a:t>
+            </a:r>
+            <a:r>
+              <a:rPr lang="fr-FR" sz="1200" b="0" i="0" kern="1200" dirty="0">
+                <a:solidFill>
+                  <a:schemeClr val="tx1"/>
+                </a:solidFill>
+                <a:effectLst/>
+                <a:latin typeface="+mn-lt"/>
+                <a:ea typeface="+mn-ea"/>
+                <a:cs typeface="+mn-cs"/>
+              </a:rPr>
+              <a:t>, le </a:t>
+            </a:r>
+            <a:r>
+              <a:rPr lang="fr-FR" sz="1200" b="1" i="0" kern="1200" dirty="0">
+                <a:solidFill>
+                  <a:schemeClr val="tx1"/>
+                </a:solidFill>
+                <a:effectLst/>
+                <a:latin typeface="+mn-lt"/>
+                <a:ea typeface="+mn-ea"/>
+                <a:cs typeface="+mn-cs"/>
+              </a:rPr>
+              <a:t>renforcement de la pharmacovigilance pédiatrique</a:t>
+            </a:r>
+            <a:r>
+              <a:rPr lang="fr-FR" sz="1200" b="0" i="0" kern="1200" dirty="0">
+                <a:solidFill>
+                  <a:schemeClr val="tx1"/>
+                </a:solidFill>
+                <a:effectLst/>
+                <a:latin typeface="+mn-lt"/>
+                <a:ea typeface="+mn-ea"/>
+                <a:cs typeface="+mn-cs"/>
+              </a:rPr>
+              <a:t>, et des actions d’hygiène visant à réduire les infections cutanées bactériennes.</a:t>
+            </a:r>
+          </a:p>
+          <a:p>
+            <a:pPr fontAlgn="t"/>
+            <a:r>
+              <a:rPr lang="fr-FR" sz="1200" b="0" i="0" kern="1200" dirty="0">
+                <a:solidFill>
+                  <a:schemeClr val="tx1"/>
+                </a:solidFill>
+                <a:effectLst/>
+                <a:latin typeface="+mn-lt"/>
+                <a:ea typeface="+mn-ea"/>
+                <a:cs typeface="+mn-cs"/>
+              </a:rPr>
+              <a:t> Notre étude présente des </a:t>
+            </a:r>
+            <a:r>
+              <a:rPr lang="fr-FR" sz="1200" b="1" i="0" kern="1200" dirty="0">
+                <a:solidFill>
+                  <a:schemeClr val="tx1"/>
+                </a:solidFill>
+                <a:effectLst/>
+                <a:latin typeface="+mn-lt"/>
+                <a:ea typeface="+mn-ea"/>
+                <a:cs typeface="+mn-cs"/>
+              </a:rPr>
+              <a:t>limites importantes</a:t>
+            </a:r>
+            <a:r>
+              <a:rPr lang="fr-FR" sz="1200" b="0" i="0" kern="1200" dirty="0">
+                <a:solidFill>
+                  <a:schemeClr val="tx1"/>
+                </a:solidFill>
+                <a:effectLst/>
+                <a:latin typeface="+mn-lt"/>
+                <a:ea typeface="+mn-ea"/>
+                <a:cs typeface="+mn-cs"/>
+              </a:rPr>
+              <a:t> : caractère rétrospectif et monocentrique, </a:t>
+            </a:r>
+            <a:r>
+              <a:rPr lang="fr-FR" sz="1200" b="1" i="0" kern="1200" dirty="0">
+                <a:solidFill>
+                  <a:schemeClr val="tx1"/>
+                </a:solidFill>
+                <a:effectLst/>
+                <a:latin typeface="+mn-lt"/>
+                <a:ea typeface="+mn-ea"/>
+                <a:cs typeface="+mn-cs"/>
+              </a:rPr>
+              <a:t>effectif restreint</a:t>
+            </a:r>
+            <a:r>
+              <a:rPr lang="fr-FR" sz="1200" b="0" i="0" kern="1200" dirty="0">
+                <a:solidFill>
+                  <a:schemeClr val="tx1"/>
+                </a:solidFill>
+                <a:effectLst/>
+                <a:latin typeface="+mn-lt"/>
+                <a:ea typeface="+mn-ea"/>
+                <a:cs typeface="+mn-cs"/>
+              </a:rPr>
+              <a:t>, et absence de confirmation </a:t>
+            </a:r>
+            <a:r>
+              <a:rPr lang="fr-FR" sz="1200" b="0" i="0" kern="1200" dirty="0" err="1">
+                <a:solidFill>
+                  <a:schemeClr val="tx1"/>
+                </a:solidFill>
+                <a:effectLst/>
+                <a:latin typeface="+mn-lt"/>
+                <a:ea typeface="+mn-ea"/>
+                <a:cs typeface="+mn-cs"/>
+              </a:rPr>
+              <a:t>immunopathologique</a:t>
+            </a:r>
+            <a:r>
+              <a:rPr lang="fr-FR" sz="1200" b="0" i="0" kern="1200" dirty="0">
+                <a:solidFill>
+                  <a:schemeClr val="tx1"/>
+                </a:solidFill>
+                <a:effectLst/>
+                <a:latin typeface="+mn-lt"/>
+                <a:ea typeface="+mn-ea"/>
+                <a:cs typeface="+mn-cs"/>
+              </a:rPr>
+              <a:t> systématique, qui limitent la généralisation des résultats. </a:t>
+            </a:r>
+          </a:p>
+          <a:p>
+            <a:pPr fontAlgn="t"/>
+            <a:r>
+              <a:rPr lang="fr-FR" sz="1200" b="0" i="0" kern="1200" dirty="0">
+                <a:solidFill>
+                  <a:schemeClr val="tx1"/>
+                </a:solidFill>
+                <a:effectLst/>
+                <a:latin typeface="+mn-lt"/>
+                <a:ea typeface="+mn-ea"/>
+                <a:cs typeface="+mn-cs"/>
+              </a:rPr>
+              <a:t>Les </a:t>
+            </a:r>
+            <a:r>
+              <a:rPr lang="fr-FR" sz="1200" b="1" i="0" kern="1200" dirty="0">
+                <a:solidFill>
+                  <a:schemeClr val="tx1"/>
+                </a:solidFill>
+                <a:effectLst/>
+                <a:latin typeface="+mn-lt"/>
+                <a:ea typeface="+mn-ea"/>
+                <a:cs typeface="+mn-cs"/>
+              </a:rPr>
+              <a:t>perspectives</a:t>
+            </a:r>
+            <a:r>
+              <a:rPr lang="fr-FR" sz="1200" b="0" i="0" kern="1200" dirty="0">
+                <a:solidFill>
+                  <a:schemeClr val="tx1"/>
+                </a:solidFill>
+                <a:effectLst/>
+                <a:latin typeface="+mn-lt"/>
+                <a:ea typeface="+mn-ea"/>
+                <a:cs typeface="+mn-cs"/>
+              </a:rPr>
+              <a:t> incluent des études prospectives multicentriques, la mise en place de </a:t>
+            </a:r>
+            <a:r>
+              <a:rPr lang="fr-FR" sz="1200" b="1" i="0" kern="1200" dirty="0">
+                <a:solidFill>
+                  <a:schemeClr val="tx1"/>
+                </a:solidFill>
+                <a:effectLst/>
+                <a:latin typeface="+mn-lt"/>
+                <a:ea typeface="+mn-ea"/>
+                <a:cs typeface="+mn-cs"/>
+              </a:rPr>
+              <a:t>registres de pharmacovigilance</a:t>
+            </a:r>
+            <a:r>
+              <a:rPr lang="fr-FR" sz="1200" b="0" i="0" kern="1200" dirty="0">
+                <a:solidFill>
+                  <a:schemeClr val="tx1"/>
+                </a:solidFill>
+                <a:effectLst/>
+                <a:latin typeface="+mn-lt"/>
+                <a:ea typeface="+mn-ea"/>
+                <a:cs typeface="+mn-cs"/>
+              </a:rPr>
+              <a:t>, et l’exploration de facteurs génétiques et contextuels de susceptibilité aux toxidermies sévères chez l’enfant. </a:t>
+            </a:r>
           </a:p>
         </p:txBody>
       </p:sp>
     </p:spTree>
     <p:extLst>
       <p:ext uri="{BB962C8B-B14F-4D97-AF65-F5344CB8AC3E}">
-        <p14:creationId xmlns:p14="http://schemas.microsoft.com/office/powerpoint/2010/main" val="4067549022"/>
+        <p14:creationId xmlns:p14="http://schemas.microsoft.com/office/powerpoint/2010/main" val="3650462494"/>
       </p:ext>
     </p:extLst>
   </p:cSld>
@@ -14588,16 +15566,412 @@
           </a:bodyPr>
           <a:lstStyle/>
           <a:p>
-            <a:pPr marL="0" lvl="0" indent="0" algn="l" rtl="0">
-              <a:spcBef>
-                <a:spcPts val="0"/>
-              </a:spcBef>
-              <a:spcAft>
-                <a:spcPts val="0"/>
-              </a:spcAft>
-              <a:buNone/>
-            </a:pPr>
-            <a:endParaRPr/>
+            <a:pPr fontAlgn="t"/>
+            <a:r>
+              <a:rPr lang="fr-FR" sz="1200" b="1" i="0" kern="1200" dirty="0">
+                <a:solidFill>
+                  <a:schemeClr val="tx1"/>
+                </a:solidFill>
+                <a:effectLst/>
+                <a:latin typeface="+mn-lt"/>
+                <a:ea typeface="+mn-ea"/>
+                <a:cs typeface="+mn-cs"/>
+              </a:rPr>
+              <a:t>Introduction</a:t>
+            </a:r>
+          </a:p>
+          <a:p>
+            <a:pPr fontAlgn="t"/>
+            <a:r>
+              <a:rPr lang="fr-FR" sz="1200" b="0" i="0" kern="1200" dirty="0">
+                <a:solidFill>
+                  <a:schemeClr val="tx1"/>
+                </a:solidFill>
+                <a:effectLst/>
+                <a:latin typeface="+mn-lt"/>
+                <a:ea typeface="+mn-ea"/>
+                <a:cs typeface="+mn-cs"/>
+              </a:rPr>
+              <a:t>« Pour conclure, je rappelle que les dermatoses bulleuses constituent un </a:t>
+            </a:r>
+            <a:r>
+              <a:rPr lang="fr-FR" sz="1200" b="1" i="0" kern="1200" dirty="0">
+                <a:solidFill>
+                  <a:schemeClr val="tx1"/>
+                </a:solidFill>
+                <a:effectLst/>
+                <a:latin typeface="+mn-lt"/>
+                <a:ea typeface="+mn-ea"/>
+                <a:cs typeface="+mn-cs"/>
+              </a:rPr>
+              <a:t>ensemble hétérogène</a:t>
+            </a:r>
+            <a:r>
+              <a:rPr lang="fr-FR" sz="1200" b="0" i="0" kern="1200" dirty="0">
+                <a:solidFill>
+                  <a:schemeClr val="tx1"/>
+                </a:solidFill>
+                <a:effectLst/>
+                <a:latin typeface="+mn-lt"/>
+                <a:ea typeface="+mn-ea"/>
+                <a:cs typeface="+mn-cs"/>
+              </a:rPr>
+              <a:t> de pathologies cutanées et muqueuses, rares mais </a:t>
+            </a:r>
+            <a:r>
+              <a:rPr lang="fr-FR" sz="1200" b="1" i="0" kern="1200" dirty="0">
+                <a:solidFill>
+                  <a:schemeClr val="tx1"/>
+                </a:solidFill>
+                <a:effectLst/>
+                <a:latin typeface="+mn-lt"/>
+                <a:ea typeface="+mn-ea"/>
+                <a:cs typeface="+mn-cs"/>
+              </a:rPr>
+              <a:t>potentiellement graves</a:t>
+            </a:r>
+            <a:r>
+              <a:rPr lang="fr-FR" sz="1200" b="0" i="0" kern="1200" dirty="0">
+                <a:solidFill>
+                  <a:schemeClr val="tx1"/>
+                </a:solidFill>
+                <a:effectLst/>
+                <a:latin typeface="+mn-lt"/>
+                <a:ea typeface="+mn-ea"/>
+                <a:cs typeface="+mn-cs"/>
+              </a:rPr>
+              <a:t>, en particulier dans les formes </a:t>
+            </a:r>
+            <a:r>
+              <a:rPr lang="fr-FR" sz="1200" b="0" i="0" kern="1200" dirty="0" err="1">
+                <a:solidFill>
+                  <a:schemeClr val="tx1"/>
+                </a:solidFill>
+                <a:effectLst/>
+                <a:latin typeface="+mn-lt"/>
+                <a:ea typeface="+mn-ea"/>
+                <a:cs typeface="+mn-cs"/>
+              </a:rPr>
+              <a:t>nécrolytiques</a:t>
+            </a:r>
+            <a:r>
+              <a:rPr lang="fr-FR" sz="1200" b="0" i="0" kern="1200" dirty="0">
+                <a:solidFill>
+                  <a:schemeClr val="tx1"/>
+                </a:solidFill>
+                <a:effectLst/>
+                <a:latin typeface="+mn-lt"/>
+                <a:ea typeface="+mn-ea"/>
+                <a:cs typeface="+mn-cs"/>
+              </a:rPr>
+              <a:t>. Dans notre contexte sub‑saharien, les données locales restent limitées, ce qui justifiait la réalisation de ce travail au CNHU‑HKM de Cotonou. »</a:t>
+            </a:r>
+          </a:p>
+          <a:p>
+            <a:pPr fontAlgn="t"/>
+            <a:r>
+              <a:rPr lang="fr-FR" sz="1200" b="1" i="0" kern="1200" dirty="0">
+                <a:solidFill>
+                  <a:schemeClr val="tx1"/>
+                </a:solidFill>
+                <a:effectLst/>
+                <a:latin typeface="+mn-lt"/>
+                <a:ea typeface="+mn-ea"/>
+                <a:cs typeface="+mn-cs"/>
+              </a:rPr>
+              <a:t>Méthodes</a:t>
+            </a:r>
+          </a:p>
+          <a:p>
+            <a:pPr fontAlgn="t"/>
+            <a:r>
+              <a:rPr lang="fr-FR" sz="1200" b="0" i="0" kern="1200" dirty="0">
+                <a:solidFill>
+                  <a:schemeClr val="tx1"/>
+                </a:solidFill>
+                <a:effectLst/>
+                <a:latin typeface="+mn-lt"/>
+                <a:ea typeface="+mn-ea"/>
+                <a:cs typeface="+mn-cs"/>
+              </a:rPr>
+              <a:t>« Nous avons mené une </a:t>
+            </a:r>
+            <a:r>
+              <a:rPr lang="fr-FR" sz="1200" b="1" i="0" kern="1200" dirty="0">
+                <a:solidFill>
+                  <a:schemeClr val="tx1"/>
+                </a:solidFill>
+                <a:effectLst/>
+                <a:latin typeface="+mn-lt"/>
+                <a:ea typeface="+mn-ea"/>
+                <a:cs typeface="+mn-cs"/>
+              </a:rPr>
+              <a:t>étude transversale, rétrospective et descriptive</a:t>
+            </a:r>
+            <a:r>
+              <a:rPr lang="fr-FR" sz="1200" b="0" i="0" kern="1200" dirty="0">
+                <a:solidFill>
+                  <a:schemeClr val="tx1"/>
+                </a:solidFill>
+                <a:effectLst/>
+                <a:latin typeface="+mn-lt"/>
+                <a:ea typeface="+mn-ea"/>
+                <a:cs typeface="+mn-cs"/>
+              </a:rPr>
+              <a:t> au CNHU‑HKM, couvrant une période de </a:t>
+            </a:r>
+            <a:r>
+              <a:rPr lang="fr-FR" sz="1200" b="1" i="0" kern="1200" dirty="0">
+                <a:solidFill>
+                  <a:schemeClr val="tx1"/>
+                </a:solidFill>
+                <a:effectLst/>
+                <a:latin typeface="+mn-lt"/>
+                <a:ea typeface="+mn-ea"/>
+                <a:cs typeface="+mn-cs"/>
+              </a:rPr>
+              <a:t>janvier 2016 à mars 2026</a:t>
+            </a:r>
+            <a:r>
+              <a:rPr lang="fr-FR" sz="1200" b="0" i="0" kern="1200" dirty="0">
+                <a:solidFill>
+                  <a:schemeClr val="tx1"/>
+                </a:solidFill>
+                <a:effectLst/>
+                <a:latin typeface="+mn-lt"/>
+                <a:ea typeface="+mn-ea"/>
+                <a:cs typeface="+mn-cs"/>
+              </a:rPr>
+              <a:t>, à partir des registres de consultations dermatologiques. L’analyse était strictement descriptive, avec les limites inhérentes à un recueil rétrospectif et monocentrique. »</a:t>
+            </a:r>
+          </a:p>
+          <a:p>
+            <a:pPr fontAlgn="t"/>
+            <a:r>
+              <a:rPr lang="fr-FR" sz="1200" b="1" i="0" kern="1200" dirty="0">
+                <a:solidFill>
+                  <a:schemeClr val="tx1"/>
+                </a:solidFill>
+                <a:effectLst/>
+                <a:latin typeface="+mn-lt"/>
+                <a:ea typeface="+mn-ea"/>
+                <a:cs typeface="+mn-cs"/>
+              </a:rPr>
+              <a:t>Résultats</a:t>
+            </a:r>
+          </a:p>
+          <a:p>
+            <a:pPr fontAlgn="t"/>
+            <a:r>
+              <a:rPr lang="fr-FR" sz="1200" b="0" i="0" kern="1200" dirty="0">
+                <a:solidFill>
+                  <a:schemeClr val="tx1"/>
+                </a:solidFill>
+                <a:effectLst/>
+                <a:latin typeface="+mn-lt"/>
+                <a:ea typeface="+mn-ea"/>
+                <a:cs typeface="+mn-cs"/>
+              </a:rPr>
+              <a:t>« Les résultats montrent une </a:t>
+            </a:r>
+            <a:r>
+              <a:rPr lang="fr-FR" sz="1200" b="1" i="0" kern="1200" dirty="0">
+                <a:solidFill>
+                  <a:schemeClr val="tx1"/>
+                </a:solidFill>
+                <a:effectLst/>
+                <a:latin typeface="+mn-lt"/>
+                <a:ea typeface="+mn-ea"/>
+                <a:cs typeface="+mn-cs"/>
+              </a:rPr>
+              <a:t>domination nette des toxidermies</a:t>
+            </a:r>
+            <a:r>
+              <a:rPr lang="fr-FR" sz="1200" b="0" i="0" kern="1200" dirty="0">
+                <a:solidFill>
+                  <a:schemeClr val="tx1"/>
+                </a:solidFill>
+                <a:effectLst/>
+                <a:latin typeface="+mn-lt"/>
+                <a:ea typeface="+mn-ea"/>
+                <a:cs typeface="+mn-cs"/>
+              </a:rPr>
+              <a:t>, suivies des infections staphylococciques, avec un </a:t>
+            </a:r>
+            <a:r>
+              <a:rPr lang="fr-FR" sz="1200" b="1" i="0" kern="1200" dirty="0">
+                <a:solidFill>
+                  <a:schemeClr val="tx1"/>
+                </a:solidFill>
+                <a:effectLst/>
+                <a:latin typeface="+mn-lt"/>
+                <a:ea typeface="+mn-ea"/>
+                <a:cs typeface="+mn-cs"/>
+              </a:rPr>
+              <a:t>poids majeur des formes </a:t>
+            </a:r>
+            <a:r>
+              <a:rPr lang="fr-FR" sz="1200" b="1" i="0" kern="1200" dirty="0" err="1">
+                <a:solidFill>
+                  <a:schemeClr val="tx1"/>
+                </a:solidFill>
+                <a:effectLst/>
+                <a:latin typeface="+mn-lt"/>
+                <a:ea typeface="+mn-ea"/>
+                <a:cs typeface="+mn-cs"/>
+              </a:rPr>
+              <a:t>nécrolytiques</a:t>
+            </a:r>
+            <a:r>
+              <a:rPr lang="fr-FR" sz="1200" b="1" i="0" kern="1200" dirty="0">
+                <a:solidFill>
+                  <a:schemeClr val="tx1"/>
+                </a:solidFill>
+                <a:effectLst/>
+                <a:latin typeface="+mn-lt"/>
+                <a:ea typeface="+mn-ea"/>
+                <a:cs typeface="+mn-cs"/>
+              </a:rPr>
+              <a:t> SJS/TEN</a:t>
+            </a:r>
+            <a:r>
+              <a:rPr lang="fr-FR" sz="1200" b="0" i="0" kern="1200" dirty="0">
+                <a:solidFill>
+                  <a:schemeClr val="tx1"/>
+                </a:solidFill>
+                <a:effectLst/>
+                <a:latin typeface="+mn-lt"/>
+                <a:ea typeface="+mn-ea"/>
+                <a:cs typeface="+mn-cs"/>
+              </a:rPr>
+              <a:t>. La gravité est clairement liée à l’étiologie médicamenteuse, les toxidermies étant responsables de l’essentiel des atteintes étendues, tandis que les formes infectieuses restent le plus souvent localisées. »</a:t>
+            </a:r>
+          </a:p>
+          <a:p>
+            <a:pPr fontAlgn="t"/>
+            <a:r>
+              <a:rPr lang="fr-FR" sz="1200" b="1" i="0" kern="1200" dirty="0">
+                <a:solidFill>
+                  <a:schemeClr val="tx1"/>
+                </a:solidFill>
+                <a:effectLst/>
+                <a:latin typeface="+mn-lt"/>
+                <a:ea typeface="+mn-ea"/>
+                <a:cs typeface="+mn-cs"/>
+              </a:rPr>
+              <a:t>Discussion</a:t>
+            </a:r>
+          </a:p>
+          <a:p>
+            <a:pPr fontAlgn="t"/>
+            <a:r>
+              <a:rPr lang="fr-FR" sz="1200" b="0" i="0" kern="1200" dirty="0">
+                <a:solidFill>
+                  <a:schemeClr val="tx1"/>
+                </a:solidFill>
+                <a:effectLst/>
+                <a:latin typeface="+mn-lt"/>
+                <a:ea typeface="+mn-ea"/>
+                <a:cs typeface="+mn-cs"/>
+              </a:rPr>
+              <a:t>« Ces données soulignent que le profil pédiatrique local est dominé par des </a:t>
+            </a:r>
+            <a:r>
+              <a:rPr lang="fr-FR" sz="1200" b="1" i="0" kern="1200" dirty="0">
+                <a:solidFill>
+                  <a:schemeClr val="tx1"/>
+                </a:solidFill>
+                <a:effectLst/>
+                <a:latin typeface="+mn-lt"/>
+                <a:ea typeface="+mn-ea"/>
+                <a:cs typeface="+mn-cs"/>
+              </a:rPr>
+              <a:t>causes acquises et largement évitables</a:t>
+            </a:r>
+            <a:r>
+              <a:rPr lang="fr-FR" sz="1200" b="0" i="0" kern="1200" dirty="0">
+                <a:solidFill>
+                  <a:schemeClr val="tx1"/>
+                </a:solidFill>
+                <a:effectLst/>
+                <a:latin typeface="+mn-lt"/>
+                <a:ea typeface="+mn-ea"/>
+                <a:cs typeface="+mn-cs"/>
+              </a:rPr>
+              <a:t>, ce qui impose une </a:t>
+            </a:r>
+            <a:r>
+              <a:rPr lang="fr-FR" sz="1200" b="1" i="0" kern="1200" dirty="0">
+                <a:solidFill>
+                  <a:schemeClr val="tx1"/>
+                </a:solidFill>
+                <a:effectLst/>
+                <a:latin typeface="+mn-lt"/>
+                <a:ea typeface="+mn-ea"/>
+                <a:cs typeface="+mn-cs"/>
+              </a:rPr>
+              <a:t>hiérarchisation diagnostique centrée sur l’interrogatoire médicamenteux</a:t>
+            </a:r>
+            <a:r>
+              <a:rPr lang="fr-FR" sz="1200" b="0" i="0" kern="1200" dirty="0">
+                <a:solidFill>
+                  <a:schemeClr val="tx1"/>
+                </a:solidFill>
+                <a:effectLst/>
+                <a:latin typeface="+mn-lt"/>
+                <a:ea typeface="+mn-ea"/>
+                <a:cs typeface="+mn-cs"/>
+              </a:rPr>
+              <a:t>, une </a:t>
+            </a:r>
+            <a:r>
+              <a:rPr lang="fr-FR" sz="1200" b="1" i="0" kern="1200" dirty="0">
+                <a:solidFill>
+                  <a:schemeClr val="tx1"/>
+                </a:solidFill>
+                <a:effectLst/>
+                <a:latin typeface="+mn-lt"/>
+                <a:ea typeface="+mn-ea"/>
+                <a:cs typeface="+mn-cs"/>
+              </a:rPr>
+              <a:t>pharmacovigilance renforcée</a:t>
+            </a:r>
+            <a:r>
+              <a:rPr lang="fr-FR" sz="1200" b="0" i="0" kern="1200" dirty="0">
+                <a:solidFill>
+                  <a:schemeClr val="tx1"/>
+                </a:solidFill>
+                <a:effectLst/>
+                <a:latin typeface="+mn-lt"/>
+                <a:ea typeface="+mn-ea"/>
+                <a:cs typeface="+mn-cs"/>
+              </a:rPr>
+              <a:t>, et une </a:t>
+            </a:r>
+            <a:r>
+              <a:rPr lang="fr-FR" sz="1200" b="1" i="0" kern="1200" dirty="0">
+                <a:solidFill>
+                  <a:schemeClr val="tx1"/>
+                </a:solidFill>
+                <a:effectLst/>
+                <a:latin typeface="+mn-lt"/>
+                <a:ea typeface="+mn-ea"/>
+                <a:cs typeface="+mn-cs"/>
+              </a:rPr>
+              <a:t>orientation précoce des formes sévères</a:t>
+            </a:r>
+            <a:r>
+              <a:rPr lang="fr-FR" sz="1200" b="0" i="0" kern="1200" dirty="0">
+                <a:solidFill>
+                  <a:schemeClr val="tx1"/>
+                </a:solidFill>
+                <a:effectLst/>
+                <a:latin typeface="+mn-lt"/>
+                <a:ea typeface="+mn-ea"/>
+                <a:cs typeface="+mn-cs"/>
+              </a:rPr>
+              <a:t>. Malgré ses limites, cette étude constitue une base pour de futures recherches prospectives multicentriques et pour l’adaptation des stratégies de prise en charge en contexte subsaharien. »</a:t>
+            </a:r>
           </a:p>
         </p:txBody>
       </p:sp>
@@ -14724,115 +16098,6 @@
 </file>
 
 <file path=ppt/notesSlides/notesSlide18.xml><?xml version="1.0" encoding="utf-8"?>
-<p:notes xmlns:a="http://schemas.openxmlformats.org/drawingml/2006/main" xmlns:r="http://schemas.openxmlformats.org/officeDocument/2006/relationships" xmlns:p="http://schemas.openxmlformats.org/presentationml/2006/main" showMasterSp="0" showMasterPhAnim="0">
-  <p:cSld>
-    <p:spTree>
-      <p:nvGrpSpPr>
-        <p:cNvPr id="1" name="Shape 606"/>
-        <p:cNvGrpSpPr/>
-        <p:nvPr/>
-      </p:nvGrpSpPr>
-      <p:grpSpPr>
-        <a:xfrm>
-          <a:off x="0" y="0"/>
-          <a:ext cx="0" cy="0"/>
-          <a:chOff x="0" y="0"/>
-          <a:chExt cx="0" cy="0"/>
-        </a:xfrm>
-      </p:grpSpPr>
-      <p:sp>
-        <p:nvSpPr>
-          <p:cNvPr id="607" name="Google Shape;607;ga7387b1acf_0_457:notes"/>
-          <p:cNvSpPr>
-            <a:spLocks noGrp="1" noRot="1" noChangeAspect="1"/>
-          </p:cNvSpPr>
-          <p:nvPr>
-            <p:ph type="sldImg" idx="2"/>
-          </p:nvPr>
-        </p:nvSpPr>
-        <p:spPr>
-          <a:xfrm>
-            <a:off x="381000" y="685800"/>
-            <a:ext cx="6096000" cy="3429000"/>
-          </a:xfrm>
-          <a:custGeom>
-            <a:avLst/>
-            <a:gdLst/>
-            <a:ahLst/>
-            <a:cxnLst/>
-            <a:rect l="l" t="t" r="r" b="b"/>
-            <a:pathLst>
-              <a:path w="120000" h="120000" extrusionOk="0">
-                <a:moveTo>
-                  <a:pt x="0" y="0"/>
-                </a:moveTo>
-                <a:lnTo>
-                  <a:pt x="120000" y="0"/>
-                </a:lnTo>
-                <a:lnTo>
-                  <a:pt x="120000" y="120000"/>
-                </a:lnTo>
-                <a:lnTo>
-                  <a:pt x="0" y="120000"/>
-                </a:lnTo>
-                <a:close/>
-              </a:path>
-            </a:pathLst>
-          </a:custGeom>
-        </p:spPr>
-      </p:sp>
-      <p:sp>
-        <p:nvSpPr>
-          <p:cNvPr id="608" name="Google Shape;608;ga7387b1acf_0_457:notes"/>
-          <p:cNvSpPr txBox="1">
-            <a:spLocks noGrp="1"/>
-          </p:cNvSpPr>
-          <p:nvPr>
-            <p:ph type="body" idx="1"/>
-          </p:nvPr>
-        </p:nvSpPr>
-        <p:spPr>
-          <a:xfrm>
-            <a:off x="685800" y="4343400"/>
-            <a:ext cx="5486400" cy="4114800"/>
-          </a:xfrm>
-          <a:prstGeom prst="rect">
-            <a:avLst/>
-          </a:prstGeom>
-        </p:spPr>
-        <p:txBody>
-          <a:bodyPr spcFirstLastPara="1" wrap="square" lIns="91425" tIns="91425" rIns="91425" bIns="91425" anchor="t" anchorCtr="0">
-            <a:noAutofit/>
-          </a:bodyPr>
-          <a:lstStyle/>
-          <a:p>
-            <a:pPr marL="0" lvl="0" indent="0" algn="l" rtl="0">
-              <a:spcBef>
-                <a:spcPts val="0"/>
-              </a:spcBef>
-              <a:spcAft>
-                <a:spcPts val="0"/>
-              </a:spcAft>
-              <a:buNone/>
-            </a:pPr>
-            <a:endParaRPr/>
-          </a:p>
-        </p:txBody>
-      </p:sp>
-    </p:spTree>
-    <p:extLst>
-      <p:ext uri="{BB962C8B-B14F-4D97-AF65-F5344CB8AC3E}">
-        <p14:creationId xmlns:p14="http://schemas.microsoft.com/office/powerpoint/2010/main" val="571616097"/>
-      </p:ext>
-    </p:extLst>
-  </p:cSld>
-  <p:clrMapOvr>
-    <a:masterClrMapping/>
-  </p:clrMapOvr>
-</p:notes>
-</file>
-
-<file path=ppt/notesSlides/notesSlide19.xml><?xml version="1.0" encoding="utf-8"?>
 <p:notes xmlns:a="http://schemas.openxmlformats.org/drawingml/2006/main" xmlns:r="http://schemas.openxmlformats.org/officeDocument/2006/relationships" xmlns:p="http://schemas.openxmlformats.org/presentationml/2006/main" showMasterSp="0" showMasterPhAnim="0">
   <p:cSld>
     <p:spTree>
@@ -15616,7 +16881,19 @@
             </a:r>
             <a:r>
               <a:rPr lang="fr-FR" dirty="0"/>
-              <a:t> : ont été inclus les dossiers de patients chez qui le diagnostic d'une dermatose bulleuse a été posé en consultation dermatologique, sur la base des éléments cliniques consignés dans les registres.</a:t>
+              <a:t> : ont été inclus les dossiers de patients </a:t>
+            </a:r>
+            <a:r>
+              <a:rPr lang="fr-FR" sz="1200" kern="0" dirty="0">
+                <a:effectLst/>
+                <a:ea typeface="Times New Roman" panose="02020603050405020304" pitchFamily="18" charset="0"/>
+                <a:cs typeface="Times New Roman" panose="02020603050405020304" pitchFamily="18" charset="0"/>
+              </a:rPr>
+              <a:t>(enfants de 18 ans et moins) </a:t>
+            </a:r>
+            <a:r>
+              <a:rPr lang="fr-FR" dirty="0"/>
+              <a:t>chez qui le diagnostic d'une dermatose bulleuse a été posé en consultation dermatologique, sur la base des éléments cliniques consignés dans les registres.</a:t>
             </a:r>
           </a:p>
           <a:p>
@@ -21857,8 +23134,8 @@
         </p:nvSpPr>
         <p:spPr>
           <a:xfrm>
-            <a:off x="0" y="2381662"/>
-            <a:ext cx="11986158" cy="1987077"/>
+            <a:off x="0" y="2146852"/>
+            <a:ext cx="11986158" cy="2221887"/>
           </a:xfrm>
           <a:prstGeom prst="rect">
             <a:avLst/>
@@ -21894,16 +23171,16 @@
               </a:spcBef>
             </a:pPr>
             <a:r>
-              <a:rPr lang="fr-FR" sz="4400" b="1" dirty="0">
+              <a:rPr lang="fr-FR" sz="4000" b="1" dirty="0">
                 <a:solidFill>
                   <a:srgbClr val="005B2C"/>
                 </a:solidFill>
                 <a:latin typeface="Arial" panose="020B0604020202020204" pitchFamily="34" charset="0"/>
                 <a:cs typeface="Arial" panose="020B0604020202020204" pitchFamily="34" charset="0"/>
               </a:rPr>
-              <a:t>CO 8 – Panorama des dermatoses bulleuses du sujet âgé vues en consultation dermatologique au CNHU/HKM de Cotonou</a:t>
-            </a:r>
-            <a:endParaRPr lang="fr-FR" b="1" dirty="0">
+              <a:t>CO 8 – Panorama des dermatoses bulleuses du sujet âgé de 18 ans et moins vues en consultation dermatologique au CNHU/HKM de Cotonou</a:t>
+            </a:r>
+            <a:endParaRPr lang="fr-FR" sz="5400" b="1" dirty="0">
               <a:solidFill>
                 <a:srgbClr val="005B2C"/>
               </a:solidFill>
@@ -21931,7 +23208,7 @@
         </p:nvSpPr>
         <p:spPr>
           <a:xfrm>
-            <a:off x="609600" y="4516179"/>
+            <a:off x="609600" y="4644470"/>
             <a:ext cx="11209671" cy="499116"/>
           </a:xfrm>
           <a:prstGeom prst="rect">
@@ -23100,7 +24377,7 @@
                 <a:latin typeface="Arial" panose="020B0604020202020204" pitchFamily="34" charset="0"/>
                 <a:cs typeface="Arial" panose="020B0604020202020204" pitchFamily="34" charset="0"/>
               </a:rPr>
-              <a:t>Étendue lésionnelle des dermatoses bulleuses gériatriques : stratification par surface corporelle atteinte</a:t>
+              <a:t>Étendue lésionnelle des dermatoses bulleuses pédiatriques : stratification par surface corporelle atteinte</a:t>
             </a:r>
           </a:p>
         </p:txBody>
@@ -23782,8 +25059,8 @@
         </p:nvSpPr>
         <p:spPr>
           <a:xfrm>
-            <a:off x="914400" y="75274"/>
-            <a:ext cx="10177669" cy="910110"/>
+            <a:off x="914400" y="55690"/>
+            <a:ext cx="10439400" cy="910110"/>
           </a:xfrm>
           <a:prstGeom prst="rect">
             <a:avLst/>
@@ -23826,7 +25103,7 @@
                 <a:latin typeface="Arial" panose="020B0604020202020204" pitchFamily="34" charset="0"/>
                 <a:cs typeface="Arial" panose="020B0604020202020204" pitchFamily="34" charset="0"/>
               </a:rPr>
-              <a:t>Étendue lésionnelle des dermatoses bulleuses gériatriques : stratification par surface corporelle atteinte</a:t>
+              <a:t>Étendue lésionnelle des dermatoses bulleuses pédiatriques : stratification par surface corporelle atteinte</a:t>
             </a:r>
           </a:p>
         </p:txBody>
@@ -23874,8 +25151,8 @@
         </p:nvSpPr>
         <p:spPr>
           <a:xfrm>
-            <a:off x="8370219" y="1154692"/>
-            <a:ext cx="3612986" cy="5140094"/>
+            <a:off x="7209182" y="848677"/>
+            <a:ext cx="4889755" cy="5674269"/>
           </a:xfrm>
           <a:prstGeom prst="roundRect">
             <a:avLst>
@@ -23905,14 +25182,38 @@
               </a:spcAft>
             </a:pPr>
             <a:r>
-              <a:rPr lang="fr-FR" sz="2800" b="1" cap="all">
+              <a:rPr lang="fr-FR" b="1" cap="all" dirty="0">
                 <a:solidFill>
                   <a:srgbClr val="C28300"/>
                 </a:solidFill>
                 <a:cs typeface="Arial" pitchFamily="34" charset="0"/>
               </a:rPr>
-              <a:t>▶ Point clé</a:t>
-            </a:r>
+              <a:t>▶</a:t>
+            </a:r>
+            <a:r>
+              <a:rPr lang="fr-FR" sz="2400" b="1" cap="all" dirty="0">
+                <a:solidFill>
+                  <a:srgbClr val="C28300"/>
+                </a:solidFill>
+                <a:cs typeface="Arial" pitchFamily="34" charset="0"/>
+              </a:rPr>
+              <a:t> </a:t>
+            </a:r>
+            <a:r>
+              <a:rPr lang="fr-FR" b="1" cap="all" dirty="0">
+                <a:solidFill>
+                  <a:srgbClr val="C28300"/>
+                </a:solidFill>
+                <a:cs typeface="Arial" pitchFamily="34" charset="0"/>
+              </a:rPr>
+              <a:t>Point clé</a:t>
+            </a:r>
+            <a:endParaRPr lang="fr-FR" sz="2400" b="1" cap="all" dirty="0">
+              <a:solidFill>
+                <a:srgbClr val="C28300"/>
+              </a:solidFill>
+              <a:cs typeface="Arial" pitchFamily="34" charset="0"/>
+            </a:endParaRPr>
           </a:p>
           <a:p>
             <a:pPr algn="l">
@@ -23921,7 +25222,7 @@
               </a:spcAft>
             </a:pPr>
             <a:r>
-              <a:rPr lang="fr-FR" b="1">
+              <a:rPr lang="fr-FR" sz="1600" b="1" dirty="0">
                 <a:solidFill>
                   <a:srgbClr val="005B2C"/>
                 </a:solidFill>
@@ -23937,7 +25238,7 @@
               </a:spcAft>
             </a:pPr>
             <a:r>
-              <a:rPr lang="fr-FR" sz="1600">
+              <a:rPr lang="fr-FR" sz="1400" dirty="0">
                 <a:solidFill>
                   <a:srgbClr val="1F1F1F"/>
                 </a:solidFill>
@@ -23946,7 +25247,7 @@
               <a:t>• </a:t>
             </a:r>
             <a:r>
-              <a:rPr lang="fr-FR" sz="1600" b="1">
+              <a:rPr lang="fr-FR" sz="1400" b="1" dirty="0">
                 <a:solidFill>
                   <a:srgbClr val="005B2C"/>
                 </a:solidFill>
@@ -23955,7 +25256,7 @@
               <a:t>Toxidermie : 27/43 (62,8 %)</a:t>
             </a:r>
             <a:r>
-              <a:rPr lang="fr-FR" sz="1600">
+              <a:rPr lang="fr-FR" sz="1400" dirty="0">
                 <a:solidFill>
                   <a:srgbClr val="1F1F1F"/>
                 </a:solidFill>
@@ -23971,7 +25272,7 @@
               </a:spcAft>
             </a:pPr>
             <a:r>
-              <a:rPr lang="fr-FR" sz="1600">
+              <a:rPr lang="fr-FR" sz="1400" dirty="0">
                 <a:solidFill>
                   <a:srgbClr val="1F1F1F"/>
                 </a:solidFill>
@@ -23980,7 +25281,7 @@
               <a:t>• </a:t>
             </a:r>
             <a:r>
-              <a:rPr lang="fr-FR" sz="1600" b="1">
+              <a:rPr lang="fr-FR" sz="1400" b="1" dirty="0">
                 <a:solidFill>
                   <a:srgbClr val="C28300"/>
                 </a:solidFill>
@@ -23989,7 +25290,7 @@
               <a:t>≥ 30 % = quasi exclusivement toxidermie : 10/12 (83,3 %)</a:t>
             </a:r>
             <a:r>
-              <a:rPr lang="fr-FR" sz="1600">
+              <a:rPr lang="fr-FR" sz="1400" dirty="0">
                 <a:solidFill>
                   <a:srgbClr val="1F1F1F"/>
                 </a:solidFill>
@@ -24005,7 +25306,7 @@
               </a:spcAft>
             </a:pPr>
             <a:r>
-              <a:rPr lang="fr-FR" sz="1600">
+              <a:rPr lang="fr-FR" sz="1400" dirty="0">
                 <a:solidFill>
                   <a:srgbClr val="1F1F1F"/>
                 </a:solidFill>
@@ -24014,7 +25315,7 @@
               <a:t>• Versant infectieux confiné aux formes localisées : </a:t>
             </a:r>
             <a:r>
-              <a:rPr lang="fr-FR" sz="1600" b="1">
+              <a:rPr lang="fr-FR" sz="1400" b="1" dirty="0">
                 <a:solidFill>
                   <a:srgbClr val="005B2C"/>
                 </a:solidFill>
@@ -24023,7 +25324,7 @@
               <a:t>11/13 ≤ 10 % (84,6 %)</a:t>
             </a:r>
             <a:r>
-              <a:rPr lang="fr-FR" sz="1600">
+              <a:rPr lang="fr-FR" sz="1400" dirty="0">
                 <a:solidFill>
                   <a:srgbClr val="1F1F1F"/>
                 </a:solidFill>
@@ -24039,7 +25340,7 @@
               </a:spcAft>
             </a:pPr>
             <a:r>
-              <a:rPr lang="fr-FR" sz="1600">
+              <a:rPr lang="fr-FR" sz="1400" dirty="0">
                 <a:solidFill>
                   <a:srgbClr val="1F1F1F"/>
                 </a:solidFill>
@@ -24048,7 +25349,7 @@
               <a:t>• </a:t>
             </a:r>
             <a:r>
-              <a:rPr lang="fr-FR" sz="1600" b="1">
+              <a:rPr lang="fr-FR" sz="1400" b="1" dirty="0">
                 <a:solidFill>
                   <a:srgbClr val="C28300"/>
                 </a:solidFill>
@@ -24057,7 +25358,7 @@
               <a:t>Formes étendues (≥ 11 %) : 19/27 (70,4 %) en toxidermie</a:t>
             </a:r>
             <a:r>
-              <a:rPr lang="fr-FR" sz="1600">
+              <a:rPr lang="fr-FR" sz="1400" dirty="0">
                 <a:solidFill>
                   <a:srgbClr val="1F1F1F"/>
                 </a:solidFill>
@@ -24073,7 +25374,7 @@
               </a:spcAft>
             </a:pPr>
             <a:r>
-              <a:rPr lang="fr-FR" sz="1600">
+              <a:rPr lang="fr-FR" sz="1400" dirty="0">
                 <a:solidFill>
                   <a:srgbClr val="1F1F1F"/>
                 </a:solidFill>
@@ -24082,7 +25383,7 @@
               <a:t>• Sex-ratio H/F majoré dans la </a:t>
             </a:r>
             <a:r>
-              <a:rPr lang="fr-FR" sz="1600" b="1">
+              <a:rPr lang="fr-FR" sz="1400" b="1" dirty="0">
                 <a:solidFill>
                   <a:srgbClr val="005B2C"/>
                 </a:solidFill>
@@ -24091,7 +25392,7 @@
               <a:t>toxidermie sévère ≥ 30 % : 6 H / 4 F (1,5)</a:t>
             </a:r>
             <a:r>
-              <a:rPr lang="fr-FR" sz="1600">
+              <a:rPr lang="fr-FR" sz="1400" dirty="0">
                 <a:solidFill>
                   <a:srgbClr val="1F1F1F"/>
                 </a:solidFill>
@@ -24107,7 +25408,7 @@
               </a:spcAft>
             </a:pPr>
             <a:r>
-              <a:rPr lang="fr-FR" sz="1600">
+              <a:rPr lang="fr-FR" sz="1400" dirty="0">
                 <a:solidFill>
                   <a:srgbClr val="1F1F1F"/>
                 </a:solidFill>
@@ -24116,7 +25417,7 @@
               <a:t>• Catégories rares (auto-immune + immunoallergique = 3 cas) : </a:t>
             </a:r>
             <a:r>
-              <a:rPr lang="fr-FR" sz="1600" b="1">
+              <a:rPr lang="fr-FR" sz="1400" b="1" dirty="0">
                 <a:solidFill>
                   <a:srgbClr val="C28300"/>
                 </a:solidFill>
@@ -24125,7 +25426,7 @@
               <a:t>3/3 en atteinte ≥ 11 %</a:t>
             </a:r>
             <a:r>
-              <a:rPr lang="fr-FR" sz="1600">
+              <a:rPr lang="fr-FR" sz="1400" dirty="0">
                 <a:solidFill>
                   <a:srgbClr val="1F1F1F"/>
                 </a:solidFill>
@@ -24141,7 +25442,7 @@
               </a:spcAft>
             </a:pPr>
             <a:r>
-              <a:rPr lang="fr-FR" sz="1600" i="1">
+              <a:rPr lang="fr-FR" sz="1400" i="1" dirty="0">
                 <a:solidFill>
                   <a:srgbClr val="C28300"/>
                 </a:solidFill>
@@ -24167,14 +25468,14 @@
           <p:nvPr>
             <p:extLst>
               <p:ext uri="{D42A27DB-BD31-4B8C-83A1-F6EECF244321}">
-                <p14:modId xmlns:p14="http://schemas.microsoft.com/office/powerpoint/2010/main" val="2532399912"/>
+                <p14:modId xmlns:p14="http://schemas.microsoft.com/office/powerpoint/2010/main" val="3309074247"/>
               </p:ext>
             </p:extLst>
           </p:nvPr>
         </p:nvGraphicFramePr>
         <p:xfrm>
-          <a:off x="208795" y="1154692"/>
-          <a:ext cx="8121964" cy="5140093"/>
+          <a:off x="36843" y="844151"/>
+          <a:ext cx="7132884" cy="5800445"/>
         </p:xfrm>
         <a:graphic>
           <a:graphicData uri="http://schemas.openxmlformats.org/drawingml/2006/table">
@@ -24183,35 +25484,35 @@
                 <a:tableStyleId>{E929F9F4-4A8F-4326-A1B4-22849713DDAB}</a:tableStyleId>
               </a:tblPr>
               <a:tblGrid>
-                <a:gridCol w="1943979">
+                <a:gridCol w="1909008">
                   <a:extLst>
                     <a:ext uri="{9D8B030D-6E8A-4147-A177-3AD203B41FA5}">
                       <a16:colId xmlns:a16="http://schemas.microsoft.com/office/drawing/2014/main" val="2117274340"/>
                     </a:ext>
                   </a:extLst>
                 </a:gridCol>
-                <a:gridCol w="954112">
+                <a:gridCol w="810601">
                   <a:extLst>
                     <a:ext uri="{9D8B030D-6E8A-4147-A177-3AD203B41FA5}">
                       <a16:colId xmlns:a16="http://schemas.microsoft.com/office/drawing/2014/main" val="2305889533"/>
                     </a:ext>
                   </a:extLst>
                 </a:gridCol>
-                <a:gridCol w="1449046">
+                <a:gridCol w="1231866">
                   <a:extLst>
                     <a:ext uri="{9D8B030D-6E8A-4147-A177-3AD203B41FA5}">
                       <a16:colId xmlns:a16="http://schemas.microsoft.com/office/drawing/2014/main" val="1055634230"/>
                     </a:ext>
                   </a:extLst>
                 </a:gridCol>
-                <a:gridCol w="2350134">
+                <a:gridCol w="1959975">
                   <a:extLst>
                     <a:ext uri="{9D8B030D-6E8A-4147-A177-3AD203B41FA5}">
                       <a16:colId xmlns:a16="http://schemas.microsoft.com/office/drawing/2014/main" val="2503329105"/>
                     </a:ext>
                   </a:extLst>
                 </a:gridCol>
-                <a:gridCol w="1424693">
+                <a:gridCol w="1221434">
                   <a:extLst>
                     <a:ext uri="{9D8B030D-6E8A-4147-A177-3AD203B41FA5}">
                       <a16:colId xmlns:a16="http://schemas.microsoft.com/office/drawing/2014/main" val="2102512187"/>
@@ -24219,22 +25520,34 @@
                   </a:extLst>
                 </a:gridCol>
               </a:tblGrid>
-              <a:tr h="335893">
+              <a:tr h="369803">
                 <a:tc>
                   <a:txBody>
                     <a:bodyPr/>
                     <a:lstStyle/>
                     <a:p>
-                      <a:pPr algn="l" fontAlgn="b">
+                      <a:pPr algn="ctr" fontAlgn="b">
                         <a:buNone/>
                       </a:pPr>
                       <a:r>
-                        <a:rPr lang="en-US" sz="1200" b="1" u="none" strike="noStrike">
+                        <a:rPr lang="en-US" sz="1600" b="1" u="none" strike="noStrike" dirty="0" err="1">
                           <a:effectLst/>
                         </a:rPr>
-                        <a:t>Catégorie de la dermatose</a:t>
+                        <a:t>Catégorie</a:t>
                       </a:r>
-                      <a:endParaRPr lang="en-US" sz="1200" b="1" i="0" u="none" strike="noStrike">
+                      <a:r>
+                        <a:rPr lang="en-US" sz="1600" b="1" u="none" strike="noStrike" dirty="0">
+                          <a:effectLst/>
+                        </a:rPr>
+                        <a:t> de la </a:t>
+                      </a:r>
+                      <a:r>
+                        <a:rPr lang="en-US" sz="1600" b="1" u="none" strike="noStrike" dirty="0" err="1">
+                          <a:effectLst/>
+                        </a:rPr>
+                        <a:t>dermatose</a:t>
+                      </a:r>
+                      <a:endParaRPr lang="en-US" sz="1600" b="1" i="0" u="none" strike="noStrike" dirty="0">
                         <a:solidFill>
                           <a:srgbClr val="FFFFFF"/>
                         </a:solidFill>
@@ -24250,16 +25563,16 @@
                     <a:bodyPr/>
                     <a:lstStyle/>
                     <a:p>
-                      <a:pPr algn="l" fontAlgn="b">
+                      <a:pPr algn="ctr" fontAlgn="b">
                         <a:buNone/>
                       </a:pPr>
                       <a:r>
-                        <a:rPr lang="en-US" sz="1200" b="1" u="none" strike="noStrike">
+                        <a:rPr lang="en-US" sz="1600" b="1" u="none" strike="noStrike">
                           <a:effectLst/>
                         </a:rPr>
                         <a:t>Sexe</a:t>
                       </a:r>
-                      <a:endParaRPr lang="en-US" sz="1200" b="1" i="0" u="none" strike="noStrike">
+                      <a:endParaRPr lang="en-US" sz="1600" b="1" i="0" u="none" strike="noStrike">
                         <a:solidFill>
                           <a:srgbClr val="FFFFFF"/>
                         </a:solidFill>
@@ -24275,16 +25588,16 @@
                     <a:bodyPr/>
                     <a:lstStyle/>
                     <a:p>
-                      <a:pPr algn="l" fontAlgn="b">
+                      <a:pPr algn="ctr" fontAlgn="b">
                         <a:buNone/>
                       </a:pPr>
                       <a:r>
-                        <a:rPr lang="en-US" sz="1200" b="1" u="none" strike="noStrike">
+                        <a:rPr lang="en-US" sz="1600" b="1" u="none" strike="noStrike">
                           <a:effectLst/>
                         </a:rPr>
                         <a:t>Tranche de surface</a:t>
                       </a:r>
-                      <a:endParaRPr lang="en-US" sz="1200" b="1" i="0" u="none" strike="noStrike">
+                      <a:endParaRPr lang="en-US" sz="1600" b="1" i="0" u="none" strike="noStrike">
                         <a:solidFill>
                           <a:srgbClr val="FFFFFF"/>
                         </a:solidFill>
@@ -24300,16 +25613,22 @@
                     <a:bodyPr/>
                     <a:lstStyle/>
                     <a:p>
-                      <a:pPr algn="l" fontAlgn="b">
+                      <a:pPr algn="ctr" fontAlgn="b">
                         <a:buNone/>
                       </a:pPr>
                       <a:r>
-                        <a:rPr lang="fr-FR" sz="1200" b="1" u="none" strike="noStrike">
+                        <a:rPr lang="fr-FR" sz="1600" b="1" u="none" strike="noStrike" dirty="0" err="1">
                           <a:effectLst/>
                         </a:rPr>
-                        <a:t>Repartition par Tranche de surface</a:t>
+                        <a:t>Repartition</a:t>
                       </a:r>
-                      <a:endParaRPr lang="fr-FR" sz="1200" b="1" i="0" u="none" strike="noStrike">
+                      <a:r>
+                        <a:rPr lang="fr-FR" sz="1600" b="1" u="none" strike="noStrike" dirty="0">
+                          <a:effectLst/>
+                        </a:rPr>
+                        <a:t> par Tranche de surface</a:t>
+                      </a:r>
+                      <a:endParaRPr lang="fr-FR" sz="1600" b="1" i="0" u="none" strike="noStrike" dirty="0">
                         <a:solidFill>
                           <a:srgbClr val="FFFFFF"/>
                         </a:solidFill>
@@ -24325,16 +25644,16 @@
                     <a:bodyPr/>
                     <a:lstStyle/>
                     <a:p>
-                      <a:pPr algn="l" fontAlgn="b">
+                      <a:pPr algn="ctr" fontAlgn="b">
                         <a:buNone/>
                       </a:pPr>
                       <a:r>
-                        <a:rPr lang="en-US" sz="1200" b="1" u="none" strike="noStrike">
+                        <a:rPr lang="en-US" sz="1600" b="1" u="none" strike="noStrike" dirty="0">
                           <a:effectLst/>
                         </a:rPr>
                         <a:t>%Tranche de surface</a:t>
                       </a:r>
-                      <a:endParaRPr lang="en-US" sz="1200" b="1" i="0" u="none" strike="noStrike">
+                      <a:endParaRPr lang="en-US" sz="1600" b="1" i="0" u="none" strike="noStrike" dirty="0">
                         <a:solidFill>
                           <a:srgbClr val="FFFFFF"/>
                         </a:solidFill>
@@ -24351,7 +25670,7 @@
                   </a:ext>
                 </a:extLst>
               </a:tr>
-              <a:tr h="200175">
+              <a:tr h="216582">
                 <a:tc>
                   <a:txBody>
                     <a:bodyPr/>
@@ -24361,12 +25680,12 @@
                         <a:buNone/>
                       </a:pPr>
                       <a:r>
-                        <a:rPr lang="en-US" sz="900" u="none" strike="noStrike">
+                        <a:rPr lang="en-US" sz="1400" b="1" u="none" strike="noStrike" dirty="0">
                           <a:effectLst/>
                         </a:rPr>
                         <a:t>Auto-immune</a:t>
                       </a:r>
-                      <a:endParaRPr lang="en-US" sz="900" b="1" i="0" u="none" strike="noStrike">
+                      <a:endParaRPr lang="en-US" sz="1400" b="1" i="0" u="none" strike="noStrike" dirty="0">
                         <a:solidFill>
                           <a:srgbClr val="FFFFFF"/>
                         </a:solidFill>
@@ -24386,12 +25705,12 @@
                         <a:buNone/>
                       </a:pPr>
                       <a:r>
-                        <a:rPr lang="en-US" sz="900" u="none" strike="noStrike">
+                        <a:rPr lang="en-US" sz="1100" u="none" strike="noStrike">
                           <a:effectLst/>
                         </a:rPr>
                         <a:t>Femme</a:t>
                       </a:r>
-                      <a:endParaRPr lang="en-US" sz="900" b="1" i="0" u="none" strike="noStrike">
+                      <a:endParaRPr lang="en-US" sz="1100" b="1" i="0" u="none" strike="noStrike">
                         <a:solidFill>
                           <a:srgbClr val="FFFFFF"/>
                         </a:solidFill>
@@ -24411,12 +25730,12 @@
                         <a:buNone/>
                       </a:pPr>
                       <a:r>
-                        <a:rPr lang="en-US" sz="900" u="none" strike="noStrike">
+                        <a:rPr lang="en-US" sz="1100" u="none" strike="noStrike">
                           <a:effectLst/>
                         </a:rPr>
                         <a:t>&gt;= 30%</a:t>
                       </a:r>
-                      <a:endParaRPr lang="en-US" sz="900" b="0" i="0" u="none" strike="noStrike">
+                      <a:endParaRPr lang="en-US" sz="1100" b="0" i="0" u="none" strike="noStrike">
                         <a:solidFill>
                           <a:srgbClr val="E0DEF1"/>
                         </a:solidFill>
@@ -24436,12 +25755,12 @@
                         <a:buNone/>
                       </a:pPr>
                       <a:r>
-                        <a:rPr lang="en-US" sz="900" u="none" strike="noStrike">
+                        <a:rPr lang="en-US" sz="1100" u="none" strike="noStrike">
                           <a:effectLst/>
                         </a:rPr>
                         <a:t>1</a:t>
                       </a:r>
-                      <a:endParaRPr lang="en-US" sz="900" b="0" i="0" u="none" strike="noStrike">
+                      <a:endParaRPr lang="en-US" sz="1100" b="0" i="0" u="none" strike="noStrike">
                         <a:solidFill>
                           <a:srgbClr val="E0DEF1"/>
                         </a:solidFill>
@@ -24461,12 +25780,12 @@
                         <a:buNone/>
                       </a:pPr>
                       <a:r>
-                        <a:rPr lang="en-US" sz="900" u="none" strike="noStrike">
+                        <a:rPr lang="en-US" sz="1100" u="none" strike="noStrike">
                           <a:effectLst/>
                         </a:rPr>
                         <a:t>2.33%</a:t>
                       </a:r>
-                      <a:endParaRPr lang="en-US" sz="900" b="0" i="0" u="none" strike="noStrike">
+                      <a:endParaRPr lang="en-US" sz="1100" b="0" i="0" u="none" strike="noStrike">
                         <a:solidFill>
                           <a:srgbClr val="E0DEF1"/>
                         </a:solidFill>
@@ -24483,7 +25802,7 @@
                   </a:ext>
                 </a:extLst>
               </a:tr>
-              <a:tr h="200175">
+              <a:tr h="216582">
                 <a:tc>
                   <a:txBody>
                     <a:bodyPr/>
@@ -24492,7 +25811,7 @@
                       <a:pPr algn="l" fontAlgn="b">
                         <a:buNone/>
                       </a:pPr>
-                      <a:endParaRPr lang="en-US" sz="900" b="1" i="0" u="none" strike="noStrike">
+                      <a:endParaRPr lang="en-US" sz="1400" b="1" i="0" u="none" strike="noStrike">
                         <a:solidFill>
                           <a:srgbClr val="FFFFFF"/>
                         </a:solidFill>
@@ -24512,12 +25831,12 @@
                         <a:buNone/>
                       </a:pPr>
                       <a:r>
-                        <a:rPr lang="en-US" sz="900" u="none" strike="noStrike">
+                        <a:rPr lang="en-US" sz="1100" u="none" strike="noStrike">
                           <a:effectLst/>
                         </a:rPr>
                         <a:t>Femme Total</a:t>
                       </a:r>
-                      <a:endParaRPr lang="en-US" sz="900" b="0" i="0" u="none" strike="noStrike">
+                      <a:endParaRPr lang="en-US" sz="1100" b="0" i="0" u="none" strike="noStrike">
                         <a:solidFill>
                           <a:srgbClr val="E0DEF1"/>
                         </a:solidFill>
@@ -24536,7 +25855,7 @@
                       <a:pPr algn="l" fontAlgn="b">
                         <a:buNone/>
                       </a:pPr>
-                      <a:endParaRPr lang="en-US" sz="900" b="0" i="0" u="none" strike="noStrike">
+                      <a:endParaRPr lang="en-US" sz="1100" b="0" i="0" u="none" strike="noStrike">
                         <a:solidFill>
                           <a:srgbClr val="E0DEF1"/>
                         </a:solidFill>
@@ -24556,12 +25875,12 @@
                         <a:buNone/>
                       </a:pPr>
                       <a:r>
-                        <a:rPr lang="en-US" sz="900" u="none" strike="noStrike">
+                        <a:rPr lang="en-US" sz="1100" u="none" strike="noStrike">
                           <a:effectLst/>
                         </a:rPr>
                         <a:t>1</a:t>
                       </a:r>
-                      <a:endParaRPr lang="en-US" sz="900" b="0" i="0" u="none" strike="noStrike">
+                      <a:endParaRPr lang="en-US" sz="1100" b="0" i="0" u="none" strike="noStrike">
                         <a:solidFill>
                           <a:srgbClr val="E0DEF1"/>
                         </a:solidFill>
@@ -24581,12 +25900,12 @@
                         <a:buNone/>
                       </a:pPr>
                       <a:r>
-                        <a:rPr lang="en-US" sz="900" u="none" strike="noStrike">
+                        <a:rPr lang="en-US" sz="1100" u="none" strike="noStrike">
                           <a:effectLst/>
                         </a:rPr>
                         <a:t>2.33%</a:t>
                       </a:r>
-                      <a:endParaRPr lang="en-US" sz="900" b="0" i="0" u="none" strike="noStrike">
+                      <a:endParaRPr lang="en-US" sz="1100" b="0" i="0" u="none" strike="noStrike">
                         <a:solidFill>
                           <a:srgbClr val="E0DEF1"/>
                         </a:solidFill>
@@ -24603,7 +25922,7 @@
                   </a:ext>
                 </a:extLst>
               </a:tr>
-              <a:tr h="200175">
+              <a:tr h="216582">
                 <a:tc>
                   <a:txBody>
                     <a:bodyPr/>
@@ -24612,7 +25931,7 @@
                       <a:pPr algn="l" fontAlgn="b">
                         <a:buNone/>
                       </a:pPr>
-                      <a:endParaRPr lang="en-US" sz="900" b="1" i="0" u="none" strike="noStrike">
+                      <a:endParaRPr lang="en-US" sz="1400" b="1" i="0" u="none" strike="noStrike">
                         <a:solidFill>
                           <a:srgbClr val="FFFFFF"/>
                         </a:solidFill>
@@ -24632,12 +25951,12 @@
                         <a:buNone/>
                       </a:pPr>
                       <a:r>
-                        <a:rPr lang="en-US" sz="900" u="none" strike="noStrike">
+                        <a:rPr lang="en-US" sz="1100" u="none" strike="noStrike">
                           <a:effectLst/>
                         </a:rPr>
                         <a:t>Homme</a:t>
                       </a:r>
-                      <a:endParaRPr lang="en-US" sz="900" b="1" i="0" u="none" strike="noStrike">
+                      <a:endParaRPr lang="en-US" sz="1100" b="1" i="0" u="none" strike="noStrike">
                         <a:solidFill>
                           <a:srgbClr val="FFFFFF"/>
                         </a:solidFill>
@@ -24657,12 +25976,12 @@
                         <a:buNone/>
                       </a:pPr>
                       <a:r>
-                        <a:rPr lang="en-US" sz="900" u="none" strike="noStrike">
+                        <a:rPr lang="en-US" sz="1100" u="none" strike="noStrike">
                           <a:effectLst/>
                         </a:rPr>
                         <a:t>[11%, 29%]</a:t>
                       </a:r>
-                      <a:endParaRPr lang="en-US" sz="900" b="0" i="0" u="none" strike="noStrike">
+                      <a:endParaRPr lang="en-US" sz="1100" b="0" i="0" u="none" strike="noStrike">
                         <a:solidFill>
                           <a:srgbClr val="E0DEF1"/>
                         </a:solidFill>
@@ -24682,12 +26001,12 @@
                         <a:buNone/>
                       </a:pPr>
                       <a:r>
-                        <a:rPr lang="en-US" sz="900" u="none" strike="noStrike">
+                        <a:rPr lang="en-US" sz="1100" u="none" strike="noStrike">
                           <a:effectLst/>
                         </a:rPr>
                         <a:t>1</a:t>
                       </a:r>
-                      <a:endParaRPr lang="en-US" sz="900" b="0" i="0" u="none" strike="noStrike">
+                      <a:endParaRPr lang="en-US" sz="1100" b="0" i="0" u="none" strike="noStrike">
                         <a:solidFill>
                           <a:srgbClr val="E0DEF1"/>
                         </a:solidFill>
@@ -24707,12 +26026,12 @@
                         <a:buNone/>
                       </a:pPr>
                       <a:r>
-                        <a:rPr lang="en-US" sz="900" u="none" strike="noStrike">
+                        <a:rPr lang="en-US" sz="1100" u="none" strike="noStrike">
                           <a:effectLst/>
                         </a:rPr>
                         <a:t>2.33%</a:t>
                       </a:r>
-                      <a:endParaRPr lang="en-US" sz="900" b="0" i="0" u="none" strike="noStrike">
+                      <a:endParaRPr lang="en-US" sz="1100" b="0" i="0" u="none" strike="noStrike">
                         <a:solidFill>
                           <a:srgbClr val="E0DEF1"/>
                         </a:solidFill>
@@ -24729,7 +26048,7 @@
                   </a:ext>
                 </a:extLst>
               </a:tr>
-              <a:tr h="200175">
+              <a:tr h="216582">
                 <a:tc>
                   <a:txBody>
                     <a:bodyPr/>
@@ -24738,7 +26057,7 @@
                       <a:pPr algn="l" fontAlgn="b">
                         <a:buNone/>
                       </a:pPr>
-                      <a:endParaRPr lang="en-US" sz="900" b="1" i="0" u="none" strike="noStrike">
+                      <a:endParaRPr lang="en-US" sz="1400" b="1" i="0" u="none" strike="noStrike">
                         <a:solidFill>
                           <a:srgbClr val="FFFFFF"/>
                         </a:solidFill>
@@ -24758,12 +26077,12 @@
                         <a:buNone/>
                       </a:pPr>
                       <a:r>
-                        <a:rPr lang="en-US" sz="900" u="none" strike="noStrike">
+                        <a:rPr lang="en-US" sz="1100" u="none" strike="noStrike">
                           <a:effectLst/>
                         </a:rPr>
                         <a:t>Homme Total</a:t>
                       </a:r>
-                      <a:endParaRPr lang="en-US" sz="900" b="0" i="0" u="none" strike="noStrike">
+                      <a:endParaRPr lang="en-US" sz="1100" b="0" i="0" u="none" strike="noStrike">
                         <a:solidFill>
                           <a:srgbClr val="E0DEF1"/>
                         </a:solidFill>
@@ -24782,7 +26101,7 @@
                       <a:pPr algn="l" fontAlgn="b">
                         <a:buNone/>
                       </a:pPr>
-                      <a:endParaRPr lang="en-US" sz="900" b="0" i="0" u="none" strike="noStrike">
+                      <a:endParaRPr lang="en-US" sz="1100" b="0" i="0" u="none" strike="noStrike">
                         <a:solidFill>
                           <a:srgbClr val="E0DEF1"/>
                         </a:solidFill>
@@ -24802,12 +26121,12 @@
                         <a:buNone/>
                       </a:pPr>
                       <a:r>
-                        <a:rPr lang="en-US" sz="900" u="none" strike="noStrike">
+                        <a:rPr lang="en-US" sz="1100" u="none" strike="noStrike">
                           <a:effectLst/>
                         </a:rPr>
                         <a:t>1</a:t>
                       </a:r>
-                      <a:endParaRPr lang="en-US" sz="900" b="0" i="0" u="none" strike="noStrike">
+                      <a:endParaRPr lang="en-US" sz="1100" b="0" i="0" u="none" strike="noStrike">
                         <a:solidFill>
                           <a:srgbClr val="E0DEF1"/>
                         </a:solidFill>
@@ -24827,12 +26146,12 @@
                         <a:buNone/>
                       </a:pPr>
                       <a:r>
-                        <a:rPr lang="en-US" sz="900" u="none" strike="noStrike">
+                        <a:rPr lang="en-US" sz="1100" u="none" strike="noStrike">
                           <a:effectLst/>
                         </a:rPr>
                         <a:t>2.33%</a:t>
                       </a:r>
-                      <a:endParaRPr lang="en-US" sz="900" b="0" i="0" u="none" strike="noStrike">
+                      <a:endParaRPr lang="en-US" sz="1100" b="0" i="0" u="none" strike="noStrike">
                         <a:solidFill>
                           <a:srgbClr val="E0DEF1"/>
                         </a:solidFill>
@@ -24849,7 +26168,7 @@
                   </a:ext>
                 </a:extLst>
               </a:tr>
-              <a:tr h="200175">
+              <a:tr h="216582">
                 <a:tc>
                   <a:txBody>
                     <a:bodyPr/>
@@ -24859,12 +26178,12 @@
                         <a:buNone/>
                       </a:pPr>
                       <a:r>
-                        <a:rPr lang="en-US" sz="900" u="none" strike="noStrike">
+                        <a:rPr lang="en-US" sz="1400" b="1" u="none" strike="noStrike">
                           <a:effectLst/>
                         </a:rPr>
                         <a:t>Auto-immune Total</a:t>
                       </a:r>
-                      <a:endParaRPr lang="en-US" sz="900" b="1" i="0" u="none" strike="noStrike">
+                      <a:endParaRPr lang="en-US" sz="1400" b="1" i="0" u="none" strike="noStrike">
                         <a:solidFill>
                           <a:srgbClr val="FFFFFF"/>
                         </a:solidFill>
@@ -24883,7 +26202,7 @@
                       <a:pPr algn="l" fontAlgn="b">
                         <a:buNone/>
                       </a:pPr>
-                      <a:endParaRPr lang="en-US" sz="900" b="1" i="0" u="none" strike="noStrike">
+                      <a:endParaRPr lang="en-US" sz="1100" b="1" i="0" u="none" strike="noStrike">
                         <a:solidFill>
                           <a:srgbClr val="FFFFFF"/>
                         </a:solidFill>
@@ -24902,7 +26221,7 @@
                       <a:pPr algn="l" fontAlgn="b">
                         <a:buNone/>
                       </a:pPr>
-                      <a:endParaRPr lang="en-US" sz="900" b="1" i="0" u="none" strike="noStrike">
+                      <a:endParaRPr lang="en-US" sz="1100" b="1" i="0" u="none" strike="noStrike">
                         <a:solidFill>
                           <a:srgbClr val="FFFFFF"/>
                         </a:solidFill>
@@ -24922,12 +26241,12 @@
                         <a:buNone/>
                       </a:pPr>
                       <a:r>
-                        <a:rPr lang="en-US" sz="900" u="none" strike="noStrike">
+                        <a:rPr lang="en-US" sz="1100" u="none" strike="noStrike">
                           <a:effectLst/>
                         </a:rPr>
                         <a:t>2</a:t>
                       </a:r>
-                      <a:endParaRPr lang="en-US" sz="900" b="1" i="0" u="none" strike="noStrike">
+                      <a:endParaRPr lang="en-US" sz="1100" b="1" i="0" u="none" strike="noStrike">
                         <a:solidFill>
                           <a:srgbClr val="FFFFFF"/>
                         </a:solidFill>
@@ -24947,12 +26266,12 @@
                         <a:buNone/>
                       </a:pPr>
                       <a:r>
-                        <a:rPr lang="en-US" sz="900" u="none" strike="noStrike">
+                        <a:rPr lang="en-US" sz="1100" u="none" strike="noStrike">
                           <a:effectLst/>
                         </a:rPr>
                         <a:t>4.65%</a:t>
                       </a:r>
-                      <a:endParaRPr lang="en-US" sz="900" b="1" i="0" u="none" strike="noStrike">
+                      <a:endParaRPr lang="en-US" sz="1100" b="1" i="0" u="none" strike="noStrike">
                         <a:solidFill>
                           <a:srgbClr val="FFFFFF"/>
                         </a:solidFill>
@@ -24969,7 +26288,7 @@
                   </a:ext>
                 </a:extLst>
               </a:tr>
-              <a:tr h="200175">
+              <a:tr h="216582">
                 <a:tc>
                   <a:txBody>
                     <a:bodyPr/>
@@ -24979,12 +26298,12 @@
                         <a:buNone/>
                       </a:pPr>
                       <a:r>
-                        <a:rPr lang="en-US" sz="900" u="none" strike="noStrike">
+                        <a:rPr lang="en-US" sz="1400" b="1" u="none" strike="noStrike">
                           <a:effectLst/>
                         </a:rPr>
                         <a:t>Immunoallergique</a:t>
                       </a:r>
-                      <a:endParaRPr lang="en-US" sz="900" b="1" i="0" u="none" strike="noStrike">
+                      <a:endParaRPr lang="en-US" sz="1400" b="1" i="0" u="none" strike="noStrike">
                         <a:solidFill>
                           <a:srgbClr val="FFFFFF"/>
                         </a:solidFill>
@@ -25004,12 +26323,12 @@
                         <a:buNone/>
                       </a:pPr>
                       <a:r>
-                        <a:rPr lang="en-US" sz="900" u="none" strike="noStrike">
+                        <a:rPr lang="en-US" sz="1100" u="none" strike="noStrike">
                           <a:effectLst/>
                         </a:rPr>
                         <a:t>Homme</a:t>
                       </a:r>
-                      <a:endParaRPr lang="en-US" sz="900" b="1" i="0" u="none" strike="noStrike">
+                      <a:endParaRPr lang="en-US" sz="1100" b="1" i="0" u="none" strike="noStrike">
                         <a:solidFill>
                           <a:srgbClr val="FFFFFF"/>
                         </a:solidFill>
@@ -25029,12 +26348,12 @@
                         <a:buNone/>
                       </a:pPr>
                       <a:r>
-                        <a:rPr lang="en-US" sz="900" u="none" strike="noStrike">
+                        <a:rPr lang="en-US" sz="1100" u="none" strike="noStrike">
                           <a:effectLst/>
                         </a:rPr>
                         <a:t>&gt;= 30%</a:t>
                       </a:r>
-                      <a:endParaRPr lang="en-US" sz="900" b="0" i="0" u="none" strike="noStrike">
+                      <a:endParaRPr lang="en-US" sz="1100" b="0" i="0" u="none" strike="noStrike">
                         <a:solidFill>
                           <a:srgbClr val="E0DEF1"/>
                         </a:solidFill>
@@ -25054,12 +26373,12 @@
                         <a:buNone/>
                       </a:pPr>
                       <a:r>
-                        <a:rPr lang="en-US" sz="900" u="none" strike="noStrike">
+                        <a:rPr lang="en-US" sz="1100" u="none" strike="noStrike">
                           <a:effectLst/>
                         </a:rPr>
                         <a:t>1</a:t>
                       </a:r>
-                      <a:endParaRPr lang="en-US" sz="900" b="0" i="0" u="none" strike="noStrike">
+                      <a:endParaRPr lang="en-US" sz="1100" b="0" i="0" u="none" strike="noStrike">
                         <a:solidFill>
                           <a:srgbClr val="E0DEF1"/>
                         </a:solidFill>
@@ -25079,12 +26398,12 @@
                         <a:buNone/>
                       </a:pPr>
                       <a:r>
-                        <a:rPr lang="en-US" sz="900" u="none" strike="noStrike">
+                        <a:rPr lang="en-US" sz="1100" u="none" strike="noStrike">
                           <a:effectLst/>
                         </a:rPr>
                         <a:t>2.33%</a:t>
                       </a:r>
-                      <a:endParaRPr lang="en-US" sz="900" b="0" i="0" u="none" strike="noStrike">
+                      <a:endParaRPr lang="en-US" sz="1100" b="0" i="0" u="none" strike="noStrike">
                         <a:solidFill>
                           <a:srgbClr val="E0DEF1"/>
                         </a:solidFill>
@@ -25101,7 +26420,7 @@
                   </a:ext>
                 </a:extLst>
               </a:tr>
-              <a:tr h="200175">
+              <a:tr h="216582">
                 <a:tc>
                   <a:txBody>
                     <a:bodyPr/>
@@ -25110,7 +26429,7 @@
                       <a:pPr algn="l" fontAlgn="b">
                         <a:buNone/>
                       </a:pPr>
-                      <a:endParaRPr lang="en-US" sz="900" b="1" i="0" u="none" strike="noStrike">
+                      <a:endParaRPr lang="en-US" sz="1400" b="1" i="0" u="none" strike="noStrike">
                         <a:solidFill>
                           <a:srgbClr val="FFFFFF"/>
                         </a:solidFill>
@@ -25130,12 +26449,12 @@
                         <a:buNone/>
                       </a:pPr>
                       <a:r>
-                        <a:rPr lang="en-US" sz="900" u="none" strike="noStrike">
+                        <a:rPr lang="en-US" sz="1100" u="none" strike="noStrike">
                           <a:effectLst/>
                         </a:rPr>
                         <a:t>Homme Total</a:t>
                       </a:r>
-                      <a:endParaRPr lang="en-US" sz="900" b="0" i="0" u="none" strike="noStrike">
+                      <a:endParaRPr lang="en-US" sz="1100" b="0" i="0" u="none" strike="noStrike">
                         <a:solidFill>
                           <a:srgbClr val="E0DEF1"/>
                         </a:solidFill>
@@ -25154,7 +26473,7 @@
                       <a:pPr algn="l" fontAlgn="b">
                         <a:buNone/>
                       </a:pPr>
-                      <a:endParaRPr lang="en-US" sz="900" b="0" i="0" u="none" strike="noStrike">
+                      <a:endParaRPr lang="en-US" sz="1100" b="0" i="0" u="none" strike="noStrike">
                         <a:solidFill>
                           <a:srgbClr val="E0DEF1"/>
                         </a:solidFill>
@@ -25174,12 +26493,12 @@
                         <a:buNone/>
                       </a:pPr>
                       <a:r>
-                        <a:rPr lang="en-US" sz="900" u="none" strike="noStrike">
+                        <a:rPr lang="en-US" sz="1100" u="none" strike="noStrike">
                           <a:effectLst/>
                         </a:rPr>
                         <a:t>1</a:t>
                       </a:r>
-                      <a:endParaRPr lang="en-US" sz="900" b="0" i="0" u="none" strike="noStrike">
+                      <a:endParaRPr lang="en-US" sz="1100" b="0" i="0" u="none" strike="noStrike">
                         <a:solidFill>
                           <a:srgbClr val="E0DEF1"/>
                         </a:solidFill>
@@ -25199,12 +26518,12 @@
                         <a:buNone/>
                       </a:pPr>
                       <a:r>
-                        <a:rPr lang="en-US" sz="900" u="none" strike="noStrike">
+                        <a:rPr lang="en-US" sz="1100" u="none" strike="noStrike">
                           <a:effectLst/>
                         </a:rPr>
                         <a:t>2.33%</a:t>
                       </a:r>
-                      <a:endParaRPr lang="en-US" sz="900" b="0" i="0" u="none" strike="noStrike">
+                      <a:endParaRPr lang="en-US" sz="1100" b="0" i="0" u="none" strike="noStrike">
                         <a:solidFill>
                           <a:srgbClr val="E0DEF1"/>
                         </a:solidFill>
@@ -25221,7 +26540,7 @@
                   </a:ext>
                 </a:extLst>
               </a:tr>
-              <a:tr h="200175">
+              <a:tr h="216582">
                 <a:tc>
                   <a:txBody>
                     <a:bodyPr/>
@@ -25231,12 +26550,12 @@
                         <a:buNone/>
                       </a:pPr>
                       <a:r>
-                        <a:rPr lang="en-US" sz="900" u="none" strike="noStrike">
+                        <a:rPr lang="en-US" sz="1400" b="1" u="none" strike="noStrike">
                           <a:effectLst/>
                         </a:rPr>
                         <a:t>Immunoallergique Total</a:t>
                       </a:r>
-                      <a:endParaRPr lang="en-US" sz="900" b="1" i="0" u="none" strike="noStrike">
+                      <a:endParaRPr lang="en-US" sz="1400" b="1" i="0" u="none" strike="noStrike">
                         <a:solidFill>
                           <a:srgbClr val="FFFFFF"/>
                         </a:solidFill>
@@ -25255,7 +26574,7 @@
                       <a:pPr algn="l" fontAlgn="b">
                         <a:buNone/>
                       </a:pPr>
-                      <a:endParaRPr lang="en-US" sz="900" b="1" i="0" u="none" strike="noStrike">
+                      <a:endParaRPr lang="en-US" sz="1100" b="1" i="0" u="none" strike="noStrike">
                         <a:solidFill>
                           <a:srgbClr val="FFFFFF"/>
                         </a:solidFill>
@@ -25274,7 +26593,7 @@
                       <a:pPr algn="l" fontAlgn="b">
                         <a:buNone/>
                       </a:pPr>
-                      <a:endParaRPr lang="en-US" sz="900" b="1" i="0" u="none" strike="noStrike">
+                      <a:endParaRPr lang="en-US" sz="1100" b="1" i="0" u="none" strike="noStrike">
                         <a:solidFill>
                           <a:srgbClr val="FFFFFF"/>
                         </a:solidFill>
@@ -25294,12 +26613,12 @@
                         <a:buNone/>
                       </a:pPr>
                       <a:r>
-                        <a:rPr lang="en-US" sz="900" u="none" strike="noStrike">
+                        <a:rPr lang="en-US" sz="1100" u="none" strike="noStrike">
                           <a:effectLst/>
                         </a:rPr>
                         <a:t>1</a:t>
                       </a:r>
-                      <a:endParaRPr lang="en-US" sz="900" b="1" i="0" u="none" strike="noStrike">
+                      <a:endParaRPr lang="en-US" sz="1100" b="1" i="0" u="none" strike="noStrike">
                         <a:solidFill>
                           <a:srgbClr val="FFFFFF"/>
                         </a:solidFill>
@@ -25319,12 +26638,12 @@
                         <a:buNone/>
                       </a:pPr>
                       <a:r>
-                        <a:rPr lang="en-US" sz="900" u="none" strike="noStrike">
+                        <a:rPr lang="en-US" sz="1100" u="none" strike="noStrike">
                           <a:effectLst/>
                         </a:rPr>
                         <a:t>2.33%</a:t>
                       </a:r>
-                      <a:endParaRPr lang="en-US" sz="900" b="1" i="0" u="none" strike="noStrike">
+                      <a:endParaRPr lang="en-US" sz="1100" b="1" i="0" u="none" strike="noStrike">
                         <a:solidFill>
                           <a:srgbClr val="FFFFFF"/>
                         </a:solidFill>
@@ -25341,7 +26660,7 @@
                   </a:ext>
                 </a:extLst>
               </a:tr>
-              <a:tr h="200175">
+              <a:tr h="216582">
                 <a:tc>
                   <a:txBody>
                     <a:bodyPr/>
@@ -25351,12 +26670,12 @@
                         <a:buNone/>
                       </a:pPr>
                       <a:r>
-                        <a:rPr lang="en-US" sz="900" u="none" strike="noStrike">
+                        <a:rPr lang="en-US" sz="1400" b="1" u="none" strike="noStrike">
                           <a:effectLst/>
                         </a:rPr>
                         <a:t>Infectieuse</a:t>
                       </a:r>
-                      <a:endParaRPr lang="en-US" sz="900" b="1" i="0" u="none" strike="noStrike">
+                      <a:endParaRPr lang="en-US" sz="1400" b="1" i="0" u="none" strike="noStrike">
                         <a:solidFill>
                           <a:srgbClr val="FFFFFF"/>
                         </a:solidFill>
@@ -25376,12 +26695,12 @@
                         <a:buNone/>
                       </a:pPr>
                       <a:r>
-                        <a:rPr lang="en-US" sz="900" u="none" strike="noStrike">
+                        <a:rPr lang="en-US" sz="1100" u="none" strike="noStrike">
                           <a:effectLst/>
                         </a:rPr>
                         <a:t>Femme</a:t>
                       </a:r>
-                      <a:endParaRPr lang="en-US" sz="900" b="1" i="0" u="none" strike="noStrike">
+                      <a:endParaRPr lang="en-US" sz="1100" b="1" i="0" u="none" strike="noStrike">
                         <a:solidFill>
                           <a:srgbClr val="FFFFFF"/>
                         </a:solidFill>
@@ -25401,12 +26720,12 @@
                         <a:buNone/>
                       </a:pPr>
                       <a:r>
-                        <a:rPr lang="en-US" sz="900" u="none" strike="noStrike">
+                        <a:rPr lang="en-US" sz="1100" u="none" strike="noStrike">
                           <a:effectLst/>
                         </a:rPr>
                         <a:t>&lt;= 10%</a:t>
                       </a:r>
-                      <a:endParaRPr lang="en-US" sz="900" b="0" i="0" u="none" strike="noStrike">
+                      <a:endParaRPr lang="en-US" sz="1100" b="0" i="0" u="none" strike="noStrike">
                         <a:solidFill>
                           <a:srgbClr val="E0DEF1"/>
                         </a:solidFill>
@@ -25426,12 +26745,12 @@
                         <a:buNone/>
                       </a:pPr>
                       <a:r>
-                        <a:rPr lang="en-US" sz="900" u="none" strike="noStrike">
+                        <a:rPr lang="en-US" sz="1100" u="none" strike="noStrike">
                           <a:effectLst/>
                         </a:rPr>
                         <a:t>5</a:t>
                       </a:r>
-                      <a:endParaRPr lang="en-US" sz="900" b="0" i="0" u="none" strike="noStrike">
+                      <a:endParaRPr lang="en-US" sz="1100" b="0" i="0" u="none" strike="noStrike">
                         <a:solidFill>
                           <a:srgbClr val="E0DEF1"/>
                         </a:solidFill>
@@ -25451,12 +26770,12 @@
                         <a:buNone/>
                       </a:pPr>
                       <a:r>
-                        <a:rPr lang="en-US" sz="900" u="none" strike="noStrike">
+                        <a:rPr lang="en-US" sz="1100" u="none" strike="noStrike">
                           <a:effectLst/>
                         </a:rPr>
                         <a:t>11.63%</a:t>
                       </a:r>
-                      <a:endParaRPr lang="en-US" sz="900" b="0" i="0" u="none" strike="noStrike">
+                      <a:endParaRPr lang="en-US" sz="1100" b="0" i="0" u="none" strike="noStrike">
                         <a:solidFill>
                           <a:srgbClr val="E0DEF1"/>
                         </a:solidFill>
@@ -25473,7 +26792,7 @@
                   </a:ext>
                 </a:extLst>
               </a:tr>
-              <a:tr h="200175">
+              <a:tr h="216582">
                 <a:tc>
                   <a:txBody>
                     <a:bodyPr/>
@@ -25482,7 +26801,7 @@
                       <a:pPr algn="l" fontAlgn="b">
                         <a:buNone/>
                       </a:pPr>
-                      <a:endParaRPr lang="en-US" sz="900" b="1" i="0" u="none" strike="noStrike">
+                      <a:endParaRPr lang="en-US" sz="1400" b="1" i="0" u="none" strike="noStrike">
                         <a:solidFill>
                           <a:srgbClr val="FFFFFF"/>
                         </a:solidFill>
@@ -25502,12 +26821,12 @@
                         <a:buNone/>
                       </a:pPr>
                       <a:r>
-                        <a:rPr lang="en-US" sz="900" u="none" strike="noStrike">
+                        <a:rPr lang="en-US" sz="1100" u="none" strike="noStrike">
                           <a:effectLst/>
                         </a:rPr>
                         <a:t>Femme Total</a:t>
                       </a:r>
-                      <a:endParaRPr lang="en-US" sz="900" b="0" i="0" u="none" strike="noStrike">
+                      <a:endParaRPr lang="en-US" sz="1100" b="0" i="0" u="none" strike="noStrike">
                         <a:solidFill>
                           <a:srgbClr val="E0DEF1"/>
                         </a:solidFill>
@@ -25526,7 +26845,7 @@
                       <a:pPr algn="l" fontAlgn="b">
                         <a:buNone/>
                       </a:pPr>
-                      <a:endParaRPr lang="en-US" sz="900" b="0" i="0" u="none" strike="noStrike">
+                      <a:endParaRPr lang="en-US" sz="1100" b="0" i="0" u="none" strike="noStrike">
                         <a:solidFill>
                           <a:srgbClr val="E0DEF1"/>
                         </a:solidFill>
@@ -25546,12 +26865,12 @@
                         <a:buNone/>
                       </a:pPr>
                       <a:r>
-                        <a:rPr lang="en-US" sz="900" u="none" strike="noStrike">
+                        <a:rPr lang="en-US" sz="1100" u="none" strike="noStrike">
                           <a:effectLst/>
                         </a:rPr>
                         <a:t>5</a:t>
                       </a:r>
-                      <a:endParaRPr lang="en-US" sz="900" b="0" i="0" u="none" strike="noStrike">
+                      <a:endParaRPr lang="en-US" sz="1100" b="0" i="0" u="none" strike="noStrike">
                         <a:solidFill>
                           <a:srgbClr val="E0DEF1"/>
                         </a:solidFill>
@@ -25571,12 +26890,12 @@
                         <a:buNone/>
                       </a:pPr>
                       <a:r>
-                        <a:rPr lang="en-US" sz="900" u="none" strike="noStrike">
+                        <a:rPr lang="en-US" sz="1100" u="none" strike="noStrike">
                           <a:effectLst/>
                         </a:rPr>
                         <a:t>11.63%</a:t>
                       </a:r>
-                      <a:endParaRPr lang="en-US" sz="900" b="0" i="0" u="none" strike="noStrike">
+                      <a:endParaRPr lang="en-US" sz="1100" b="0" i="0" u="none" strike="noStrike">
                         <a:solidFill>
                           <a:srgbClr val="E0DEF1"/>
                         </a:solidFill>
@@ -25593,7 +26912,7 @@
                   </a:ext>
                 </a:extLst>
               </a:tr>
-              <a:tr h="200175">
+              <a:tr h="216582">
                 <a:tc>
                   <a:txBody>
                     <a:bodyPr/>
@@ -25602,7 +26921,7 @@
                       <a:pPr algn="l" fontAlgn="b">
                         <a:buNone/>
                       </a:pPr>
-                      <a:endParaRPr lang="en-US" sz="900" b="1" i="0" u="none" strike="noStrike">
+                      <a:endParaRPr lang="en-US" sz="1400" b="1" i="0" u="none" strike="noStrike">
                         <a:solidFill>
                           <a:srgbClr val="FFFFFF"/>
                         </a:solidFill>
@@ -25622,12 +26941,12 @@
                         <a:buNone/>
                       </a:pPr>
                       <a:r>
-                        <a:rPr lang="en-US" sz="900" u="none" strike="noStrike">
+                        <a:rPr lang="en-US" sz="1100" u="none" strike="noStrike">
                           <a:effectLst/>
                         </a:rPr>
                         <a:t>Homme</a:t>
                       </a:r>
-                      <a:endParaRPr lang="en-US" sz="900" b="1" i="0" u="none" strike="noStrike">
+                      <a:endParaRPr lang="en-US" sz="1100" b="1" i="0" u="none" strike="noStrike">
                         <a:solidFill>
                           <a:srgbClr val="FFFFFF"/>
                         </a:solidFill>
@@ -25647,12 +26966,12 @@
                         <a:buNone/>
                       </a:pPr>
                       <a:r>
-                        <a:rPr lang="en-US" sz="900" u="none" strike="noStrike">
+                        <a:rPr lang="en-US" sz="1100" u="none" strike="noStrike">
                           <a:effectLst/>
                         </a:rPr>
                         <a:t>[11%, 29%]</a:t>
                       </a:r>
-                      <a:endParaRPr lang="en-US" sz="900" b="0" i="0" u="none" strike="noStrike">
+                      <a:endParaRPr lang="en-US" sz="1100" b="0" i="0" u="none" strike="noStrike">
                         <a:solidFill>
                           <a:srgbClr val="E0DEF1"/>
                         </a:solidFill>
@@ -25672,12 +26991,12 @@
                         <a:buNone/>
                       </a:pPr>
                       <a:r>
-                        <a:rPr lang="en-US" sz="900" u="none" strike="noStrike">
+                        <a:rPr lang="en-US" sz="1100" u="none" strike="noStrike">
                           <a:effectLst/>
                         </a:rPr>
                         <a:t>2</a:t>
                       </a:r>
-                      <a:endParaRPr lang="en-US" sz="900" b="0" i="0" u="none" strike="noStrike">
+                      <a:endParaRPr lang="en-US" sz="1100" b="0" i="0" u="none" strike="noStrike">
                         <a:solidFill>
                           <a:srgbClr val="E0DEF1"/>
                         </a:solidFill>
@@ -25697,12 +27016,12 @@
                         <a:buNone/>
                       </a:pPr>
                       <a:r>
-                        <a:rPr lang="en-US" sz="900" u="none" strike="noStrike">
+                        <a:rPr lang="en-US" sz="1100" u="none" strike="noStrike">
                           <a:effectLst/>
                         </a:rPr>
                         <a:t>4.65%</a:t>
                       </a:r>
-                      <a:endParaRPr lang="en-US" sz="900" b="0" i="0" u="none" strike="noStrike">
+                      <a:endParaRPr lang="en-US" sz="1100" b="0" i="0" u="none" strike="noStrike">
                         <a:solidFill>
                           <a:srgbClr val="E0DEF1"/>
                         </a:solidFill>
@@ -25719,7 +27038,7 @@
                   </a:ext>
                 </a:extLst>
               </a:tr>
-              <a:tr h="200175">
+              <a:tr h="216582">
                 <a:tc>
                   <a:txBody>
                     <a:bodyPr/>
@@ -25728,7 +27047,7 @@
                       <a:pPr algn="l" fontAlgn="b">
                         <a:buNone/>
                       </a:pPr>
-                      <a:endParaRPr lang="en-US" sz="900" b="1" i="0" u="none" strike="noStrike">
+                      <a:endParaRPr lang="en-US" sz="1400" b="1" i="0" u="none" strike="noStrike">
                         <a:solidFill>
                           <a:srgbClr val="FFFFFF"/>
                         </a:solidFill>
@@ -25747,7 +27066,7 @@
                       <a:pPr algn="l" fontAlgn="b">
                         <a:buNone/>
                       </a:pPr>
-                      <a:endParaRPr lang="en-US" sz="900" b="1" i="0" u="none" strike="noStrike">
+                      <a:endParaRPr lang="en-US" sz="1100" b="1" i="0" u="none" strike="noStrike">
                         <a:solidFill>
                           <a:srgbClr val="FFFFFF"/>
                         </a:solidFill>
@@ -25767,12 +27086,12 @@
                         <a:buNone/>
                       </a:pPr>
                       <a:r>
-                        <a:rPr lang="en-US" sz="900" u="none" strike="noStrike">
+                        <a:rPr lang="en-US" sz="1100" u="none" strike="noStrike">
                           <a:effectLst/>
                         </a:rPr>
                         <a:t>&lt;= 10%</a:t>
                       </a:r>
-                      <a:endParaRPr lang="en-US" sz="900" b="0" i="0" u="none" strike="noStrike">
+                      <a:endParaRPr lang="en-US" sz="1100" b="0" i="0" u="none" strike="noStrike">
                         <a:solidFill>
                           <a:srgbClr val="E0DEF1"/>
                         </a:solidFill>
@@ -25792,12 +27111,12 @@
                         <a:buNone/>
                       </a:pPr>
                       <a:r>
-                        <a:rPr lang="en-US" sz="900" u="none" strike="noStrike">
+                        <a:rPr lang="en-US" sz="1100" u="none" strike="noStrike">
                           <a:effectLst/>
                         </a:rPr>
                         <a:t>6</a:t>
                       </a:r>
-                      <a:endParaRPr lang="en-US" sz="900" b="0" i="0" u="none" strike="noStrike">
+                      <a:endParaRPr lang="en-US" sz="1100" b="0" i="0" u="none" strike="noStrike">
                         <a:solidFill>
                           <a:srgbClr val="E0DEF1"/>
                         </a:solidFill>
@@ -25817,12 +27136,12 @@
                         <a:buNone/>
                       </a:pPr>
                       <a:r>
-                        <a:rPr lang="en-US" sz="900" u="none" strike="noStrike">
+                        <a:rPr lang="en-US" sz="1100" u="none" strike="noStrike">
                           <a:effectLst/>
                         </a:rPr>
                         <a:t>13.95%</a:t>
                       </a:r>
-                      <a:endParaRPr lang="en-US" sz="900" b="0" i="0" u="none" strike="noStrike">
+                      <a:endParaRPr lang="en-US" sz="1100" b="0" i="0" u="none" strike="noStrike">
                         <a:solidFill>
                           <a:srgbClr val="E0DEF1"/>
                         </a:solidFill>
@@ -25839,7 +27158,7 @@
                   </a:ext>
                 </a:extLst>
               </a:tr>
-              <a:tr h="200175">
+              <a:tr h="216582">
                 <a:tc>
                   <a:txBody>
                     <a:bodyPr/>
@@ -25848,7 +27167,7 @@
                       <a:pPr algn="l" fontAlgn="b">
                         <a:buNone/>
                       </a:pPr>
-                      <a:endParaRPr lang="en-US" sz="900" b="1" i="0" u="none" strike="noStrike">
+                      <a:endParaRPr lang="en-US" sz="1400" b="1" i="0" u="none" strike="noStrike">
                         <a:solidFill>
                           <a:srgbClr val="FFFFFF"/>
                         </a:solidFill>
@@ -25868,12 +27187,12 @@
                         <a:buNone/>
                       </a:pPr>
                       <a:r>
-                        <a:rPr lang="en-US" sz="900" u="none" strike="noStrike">
+                        <a:rPr lang="en-US" sz="1100" u="none" strike="noStrike">
                           <a:effectLst/>
                         </a:rPr>
                         <a:t>Homme Total</a:t>
                       </a:r>
-                      <a:endParaRPr lang="en-US" sz="900" b="0" i="0" u="none" strike="noStrike">
+                      <a:endParaRPr lang="en-US" sz="1100" b="0" i="0" u="none" strike="noStrike">
                         <a:solidFill>
                           <a:srgbClr val="E0DEF1"/>
                         </a:solidFill>
@@ -25892,7 +27211,7 @@
                       <a:pPr algn="l" fontAlgn="b">
                         <a:buNone/>
                       </a:pPr>
-                      <a:endParaRPr lang="en-US" sz="900" b="0" i="0" u="none" strike="noStrike">
+                      <a:endParaRPr lang="en-US" sz="1100" b="0" i="0" u="none" strike="noStrike">
                         <a:solidFill>
                           <a:srgbClr val="E0DEF1"/>
                         </a:solidFill>
@@ -25912,12 +27231,12 @@
                         <a:buNone/>
                       </a:pPr>
                       <a:r>
-                        <a:rPr lang="en-US" sz="900" u="none" strike="noStrike">
+                        <a:rPr lang="en-US" sz="1100" u="none" strike="noStrike">
                           <a:effectLst/>
                         </a:rPr>
                         <a:t>8</a:t>
                       </a:r>
-                      <a:endParaRPr lang="en-US" sz="900" b="0" i="0" u="none" strike="noStrike">
+                      <a:endParaRPr lang="en-US" sz="1100" b="0" i="0" u="none" strike="noStrike">
                         <a:solidFill>
                           <a:srgbClr val="E0DEF1"/>
                         </a:solidFill>
@@ -25937,12 +27256,12 @@
                         <a:buNone/>
                       </a:pPr>
                       <a:r>
-                        <a:rPr lang="en-US" sz="900" u="none" strike="noStrike">
+                        <a:rPr lang="en-US" sz="1100" u="none" strike="noStrike">
                           <a:effectLst/>
                         </a:rPr>
                         <a:t>18.60%</a:t>
                       </a:r>
-                      <a:endParaRPr lang="en-US" sz="900" b="0" i="0" u="none" strike="noStrike">
+                      <a:endParaRPr lang="en-US" sz="1100" b="0" i="0" u="none" strike="noStrike">
                         <a:solidFill>
                           <a:srgbClr val="E0DEF1"/>
                         </a:solidFill>
@@ -25959,7 +27278,7 @@
                   </a:ext>
                 </a:extLst>
               </a:tr>
-              <a:tr h="200175">
+              <a:tr h="216582">
                 <a:tc>
                   <a:txBody>
                     <a:bodyPr/>
@@ -25969,12 +27288,12 @@
                         <a:buNone/>
                       </a:pPr>
                       <a:r>
-                        <a:rPr lang="en-US" sz="900" u="none" strike="noStrike">
+                        <a:rPr lang="en-US" sz="1400" b="1" u="none" strike="noStrike">
                           <a:effectLst/>
                         </a:rPr>
                         <a:t>Infectieuse Total</a:t>
                       </a:r>
-                      <a:endParaRPr lang="en-US" sz="900" b="1" i="0" u="none" strike="noStrike">
+                      <a:endParaRPr lang="en-US" sz="1400" b="1" i="0" u="none" strike="noStrike">
                         <a:solidFill>
                           <a:srgbClr val="FFFFFF"/>
                         </a:solidFill>
@@ -25993,7 +27312,7 @@
                       <a:pPr algn="l" fontAlgn="b">
                         <a:buNone/>
                       </a:pPr>
-                      <a:endParaRPr lang="en-US" sz="900" b="1" i="0" u="none" strike="noStrike">
+                      <a:endParaRPr lang="en-US" sz="1100" b="1" i="0" u="none" strike="noStrike">
                         <a:solidFill>
                           <a:srgbClr val="FFFFFF"/>
                         </a:solidFill>
@@ -26012,7 +27331,7 @@
                       <a:pPr algn="l" fontAlgn="b">
                         <a:buNone/>
                       </a:pPr>
-                      <a:endParaRPr lang="en-US" sz="900" b="1" i="0" u="none" strike="noStrike">
+                      <a:endParaRPr lang="en-US" sz="1100" b="1" i="0" u="none" strike="noStrike">
                         <a:solidFill>
                           <a:srgbClr val="FFFFFF"/>
                         </a:solidFill>
@@ -26032,12 +27351,12 @@
                         <a:buNone/>
                       </a:pPr>
                       <a:r>
-                        <a:rPr lang="en-US" sz="900" u="none" strike="noStrike">
+                        <a:rPr lang="en-US" sz="1100" u="none" strike="noStrike">
                           <a:effectLst/>
                         </a:rPr>
                         <a:t>13</a:t>
                       </a:r>
-                      <a:endParaRPr lang="en-US" sz="900" b="1" i="0" u="none" strike="noStrike">
+                      <a:endParaRPr lang="en-US" sz="1100" b="1" i="0" u="none" strike="noStrike">
                         <a:solidFill>
                           <a:srgbClr val="FFFFFF"/>
                         </a:solidFill>
@@ -26057,12 +27376,12 @@
                         <a:buNone/>
                       </a:pPr>
                       <a:r>
-                        <a:rPr lang="en-US" sz="900" u="none" strike="noStrike">
+                        <a:rPr lang="en-US" sz="1100" u="none" strike="noStrike">
                           <a:effectLst/>
                         </a:rPr>
                         <a:t>30.23%</a:t>
                       </a:r>
-                      <a:endParaRPr lang="en-US" sz="900" b="1" i="0" u="none" strike="noStrike">
+                      <a:endParaRPr lang="en-US" sz="1100" b="1" i="0" u="none" strike="noStrike">
                         <a:solidFill>
                           <a:srgbClr val="FFFFFF"/>
                         </a:solidFill>
@@ -26079,7 +27398,7 @@
                   </a:ext>
                 </a:extLst>
               </a:tr>
-              <a:tr h="200175">
+              <a:tr h="216582">
                 <a:tc>
                   <a:txBody>
                     <a:bodyPr/>
@@ -26089,12 +27408,12 @@
                         <a:buNone/>
                       </a:pPr>
                       <a:r>
-                        <a:rPr lang="en-US" sz="900" u="none" strike="noStrike">
+                        <a:rPr lang="en-US" sz="1400" b="1" u="none" strike="noStrike">
                           <a:effectLst/>
                         </a:rPr>
                         <a:t>Toxidermie</a:t>
                       </a:r>
-                      <a:endParaRPr lang="en-US" sz="900" b="1" i="0" u="none" strike="noStrike">
+                      <a:endParaRPr lang="en-US" sz="1400" b="1" i="0" u="none" strike="noStrike">
                         <a:solidFill>
                           <a:srgbClr val="FFFFFF"/>
                         </a:solidFill>
@@ -26114,12 +27433,12 @@
                         <a:buNone/>
                       </a:pPr>
                       <a:r>
-                        <a:rPr lang="en-US" sz="900" u="none" strike="noStrike">
+                        <a:rPr lang="en-US" sz="1100" u="none" strike="noStrike">
                           <a:effectLst/>
                         </a:rPr>
                         <a:t>Femme</a:t>
                       </a:r>
-                      <a:endParaRPr lang="en-US" sz="900" b="1" i="0" u="none" strike="noStrike">
+                      <a:endParaRPr lang="en-US" sz="1100" b="1" i="0" u="none" strike="noStrike">
                         <a:solidFill>
                           <a:srgbClr val="FFFFFF"/>
                         </a:solidFill>
@@ -26139,12 +27458,12 @@
                         <a:buNone/>
                       </a:pPr>
                       <a:r>
-                        <a:rPr lang="en-US" sz="900" u="none" strike="noStrike">
+                        <a:rPr lang="en-US" sz="1100" u="none" strike="noStrike">
                           <a:effectLst/>
                         </a:rPr>
                         <a:t>[11%, 29%]</a:t>
                       </a:r>
-                      <a:endParaRPr lang="en-US" sz="900" b="0" i="0" u="none" strike="noStrike">
+                      <a:endParaRPr lang="en-US" sz="1100" b="0" i="0" u="none" strike="noStrike">
                         <a:solidFill>
                           <a:srgbClr val="E0DEF1"/>
                         </a:solidFill>
@@ -26164,12 +27483,12 @@
                         <a:buNone/>
                       </a:pPr>
                       <a:r>
-                        <a:rPr lang="en-US" sz="900" u="none" strike="noStrike">
+                        <a:rPr lang="en-US" sz="1100" u="none" strike="noStrike">
                           <a:effectLst/>
                         </a:rPr>
                         <a:t>5</a:t>
                       </a:r>
-                      <a:endParaRPr lang="en-US" sz="900" b="0" i="0" u="none" strike="noStrike">
+                      <a:endParaRPr lang="en-US" sz="1100" b="0" i="0" u="none" strike="noStrike">
                         <a:solidFill>
                           <a:srgbClr val="E0DEF1"/>
                         </a:solidFill>
@@ -26189,12 +27508,12 @@
                         <a:buNone/>
                       </a:pPr>
                       <a:r>
-                        <a:rPr lang="en-US" sz="900" u="none" strike="noStrike">
+                        <a:rPr lang="en-US" sz="1100" u="none" strike="noStrike">
                           <a:effectLst/>
                         </a:rPr>
                         <a:t>11.63%</a:t>
                       </a:r>
-                      <a:endParaRPr lang="en-US" sz="900" b="0" i="0" u="none" strike="noStrike">
+                      <a:endParaRPr lang="en-US" sz="1100" b="0" i="0" u="none" strike="noStrike">
                         <a:solidFill>
                           <a:srgbClr val="E0DEF1"/>
                         </a:solidFill>
@@ -26211,7 +27530,7 @@
                   </a:ext>
                 </a:extLst>
               </a:tr>
-              <a:tr h="200175">
+              <a:tr h="216582">
                 <a:tc>
                   <a:txBody>
                     <a:bodyPr/>
@@ -26220,7 +27539,7 @@
                       <a:pPr algn="l" fontAlgn="b">
                         <a:buNone/>
                       </a:pPr>
-                      <a:endParaRPr lang="en-US" sz="900" b="1" i="0" u="none" strike="noStrike">
+                      <a:endParaRPr lang="en-US" sz="1400" b="1" i="0" u="none" strike="noStrike">
                         <a:solidFill>
                           <a:srgbClr val="FFFFFF"/>
                         </a:solidFill>
@@ -26239,7 +27558,7 @@
                       <a:pPr algn="l" fontAlgn="b">
                         <a:buNone/>
                       </a:pPr>
-                      <a:endParaRPr lang="en-US" sz="900" b="1" i="0" u="none" strike="noStrike">
+                      <a:endParaRPr lang="en-US" sz="1100" b="1" i="0" u="none" strike="noStrike">
                         <a:solidFill>
                           <a:srgbClr val="FFFFFF"/>
                         </a:solidFill>
@@ -26259,12 +27578,12 @@
                         <a:buNone/>
                       </a:pPr>
                       <a:r>
-                        <a:rPr lang="en-US" sz="900" u="none" strike="noStrike">
+                        <a:rPr lang="en-US" sz="1100" u="none" strike="noStrike">
                           <a:effectLst/>
                         </a:rPr>
                         <a:t>&lt;= 10%</a:t>
                       </a:r>
-                      <a:endParaRPr lang="en-US" sz="900" b="0" i="0" u="none" strike="noStrike">
+                      <a:endParaRPr lang="en-US" sz="1100" b="0" i="0" u="none" strike="noStrike">
                         <a:solidFill>
                           <a:srgbClr val="E0DEF1"/>
                         </a:solidFill>
@@ -26284,12 +27603,12 @@
                         <a:buNone/>
                       </a:pPr>
                       <a:r>
-                        <a:rPr lang="en-US" sz="900" u="none" strike="noStrike">
+                        <a:rPr lang="en-US" sz="1100" u="none" strike="noStrike">
                           <a:effectLst/>
                         </a:rPr>
                         <a:t>4</a:t>
                       </a:r>
-                      <a:endParaRPr lang="en-US" sz="900" b="0" i="0" u="none" strike="noStrike">
+                      <a:endParaRPr lang="en-US" sz="1100" b="0" i="0" u="none" strike="noStrike">
                         <a:solidFill>
                           <a:srgbClr val="E0DEF1"/>
                         </a:solidFill>
@@ -26309,12 +27628,12 @@
                         <a:buNone/>
                       </a:pPr>
                       <a:r>
-                        <a:rPr lang="en-US" sz="900" u="none" strike="noStrike">
+                        <a:rPr lang="en-US" sz="1100" u="none" strike="noStrike">
                           <a:effectLst/>
                         </a:rPr>
                         <a:t>9.30%</a:t>
                       </a:r>
-                      <a:endParaRPr lang="en-US" sz="900" b="0" i="0" u="none" strike="noStrike">
+                      <a:endParaRPr lang="en-US" sz="1100" b="0" i="0" u="none" strike="noStrike">
                         <a:solidFill>
                           <a:srgbClr val="E0DEF1"/>
                         </a:solidFill>
@@ -26331,7 +27650,7 @@
                   </a:ext>
                 </a:extLst>
               </a:tr>
-              <a:tr h="200175">
+              <a:tr h="216582">
                 <a:tc>
                   <a:txBody>
                     <a:bodyPr/>
@@ -26340,7 +27659,7 @@
                       <a:pPr algn="l" fontAlgn="b">
                         <a:buNone/>
                       </a:pPr>
-                      <a:endParaRPr lang="en-US" sz="900" b="1" i="0" u="none" strike="noStrike">
+                      <a:endParaRPr lang="en-US" sz="1400" b="1" i="0" u="none" strike="noStrike">
                         <a:solidFill>
                           <a:srgbClr val="FFFFFF"/>
                         </a:solidFill>
@@ -26359,7 +27678,7 @@
                       <a:pPr algn="l" fontAlgn="b">
                         <a:buNone/>
                       </a:pPr>
-                      <a:endParaRPr lang="en-US" sz="900" b="1" i="0" u="none" strike="noStrike">
+                      <a:endParaRPr lang="en-US" sz="1100" b="1" i="0" u="none" strike="noStrike">
                         <a:solidFill>
                           <a:srgbClr val="FFFFFF"/>
                         </a:solidFill>
@@ -26379,12 +27698,12 @@
                         <a:buNone/>
                       </a:pPr>
                       <a:r>
-                        <a:rPr lang="en-US" sz="900" u="none" strike="noStrike">
+                        <a:rPr lang="en-US" sz="1100" u="none" strike="noStrike">
                           <a:effectLst/>
                         </a:rPr>
                         <a:t>&gt;= 30%</a:t>
                       </a:r>
-                      <a:endParaRPr lang="en-US" sz="900" b="0" i="0" u="none" strike="noStrike">
+                      <a:endParaRPr lang="en-US" sz="1100" b="0" i="0" u="none" strike="noStrike">
                         <a:solidFill>
                           <a:srgbClr val="E0DEF1"/>
                         </a:solidFill>
@@ -26404,12 +27723,12 @@
                         <a:buNone/>
                       </a:pPr>
                       <a:r>
-                        <a:rPr lang="en-US" sz="900" u="none" strike="noStrike">
+                        <a:rPr lang="en-US" sz="1100" u="none" strike="noStrike">
                           <a:effectLst/>
                         </a:rPr>
                         <a:t>4</a:t>
                       </a:r>
-                      <a:endParaRPr lang="en-US" sz="900" b="0" i="0" u="none" strike="noStrike">
+                      <a:endParaRPr lang="en-US" sz="1100" b="0" i="0" u="none" strike="noStrike">
                         <a:solidFill>
                           <a:srgbClr val="E0DEF1"/>
                         </a:solidFill>
@@ -26429,12 +27748,12 @@
                         <a:buNone/>
                       </a:pPr>
                       <a:r>
-                        <a:rPr lang="en-US" sz="900" u="none" strike="noStrike">
+                        <a:rPr lang="en-US" sz="1100" u="none" strike="noStrike">
                           <a:effectLst/>
                         </a:rPr>
                         <a:t>9.30%</a:t>
                       </a:r>
-                      <a:endParaRPr lang="en-US" sz="900" b="0" i="0" u="none" strike="noStrike">
+                      <a:endParaRPr lang="en-US" sz="1100" b="0" i="0" u="none" strike="noStrike">
                         <a:solidFill>
                           <a:srgbClr val="E0DEF1"/>
                         </a:solidFill>
@@ -26451,7 +27770,7 @@
                   </a:ext>
                 </a:extLst>
               </a:tr>
-              <a:tr h="200175">
+              <a:tr h="216582">
                 <a:tc>
                   <a:txBody>
                     <a:bodyPr/>
@@ -26460,7 +27779,7 @@
                       <a:pPr algn="l" fontAlgn="b">
                         <a:buNone/>
                       </a:pPr>
-                      <a:endParaRPr lang="en-US" sz="900" b="1" i="0" u="none" strike="noStrike">
+                      <a:endParaRPr lang="en-US" sz="1400" b="1" i="0" u="none" strike="noStrike">
                         <a:solidFill>
                           <a:srgbClr val="FFFFFF"/>
                         </a:solidFill>
@@ -26480,12 +27799,12 @@
                         <a:buNone/>
                       </a:pPr>
                       <a:r>
-                        <a:rPr lang="en-US" sz="900" u="none" strike="noStrike">
+                        <a:rPr lang="en-US" sz="1100" u="none" strike="noStrike">
                           <a:effectLst/>
                         </a:rPr>
                         <a:t>Femme Total</a:t>
                       </a:r>
-                      <a:endParaRPr lang="en-US" sz="900" b="0" i="0" u="none" strike="noStrike">
+                      <a:endParaRPr lang="en-US" sz="1100" b="0" i="0" u="none" strike="noStrike">
                         <a:solidFill>
                           <a:srgbClr val="E0DEF1"/>
                         </a:solidFill>
@@ -26504,7 +27823,7 @@
                       <a:pPr algn="l" fontAlgn="b">
                         <a:buNone/>
                       </a:pPr>
-                      <a:endParaRPr lang="en-US" sz="900" b="0" i="0" u="none" strike="noStrike">
+                      <a:endParaRPr lang="en-US" sz="1100" b="0" i="0" u="none" strike="noStrike">
                         <a:solidFill>
                           <a:srgbClr val="E0DEF1"/>
                         </a:solidFill>
@@ -26524,12 +27843,12 @@
                         <a:buNone/>
                       </a:pPr>
                       <a:r>
-                        <a:rPr lang="en-US" sz="900" u="none" strike="noStrike">
+                        <a:rPr lang="en-US" sz="1100" u="none" strike="noStrike">
                           <a:effectLst/>
                         </a:rPr>
                         <a:t>13</a:t>
                       </a:r>
-                      <a:endParaRPr lang="en-US" sz="900" b="0" i="0" u="none" strike="noStrike">
+                      <a:endParaRPr lang="en-US" sz="1100" b="0" i="0" u="none" strike="noStrike">
                         <a:solidFill>
                           <a:srgbClr val="E0DEF1"/>
                         </a:solidFill>
@@ -26549,12 +27868,12 @@
                         <a:buNone/>
                       </a:pPr>
                       <a:r>
-                        <a:rPr lang="en-US" sz="900" u="none" strike="noStrike">
+                        <a:rPr lang="en-US" sz="1100" u="none" strike="noStrike">
                           <a:effectLst/>
                         </a:rPr>
                         <a:t>30.23%</a:t>
                       </a:r>
-                      <a:endParaRPr lang="en-US" sz="900" b="0" i="0" u="none" strike="noStrike">
+                      <a:endParaRPr lang="en-US" sz="1100" b="0" i="0" u="none" strike="noStrike">
                         <a:solidFill>
                           <a:srgbClr val="E0DEF1"/>
                         </a:solidFill>
@@ -26571,7 +27890,7 @@
                   </a:ext>
                 </a:extLst>
               </a:tr>
-              <a:tr h="200175">
+              <a:tr h="216582">
                 <a:tc>
                   <a:txBody>
                     <a:bodyPr/>
@@ -26580,7 +27899,7 @@
                       <a:pPr algn="l" fontAlgn="b">
                         <a:buNone/>
                       </a:pPr>
-                      <a:endParaRPr lang="en-US" sz="900" b="1" i="0" u="none" strike="noStrike">
+                      <a:endParaRPr lang="en-US" sz="1400" b="1" i="0" u="none" strike="noStrike">
                         <a:solidFill>
                           <a:srgbClr val="FFFFFF"/>
                         </a:solidFill>
@@ -26600,12 +27919,12 @@
                         <a:buNone/>
                       </a:pPr>
                       <a:r>
-                        <a:rPr lang="en-US" sz="900" u="none" strike="noStrike">
+                        <a:rPr lang="en-US" sz="1100" u="none" strike="noStrike">
                           <a:effectLst/>
                         </a:rPr>
                         <a:t>Homme</a:t>
                       </a:r>
-                      <a:endParaRPr lang="en-US" sz="900" b="1" i="0" u="none" strike="noStrike">
+                      <a:endParaRPr lang="en-US" sz="1100" b="1" i="0" u="none" strike="noStrike">
                         <a:solidFill>
                           <a:srgbClr val="FFFFFF"/>
                         </a:solidFill>
@@ -26625,12 +27944,12 @@
                         <a:buNone/>
                       </a:pPr>
                       <a:r>
-                        <a:rPr lang="en-US" sz="900" u="none" strike="noStrike">
+                        <a:rPr lang="en-US" sz="1100" u="none" strike="noStrike">
                           <a:effectLst/>
                         </a:rPr>
                         <a:t>[11%, 29%]</a:t>
                       </a:r>
-                      <a:endParaRPr lang="en-US" sz="900" b="0" i="0" u="none" strike="noStrike">
+                      <a:endParaRPr lang="en-US" sz="1100" b="0" i="0" u="none" strike="noStrike">
                         <a:solidFill>
                           <a:srgbClr val="E0DEF1"/>
                         </a:solidFill>
@@ -26650,12 +27969,12 @@
                         <a:buNone/>
                       </a:pPr>
                       <a:r>
-                        <a:rPr lang="en-US" sz="900" u="none" strike="noStrike">
+                        <a:rPr lang="en-US" sz="1100" u="none" strike="noStrike">
                           <a:effectLst/>
                         </a:rPr>
                         <a:t>4</a:t>
                       </a:r>
-                      <a:endParaRPr lang="en-US" sz="900" b="0" i="0" u="none" strike="noStrike">
+                      <a:endParaRPr lang="en-US" sz="1100" b="0" i="0" u="none" strike="noStrike">
                         <a:solidFill>
                           <a:srgbClr val="E0DEF1"/>
                         </a:solidFill>
@@ -26675,12 +27994,12 @@
                         <a:buNone/>
                       </a:pPr>
                       <a:r>
-                        <a:rPr lang="en-US" sz="900" u="none" strike="noStrike">
+                        <a:rPr lang="en-US" sz="1100" u="none" strike="noStrike">
                           <a:effectLst/>
                         </a:rPr>
                         <a:t>9.30%</a:t>
                       </a:r>
-                      <a:endParaRPr lang="en-US" sz="900" b="0" i="0" u="none" strike="noStrike">
+                      <a:endParaRPr lang="en-US" sz="1100" b="0" i="0" u="none" strike="noStrike">
                         <a:solidFill>
                           <a:srgbClr val="E0DEF1"/>
                         </a:solidFill>
@@ -26697,7 +28016,7 @@
                   </a:ext>
                 </a:extLst>
               </a:tr>
-              <a:tr h="200175">
+              <a:tr h="216582">
                 <a:tc>
                   <a:txBody>
                     <a:bodyPr/>
@@ -26706,7 +28025,7 @@
                       <a:pPr algn="l" fontAlgn="b">
                         <a:buNone/>
                       </a:pPr>
-                      <a:endParaRPr lang="en-US" sz="900" b="1" i="0" u="none" strike="noStrike">
+                      <a:endParaRPr lang="en-US" sz="1400" b="1" i="0" u="none" strike="noStrike">
                         <a:solidFill>
                           <a:srgbClr val="FFFFFF"/>
                         </a:solidFill>
@@ -26725,7 +28044,7 @@
                       <a:pPr algn="l" fontAlgn="b">
                         <a:buNone/>
                       </a:pPr>
-                      <a:endParaRPr lang="en-US" sz="900" b="1" i="0" u="none" strike="noStrike">
+                      <a:endParaRPr lang="en-US" sz="1100" b="1" i="0" u="none" strike="noStrike">
                         <a:solidFill>
                           <a:srgbClr val="FFFFFF"/>
                         </a:solidFill>
@@ -26745,12 +28064,12 @@
                         <a:buNone/>
                       </a:pPr>
                       <a:r>
-                        <a:rPr lang="en-US" sz="900" u="none" strike="noStrike">
+                        <a:rPr lang="en-US" sz="1100" u="none" strike="noStrike">
                           <a:effectLst/>
                         </a:rPr>
                         <a:t>&lt;= 10%</a:t>
                       </a:r>
-                      <a:endParaRPr lang="en-US" sz="900" b="0" i="0" u="none" strike="noStrike">
+                      <a:endParaRPr lang="en-US" sz="1100" b="0" i="0" u="none" strike="noStrike">
                         <a:solidFill>
                           <a:srgbClr val="E0DEF1"/>
                         </a:solidFill>
@@ -26770,12 +28089,12 @@
                         <a:buNone/>
                       </a:pPr>
                       <a:r>
-                        <a:rPr lang="en-US" sz="900" u="none" strike="noStrike">
+                        <a:rPr lang="en-US" sz="1100" u="none" strike="noStrike">
                           <a:effectLst/>
                         </a:rPr>
                         <a:t>4</a:t>
                       </a:r>
-                      <a:endParaRPr lang="en-US" sz="900" b="0" i="0" u="none" strike="noStrike">
+                      <a:endParaRPr lang="en-US" sz="1100" b="0" i="0" u="none" strike="noStrike">
                         <a:solidFill>
                           <a:srgbClr val="E0DEF1"/>
                         </a:solidFill>
@@ -26795,12 +28114,12 @@
                         <a:buNone/>
                       </a:pPr>
                       <a:r>
-                        <a:rPr lang="en-US" sz="900" u="none" strike="noStrike">
+                        <a:rPr lang="en-US" sz="1100" u="none" strike="noStrike">
                           <a:effectLst/>
                         </a:rPr>
                         <a:t>9.30%</a:t>
                       </a:r>
-                      <a:endParaRPr lang="en-US" sz="900" b="0" i="0" u="none" strike="noStrike">
+                      <a:endParaRPr lang="en-US" sz="1100" b="0" i="0" u="none" strike="noStrike">
                         <a:solidFill>
                           <a:srgbClr val="E0DEF1"/>
                         </a:solidFill>
@@ -26817,7 +28136,7 @@
                   </a:ext>
                 </a:extLst>
               </a:tr>
-              <a:tr h="200175">
+              <a:tr h="216582">
                 <a:tc>
                   <a:txBody>
                     <a:bodyPr/>
@@ -26826,7 +28145,7 @@
                       <a:pPr algn="l" fontAlgn="b">
                         <a:buNone/>
                       </a:pPr>
-                      <a:endParaRPr lang="en-US" sz="900" b="1" i="0" u="none" strike="noStrike">
+                      <a:endParaRPr lang="en-US" sz="1400" b="1" i="0" u="none" strike="noStrike">
                         <a:solidFill>
                           <a:srgbClr val="FFFFFF"/>
                         </a:solidFill>
@@ -26845,7 +28164,7 @@
                       <a:pPr algn="l" fontAlgn="b">
                         <a:buNone/>
                       </a:pPr>
-                      <a:endParaRPr lang="en-US" sz="900" b="1" i="0" u="none" strike="noStrike">
+                      <a:endParaRPr lang="en-US" sz="1100" b="1" i="0" u="none" strike="noStrike" dirty="0">
                         <a:solidFill>
                           <a:srgbClr val="FFFFFF"/>
                         </a:solidFill>
@@ -26865,12 +28184,12 @@
                         <a:buNone/>
                       </a:pPr>
                       <a:r>
-                        <a:rPr lang="en-US" sz="900" u="none" strike="noStrike">
+                        <a:rPr lang="en-US" sz="1100" u="none" strike="noStrike">
                           <a:effectLst/>
                         </a:rPr>
                         <a:t>&gt;= 30%</a:t>
                       </a:r>
-                      <a:endParaRPr lang="en-US" sz="900" b="0" i="0" u="none" strike="noStrike">
+                      <a:endParaRPr lang="en-US" sz="1100" b="0" i="0" u="none" strike="noStrike">
                         <a:solidFill>
                           <a:srgbClr val="E0DEF1"/>
                         </a:solidFill>
@@ -26890,12 +28209,12 @@
                         <a:buNone/>
                       </a:pPr>
                       <a:r>
-                        <a:rPr lang="en-US" sz="900" u="none" strike="noStrike">
+                        <a:rPr lang="en-US" sz="1100" u="none" strike="noStrike">
                           <a:effectLst/>
                         </a:rPr>
                         <a:t>6</a:t>
                       </a:r>
-                      <a:endParaRPr lang="en-US" sz="900" b="0" i="0" u="none" strike="noStrike">
+                      <a:endParaRPr lang="en-US" sz="1100" b="0" i="0" u="none" strike="noStrike">
                         <a:solidFill>
                           <a:srgbClr val="E0DEF1"/>
                         </a:solidFill>
@@ -26915,12 +28234,12 @@
                         <a:buNone/>
                       </a:pPr>
                       <a:r>
-                        <a:rPr lang="en-US" sz="900" u="none" strike="noStrike">
+                        <a:rPr lang="en-US" sz="1100" u="none" strike="noStrike">
                           <a:effectLst/>
                         </a:rPr>
                         <a:t>13.95%</a:t>
                       </a:r>
-                      <a:endParaRPr lang="en-US" sz="900" b="0" i="0" u="none" strike="noStrike">
+                      <a:endParaRPr lang="en-US" sz="1100" b="0" i="0" u="none" strike="noStrike">
                         <a:solidFill>
                           <a:srgbClr val="E0DEF1"/>
                         </a:solidFill>
@@ -26937,7 +28256,7 @@
                   </a:ext>
                 </a:extLst>
               </a:tr>
-              <a:tr h="200175">
+              <a:tr h="216582">
                 <a:tc>
                   <a:txBody>
                     <a:bodyPr/>
@@ -26946,7 +28265,7 @@
                       <a:pPr algn="l" fontAlgn="b">
                         <a:buNone/>
                       </a:pPr>
-                      <a:endParaRPr lang="en-US" sz="900" b="1" i="0" u="none" strike="noStrike">
+                      <a:endParaRPr lang="en-US" sz="1400" b="1" i="0" u="none" strike="noStrike">
                         <a:solidFill>
                           <a:srgbClr val="FFFFFF"/>
                         </a:solidFill>
@@ -26966,12 +28285,12 @@
                         <a:buNone/>
                       </a:pPr>
                       <a:r>
-                        <a:rPr lang="en-US" sz="900" u="none" strike="noStrike">
+                        <a:rPr lang="en-US" sz="1100" u="none" strike="noStrike">
                           <a:effectLst/>
                         </a:rPr>
                         <a:t>Homme Total</a:t>
                       </a:r>
-                      <a:endParaRPr lang="en-US" sz="900" b="0" i="0" u="none" strike="noStrike">
+                      <a:endParaRPr lang="en-US" sz="1100" b="0" i="0" u="none" strike="noStrike">
                         <a:solidFill>
                           <a:srgbClr val="E0DEF1"/>
                         </a:solidFill>
@@ -26990,7 +28309,7 @@
                       <a:pPr algn="l" fontAlgn="b">
                         <a:buNone/>
                       </a:pPr>
-                      <a:endParaRPr lang="en-US" sz="900" b="0" i="0" u="none" strike="noStrike">
+                      <a:endParaRPr lang="en-US" sz="1100" b="0" i="0" u="none" strike="noStrike">
                         <a:solidFill>
                           <a:srgbClr val="E0DEF1"/>
                         </a:solidFill>
@@ -27010,12 +28329,12 @@
                         <a:buNone/>
                       </a:pPr>
                       <a:r>
-                        <a:rPr lang="en-US" sz="900" u="none" strike="noStrike">
+                        <a:rPr lang="en-US" sz="1100" u="none" strike="noStrike">
                           <a:effectLst/>
                         </a:rPr>
                         <a:t>14</a:t>
                       </a:r>
-                      <a:endParaRPr lang="en-US" sz="900" b="0" i="0" u="none" strike="noStrike">
+                      <a:endParaRPr lang="en-US" sz="1100" b="0" i="0" u="none" strike="noStrike">
                         <a:solidFill>
                           <a:srgbClr val="E0DEF1"/>
                         </a:solidFill>
@@ -27035,12 +28354,12 @@
                         <a:buNone/>
                       </a:pPr>
                       <a:r>
-                        <a:rPr lang="en-US" sz="900" u="none" strike="noStrike">
+                        <a:rPr lang="en-US" sz="1100" u="none" strike="noStrike">
                           <a:effectLst/>
                         </a:rPr>
                         <a:t>32.56%</a:t>
                       </a:r>
-                      <a:endParaRPr lang="en-US" sz="900" b="0" i="0" u="none" strike="noStrike">
+                      <a:endParaRPr lang="en-US" sz="1100" b="0" i="0" u="none" strike="noStrike">
                         <a:solidFill>
                           <a:srgbClr val="E0DEF1"/>
                         </a:solidFill>
@@ -27057,7 +28376,7 @@
                   </a:ext>
                 </a:extLst>
               </a:tr>
-              <a:tr h="200175">
+              <a:tr h="216582">
                 <a:tc>
                   <a:txBody>
                     <a:bodyPr/>
@@ -27067,12 +28386,12 @@
                         <a:buNone/>
                       </a:pPr>
                       <a:r>
-                        <a:rPr lang="en-US" sz="900" u="none" strike="noStrike">
+                        <a:rPr lang="en-US" sz="1400" b="1" u="none" strike="noStrike">
                           <a:effectLst/>
                         </a:rPr>
                         <a:t>Toxidermie Total</a:t>
                       </a:r>
-                      <a:endParaRPr lang="en-US" sz="900" b="1" i="0" u="none" strike="noStrike">
+                      <a:endParaRPr lang="en-US" sz="1400" b="1" i="0" u="none" strike="noStrike">
                         <a:solidFill>
                           <a:srgbClr val="FFFFFF"/>
                         </a:solidFill>
@@ -27091,7 +28410,7 @@
                       <a:pPr algn="l" fontAlgn="b">
                         <a:buNone/>
                       </a:pPr>
-                      <a:endParaRPr lang="en-US" sz="900" b="1" i="0" u="none" strike="noStrike">
+                      <a:endParaRPr lang="en-US" sz="1100" b="1" i="0" u="none" strike="noStrike" dirty="0">
                         <a:solidFill>
                           <a:srgbClr val="FFFFFF"/>
                         </a:solidFill>
@@ -27110,7 +28429,7 @@
                       <a:pPr algn="l" fontAlgn="b">
                         <a:buNone/>
                       </a:pPr>
-                      <a:endParaRPr lang="en-US" sz="900" b="1" i="0" u="none" strike="noStrike">
+                      <a:endParaRPr lang="en-US" sz="1100" b="1" i="0" u="none" strike="noStrike">
                         <a:solidFill>
                           <a:srgbClr val="FFFFFF"/>
                         </a:solidFill>
@@ -27130,12 +28449,12 @@
                         <a:buNone/>
                       </a:pPr>
                       <a:r>
-                        <a:rPr lang="en-US" sz="900" u="none" strike="noStrike">
+                        <a:rPr lang="en-US" sz="1100" u="none" strike="noStrike">
                           <a:effectLst/>
                         </a:rPr>
                         <a:t>27</a:t>
                       </a:r>
-                      <a:endParaRPr lang="en-US" sz="900" b="1" i="0" u="none" strike="noStrike">
+                      <a:endParaRPr lang="en-US" sz="1100" b="1" i="0" u="none" strike="noStrike">
                         <a:solidFill>
                           <a:srgbClr val="FFFFFF"/>
                         </a:solidFill>
@@ -27155,12 +28474,12 @@
                         <a:buNone/>
                       </a:pPr>
                       <a:r>
-                        <a:rPr lang="en-US" sz="900" u="none" strike="noStrike">
+                        <a:rPr lang="en-US" sz="1100" u="none" strike="noStrike">
                           <a:effectLst/>
                         </a:rPr>
                         <a:t>62.79%</a:t>
                       </a:r>
-                      <a:endParaRPr lang="en-US" sz="900" b="1" i="0" u="none" strike="noStrike">
+                      <a:endParaRPr lang="en-US" sz="1100" b="1" i="0" u="none" strike="noStrike">
                         <a:solidFill>
                           <a:srgbClr val="FFFFFF"/>
                         </a:solidFill>
@@ -27177,7 +28496,7 @@
                   </a:ext>
                 </a:extLst>
               </a:tr>
-              <a:tr h="200175">
+              <a:tr h="216582">
                 <a:tc>
                   <a:txBody>
                     <a:bodyPr/>
@@ -27187,12 +28506,12 @@
                         <a:buNone/>
                       </a:pPr>
                       <a:r>
-                        <a:rPr lang="en-US" sz="900" u="none" strike="noStrike">
+                        <a:rPr lang="en-US" sz="1400" b="1" u="none" strike="noStrike" dirty="0">
                           <a:effectLst/>
                         </a:rPr>
                         <a:t>Grand Total</a:t>
                       </a:r>
-                      <a:endParaRPr lang="en-US" sz="900" b="1" i="0" u="none" strike="noStrike">
+                      <a:endParaRPr lang="en-US" sz="1400" b="1" i="0" u="none" strike="noStrike" dirty="0">
                         <a:solidFill>
                           <a:srgbClr val="FFFFFF"/>
                         </a:solidFill>
@@ -27211,7 +28530,7 @@
                       <a:pPr algn="l" fontAlgn="b">
                         <a:buNone/>
                       </a:pPr>
-                      <a:endParaRPr lang="en-US" sz="900" b="1" i="0" u="none" strike="noStrike">
+                      <a:endParaRPr lang="en-US" sz="1100" b="1" i="0" u="none" strike="noStrike" dirty="0">
                         <a:solidFill>
                           <a:srgbClr val="FFFFFF"/>
                         </a:solidFill>
@@ -27230,7 +28549,7 @@
                       <a:pPr algn="l" fontAlgn="b">
                         <a:buNone/>
                       </a:pPr>
-                      <a:endParaRPr lang="en-US" sz="900" b="1" i="0" u="none" strike="noStrike">
+                      <a:endParaRPr lang="en-US" sz="1100" b="1" i="0" u="none" strike="noStrike">
                         <a:solidFill>
                           <a:srgbClr val="FFFFFF"/>
                         </a:solidFill>
@@ -27250,12 +28569,12 @@
                         <a:buNone/>
                       </a:pPr>
                       <a:r>
-                        <a:rPr lang="en-US" sz="900" u="none" strike="noStrike">
+                        <a:rPr lang="en-US" sz="1100" u="none" strike="noStrike">
                           <a:effectLst/>
                         </a:rPr>
                         <a:t>43</a:t>
                       </a:r>
-                      <a:endParaRPr lang="en-US" sz="900" b="1" i="0" u="none" strike="noStrike">
+                      <a:endParaRPr lang="en-US" sz="1100" b="1" i="0" u="none" strike="noStrike">
                         <a:solidFill>
                           <a:srgbClr val="FFFFFF"/>
                         </a:solidFill>
@@ -27275,12 +28594,12 @@
                         <a:buNone/>
                       </a:pPr>
                       <a:r>
-                        <a:rPr lang="en-US" sz="900" u="none" strike="noStrike">
+                        <a:rPr lang="en-US" sz="1100" u="none" strike="noStrike" dirty="0">
                           <a:effectLst/>
                         </a:rPr>
                         <a:t>100.00%</a:t>
                       </a:r>
-                      <a:endParaRPr lang="en-US" sz="900" b="1" i="0" u="none" strike="noStrike">
+                      <a:endParaRPr lang="en-US" sz="1100" b="1" i="0" u="none" strike="noStrike" dirty="0">
                         <a:solidFill>
                           <a:srgbClr val="FFFFFF"/>
                         </a:solidFill>
@@ -27945,8 +29264,8 @@
         </p:nvSpPr>
         <p:spPr>
           <a:xfrm>
-            <a:off x="2562846" y="439446"/>
-            <a:ext cx="7066305" cy="910110"/>
+            <a:off x="1080654" y="121792"/>
+            <a:ext cx="9781310" cy="910110"/>
           </a:xfrm>
           <a:prstGeom prst="rect">
             <a:avLst/>
@@ -27982,89 +29301,15 @@
               </a:spcBef>
             </a:pPr>
             <a:r>
-              <a:rPr lang="fr-FR" sz="5400" b="1" dirty="0">
+              <a:rPr lang="fr-FR" sz="4000" b="1" dirty="0">
                 <a:solidFill>
                   <a:srgbClr val="005B2C"/>
                 </a:solidFill>
                 <a:latin typeface="Arial" panose="020B0604020202020204" pitchFamily="34" charset="0"/>
                 <a:cs typeface="Arial" panose="020B0604020202020204" pitchFamily="34" charset="0"/>
               </a:rPr>
-              <a:t>Discussion</a:t>
-            </a:r>
-          </a:p>
-        </p:txBody>
-      </p:sp>
-      <p:sp>
-        <p:nvSpPr>
-          <p:cNvPr id="19" name="Google Shape;611;p48">
-            <a:extLst>
-              <a:ext uri="{FF2B5EF4-FFF2-40B4-BE49-F238E27FC236}">
-                <a16:creationId xmlns:a16="http://schemas.microsoft.com/office/drawing/2014/main" id="{07BE9327-AD43-4E9A-905C-A8350B87C291}"/>
-              </a:ext>
-            </a:extLst>
-          </p:cNvPr>
-          <p:cNvSpPr txBox="1">
-            <a:spLocks noGrp="1"/>
-          </p:cNvSpPr>
-          <p:nvPr>
-            <p:ph type="subTitle" idx="4294967295"/>
-          </p:nvPr>
-        </p:nvSpPr>
-        <p:spPr>
-          <a:xfrm>
-            <a:off x="998102" y="1349556"/>
-            <a:ext cx="10195791" cy="4660671"/>
-          </a:xfrm>
-          <a:prstGeom prst="rect">
-            <a:avLst/>
-          </a:prstGeom>
-        </p:spPr>
-        <p:txBody>
-          <a:bodyPr spcFirstLastPara="1" wrap="square" lIns="91425" tIns="91425" rIns="91425" bIns="91425" anchor="t" anchorCtr="0">
-            <a:noAutofit/>
-          </a:bodyPr>
-          <a:lstStyle/>
-          <a:p>
-            <a:pPr marL="25400" lvl="0" indent="0">
-              <a:spcBef>
-                <a:spcPts val="0"/>
-              </a:spcBef>
-              <a:buNone/>
-            </a:pPr>
-            <a:r>
-              <a:rPr lang="fr-BE" dirty="0"/>
-              <a:t>Cette étude révèle une fréquence qui, bien que modeste, témoigne d’une présence non négligeable des dermatoses bulleuses des sujets âgés en pratique dermatologique hospitalière au Bénin.</a:t>
-            </a:r>
-          </a:p>
-          <a:p>
-            <a:pPr marL="25400" lvl="0" indent="0">
-              <a:spcBef>
-                <a:spcPts val="0"/>
-              </a:spcBef>
-              <a:buNone/>
-            </a:pPr>
-            <a:endParaRPr lang="fr-BE" dirty="0"/>
-          </a:p>
-          <a:p>
-            <a:pPr marL="25400" lvl="0" indent="0">
-              <a:spcBef>
-                <a:spcPts val="0"/>
-              </a:spcBef>
-              <a:buNone/>
-            </a:pPr>
-            <a:r>
-              <a:rPr lang="fr-BE" dirty="0"/>
-              <a:t>Tout comme ce qui est retrouvé dans la littérature, la pemphigoïde bulleuse est en tête de liste malgré la diversité des entités nosologiques identifiées</a:t>
-            </a:r>
-            <a:endParaRPr sz="2400" dirty="0">
-              <a:solidFill>
-                <a:schemeClr val="tx1">
-                  <a:lumMod val="95000"/>
-                  <a:lumOff val="5000"/>
-                </a:schemeClr>
-              </a:solidFill>
-              <a:latin typeface="Nunito Light" pitchFamily="2" charset="0"/>
-            </a:endParaRPr>
+              <a:t>Interprétation des résultats clés</a:t>
+            </a:r>
           </a:p>
         </p:txBody>
       </p:sp>
@@ -28094,6 +29339,230 @@
               <a:t>13</a:t>
             </a:fld>
             <a:endParaRPr lang="fr-FR" sz="2800" dirty="0"/>
+          </a:p>
+        </p:txBody>
+      </p:sp>
+      <p:sp>
+        <p:nvSpPr>
+          <p:cNvPr id="12" name="TextBox 11">
+            <a:extLst>
+              <a:ext uri="{FF2B5EF4-FFF2-40B4-BE49-F238E27FC236}">
+                <a16:creationId xmlns:a16="http://schemas.microsoft.com/office/drawing/2014/main" id="{7770114A-53A3-CEDF-684C-FFBE0C93E676}"/>
+              </a:ext>
+            </a:extLst>
+          </p:cNvPr>
+          <p:cNvSpPr txBox="1"/>
+          <p:nvPr/>
+        </p:nvSpPr>
+        <p:spPr>
+          <a:xfrm>
+            <a:off x="1080654" y="1099913"/>
+            <a:ext cx="10030692" cy="5022274"/>
+          </a:xfrm>
+          <a:prstGeom prst="roundRect">
+            <a:avLst>
+              <a:gd name="adj" fmla="val 5000"/>
+            </a:avLst>
+          </a:prstGeom>
+          <a:solidFill>
+            <a:srgbClr val="005B2C">
+              <a:alpha val="8000"/>
+            </a:srgbClr>
+          </a:solidFill>
+          <a:ln w="19050">
+            <a:solidFill>
+              <a:srgbClr val="C28300"/>
+            </a:solidFill>
+          </a:ln>
+        </p:spPr>
+        <p:txBody>
+          <a:bodyPr wrap="square" lIns="180000" tIns="120000" rIns="180000" bIns="120000" anchor="t">
+            <a:noAutofit/>
+          </a:bodyPr>
+          <a:lstStyle/>
+          <a:p>
+            <a:pPr algn="l">
+              <a:spcAft>
+                <a:spcPts val="400"/>
+              </a:spcAft>
+              <a:buNone/>
+            </a:pPr>
+            <a:r>
+              <a:rPr lang="fr-FR" sz="2000" b="1" i="0" dirty="0">
+                <a:solidFill>
+                  <a:srgbClr val="005B2C"/>
+                </a:solidFill>
+                <a:cs typeface="Arial" panose="020B0604020202020204" pitchFamily="34" charset="0"/>
+              </a:rPr>
+              <a:t>Prédominance des toxidermies (62,8 %) et des infections staphylococciques (30,2 %), couvrant 93 % de la cohorte : </a:t>
+            </a:r>
+            <a:r>
+              <a:rPr lang="fr-FR" b="0" i="0" dirty="0">
+                <a:solidFill>
+                  <a:srgbClr val="1F1F1F"/>
+                </a:solidFill>
+                <a:cs typeface="Arial" panose="020B0604020202020204" pitchFamily="34" charset="0"/>
+              </a:rPr>
+              <a:t>Hiérarchie diagnostique de première intention orientée vers l'interrogatoire médicamenteux et la recherche de porte d'entrée infectieuse</a:t>
+            </a:r>
+          </a:p>
+          <a:p>
+            <a:pPr fontAlgn="t">
+              <a:spcAft>
+                <a:spcPts val="200"/>
+              </a:spcAft>
+            </a:pPr>
+            <a:r>
+              <a:rPr lang="fr-FR" sz="2000" b="1" dirty="0">
+                <a:solidFill>
+                  <a:srgbClr val="005B2C"/>
+                </a:solidFill>
+                <a:cs typeface="Arial" panose="020B0604020202020204" pitchFamily="34" charset="0"/>
+              </a:rPr>
+              <a:t>Le couple Stevens-Johnson–Lyell représente 44,2 % de l'effectif global : </a:t>
+            </a:r>
+            <a:r>
+              <a:rPr lang="fr-FR" b="0" i="0" dirty="0">
+                <a:solidFill>
+                  <a:srgbClr val="1F1F1F"/>
+                </a:solidFill>
+                <a:cs typeface="Arial" panose="020B0604020202020204" pitchFamily="34" charset="0"/>
+              </a:rPr>
+              <a:t>Plaçant les formes </a:t>
+            </a:r>
+            <a:r>
+              <a:rPr lang="fr-FR" b="0" i="0" dirty="0" err="1">
+                <a:solidFill>
+                  <a:srgbClr val="1F1F1F"/>
+                </a:solidFill>
+                <a:cs typeface="Arial" panose="020B0604020202020204" pitchFamily="34" charset="0"/>
+              </a:rPr>
+              <a:t>nécrolytiques</a:t>
+            </a:r>
+            <a:r>
+              <a:rPr lang="fr-FR" b="0" i="0" dirty="0">
+                <a:solidFill>
+                  <a:srgbClr val="1F1F1F"/>
+                </a:solidFill>
+                <a:cs typeface="Arial" panose="020B0604020202020204" pitchFamily="34" charset="0"/>
+              </a:rPr>
+              <a:t> épidermiques au cœur du spectre nosologique et du risque vital dans ce contexte pédiatrique</a:t>
+            </a:r>
+          </a:p>
+          <a:p>
+            <a:pPr fontAlgn="t">
+              <a:spcAft>
+                <a:spcPts val="200"/>
+              </a:spcAft>
+            </a:pPr>
+            <a:r>
+              <a:rPr lang="fr-FR" sz="2000" b="1" dirty="0">
+                <a:solidFill>
+                  <a:srgbClr val="005B2C"/>
+                </a:solidFill>
+                <a:cs typeface="Arial" panose="020B0604020202020204" pitchFamily="34" charset="0"/>
+              </a:rPr>
+              <a:t>Gradient de gravité étiologique majeur : </a:t>
+            </a:r>
+            <a:r>
+              <a:rPr lang="fr-FR" b="0" i="0" dirty="0">
+                <a:solidFill>
+                  <a:srgbClr val="1F1F1F"/>
+                </a:solidFill>
+                <a:cs typeface="Arial" panose="020B0604020202020204" pitchFamily="34" charset="0"/>
+              </a:rPr>
+              <a:t>70,4 % des toxidermies présentent une atteinte ≥ 11 % de surface corporelle vs 15,4 % des infections (risque d'extension × 4,5), faisant de l'étiologie médicamenteuse le moteur quasi exclusif des formes étendues</a:t>
+            </a:r>
+          </a:p>
+          <a:p>
+            <a:pPr fontAlgn="t">
+              <a:lnSpc>
+                <a:spcPct val="100000"/>
+              </a:lnSpc>
+              <a:spcAft>
+                <a:spcPts val="200"/>
+              </a:spcAft>
+              <a:buNone/>
+            </a:pPr>
+            <a:r>
+              <a:rPr lang="fr-FR" sz="2000" b="1" dirty="0">
+                <a:solidFill>
+                  <a:srgbClr val="005B2C"/>
+                </a:solidFill>
+                <a:cs typeface="Arial" panose="020B0604020202020204" pitchFamily="34" charset="0"/>
+              </a:rPr>
+              <a:t>Confinement strict des infections staphylococciques aux formes localisées : </a:t>
+            </a:r>
+            <a:r>
+              <a:rPr lang="fr-FR" b="0" i="0" dirty="0">
+                <a:solidFill>
+                  <a:srgbClr val="1F1F1F"/>
+                </a:solidFill>
+                <a:cs typeface="Arial" panose="020B0604020202020204" pitchFamily="34" charset="0"/>
+              </a:rPr>
+              <a:t>(84,6 % ≤ 10 % de surface), contrastant avec l'ubiquité surfacique des toxidermies (présentes dans les 3 tranches de gravité)</a:t>
+            </a:r>
+          </a:p>
+          <a:p>
+            <a:pPr fontAlgn="t">
+              <a:spcAft>
+                <a:spcPts val="200"/>
+              </a:spcAft>
+            </a:pPr>
+            <a:r>
+              <a:rPr lang="fr-FR" sz="2000" b="1" dirty="0">
+                <a:solidFill>
+                  <a:srgbClr val="005B2C"/>
+                </a:solidFill>
+                <a:cs typeface="Arial" panose="020B0604020202020204" pitchFamily="34" charset="0"/>
+              </a:rPr>
+              <a:t>Prédominance masculine globale (sex-ratio 1,26) amplifiée dans les formes </a:t>
+            </a:r>
+            <a:r>
+              <a:rPr lang="fr-FR" sz="2000" b="1" dirty="0" err="1">
+                <a:solidFill>
+                  <a:srgbClr val="005B2C"/>
+                </a:solidFill>
+                <a:cs typeface="Arial" panose="020B0604020202020204" pitchFamily="34" charset="0"/>
+              </a:rPr>
+              <a:t>toxidermiques</a:t>
+            </a:r>
+            <a:r>
+              <a:rPr lang="fr-FR" sz="2000" b="1" dirty="0">
+                <a:solidFill>
+                  <a:srgbClr val="005B2C"/>
+                </a:solidFill>
+                <a:cs typeface="Arial" panose="020B0604020202020204" pitchFamily="34" charset="0"/>
+              </a:rPr>
+              <a:t> sévères ≥ 30 % : </a:t>
+            </a:r>
+            <a:r>
+              <a:rPr lang="fr-FR" b="0" i="0" dirty="0">
+                <a:solidFill>
+                  <a:srgbClr val="1F1F1F"/>
+                </a:solidFill>
+                <a:cs typeface="Arial" panose="020B0604020202020204" pitchFamily="34" charset="0"/>
+              </a:rPr>
+              <a:t>(sex-ratio 1,50), suggérant une vulnérabilité accrue des garçons aux épidermolyses </a:t>
+            </a:r>
+            <a:r>
+              <a:rPr lang="fr-FR" b="0" i="0" dirty="0" err="1">
+                <a:solidFill>
+                  <a:srgbClr val="1F1F1F"/>
+                </a:solidFill>
+                <a:cs typeface="Arial" panose="020B0604020202020204" pitchFamily="34" charset="0"/>
+              </a:rPr>
+              <a:t>nécrolytiques</a:t>
+            </a:r>
+            <a:r>
+              <a:rPr lang="fr-FR" b="0" i="0" dirty="0">
+                <a:solidFill>
+                  <a:srgbClr val="1F1F1F"/>
+                </a:solidFill>
+                <a:cs typeface="Arial" panose="020B0604020202020204" pitchFamily="34" charset="0"/>
+              </a:rPr>
+              <a:t> extensives</a:t>
+            </a:r>
           </a:p>
         </p:txBody>
       </p:sp>
@@ -28403,8 +29872,8 @@
         </p:nvSpPr>
         <p:spPr>
           <a:xfrm>
-            <a:off x="2562846" y="439446"/>
-            <a:ext cx="7066305" cy="910110"/>
+            <a:off x="838200" y="0"/>
+            <a:ext cx="10373139" cy="910110"/>
           </a:xfrm>
           <a:prstGeom prst="rect">
             <a:avLst/>
@@ -28440,310 +29909,28 @@
               </a:spcBef>
             </a:pPr>
             <a:r>
-              <a:rPr lang="fr-FR" sz="5400" b="1" dirty="0">
+              <a:rPr lang="fr-FR" sz="4000" b="1" dirty="0">
                 <a:solidFill>
                   <a:srgbClr val="005B2C"/>
                 </a:solidFill>
                 <a:latin typeface="Arial" panose="020B0604020202020204" pitchFamily="34" charset="0"/>
                 <a:cs typeface="Arial" panose="020B0604020202020204" pitchFamily="34" charset="0"/>
               </a:rPr>
-              <a:t>Discussion</a:t>
-            </a:r>
-          </a:p>
-        </p:txBody>
-      </p:sp>
-      <p:sp>
-        <p:nvSpPr>
-          <p:cNvPr id="19" name="Google Shape;611;p48">
-            <a:extLst>
-              <a:ext uri="{FF2B5EF4-FFF2-40B4-BE49-F238E27FC236}">
-                <a16:creationId xmlns:a16="http://schemas.microsoft.com/office/drawing/2014/main" id="{5E634149-5F8B-42EA-9A1A-2421A680FFF2}"/>
-              </a:ext>
-            </a:extLst>
-          </p:cNvPr>
-          <p:cNvSpPr txBox="1">
-            <a:spLocks noGrp="1"/>
-          </p:cNvSpPr>
-          <p:nvPr>
-            <p:ph type="subTitle" idx="4294967295"/>
-          </p:nvPr>
-        </p:nvSpPr>
-        <p:spPr>
-          <a:xfrm>
-            <a:off x="1685413" y="1981310"/>
-            <a:ext cx="4111780" cy="3325140"/>
-          </a:xfrm>
-          <a:prstGeom prst="rect">
-            <a:avLst/>
-          </a:prstGeom>
-        </p:spPr>
-        <p:txBody>
-          <a:bodyPr spcFirstLastPara="1" wrap="square" lIns="91425" tIns="91425" rIns="91425" bIns="91425" anchor="t" anchorCtr="0">
-            <a:noAutofit/>
-          </a:bodyPr>
-          <a:lstStyle/>
-          <a:p>
-            <a:pPr marL="25400" lvl="0" indent="0" algn="just" rtl="0">
+              <a:t>Mise en perspective avec la littérature</a:t>
+            </a:r>
+          </a:p>
+          <a:p>
+            <a:pPr>
               <a:spcBef>
                 <a:spcPts val="0"/>
               </a:spcBef>
-              <a:spcAft>
-                <a:spcPts val="0"/>
-              </a:spcAft>
-              <a:buNone/>
             </a:pPr>
-            <a:endParaRPr sz="1400" dirty="0">
+            <a:endParaRPr lang="fr-FR" sz="4000" b="1" dirty="0">
               <a:solidFill>
-                <a:schemeClr val="tx1">
-                  <a:lumMod val="95000"/>
-                  <a:lumOff val="5000"/>
-                </a:schemeClr>
+                <a:srgbClr val="005B2C"/>
               </a:solidFill>
-              <a:latin typeface="Nunito Light" pitchFamily="2" charset="0"/>
-            </a:endParaRPr>
-          </a:p>
-        </p:txBody>
-      </p:sp>
-      <p:sp>
-        <p:nvSpPr>
-          <p:cNvPr id="12" name="Google Shape;611;p48">
-            <a:extLst>
-              <a:ext uri="{FF2B5EF4-FFF2-40B4-BE49-F238E27FC236}">
-                <a16:creationId xmlns:a16="http://schemas.microsoft.com/office/drawing/2014/main" id="{FF294C4C-5A33-4A68-A3A4-7E098F166BEF}"/>
-              </a:ext>
-            </a:extLst>
-          </p:cNvPr>
-          <p:cNvSpPr txBox="1">
-            <a:spLocks/>
-          </p:cNvSpPr>
-          <p:nvPr/>
-        </p:nvSpPr>
-        <p:spPr>
-          <a:xfrm>
-            <a:off x="6095998" y="1981310"/>
-            <a:ext cx="4111780" cy="3325140"/>
-          </a:xfrm>
-          <a:prstGeom prst="rect">
-            <a:avLst/>
-          </a:prstGeom>
-        </p:spPr>
-        <p:txBody>
-          <a:bodyPr spcFirstLastPara="1" vert="horz" wrap="square" lIns="91425" tIns="91425" rIns="91425" bIns="91425" rtlCol="0" anchor="t" anchorCtr="0">
-            <a:noAutofit/>
-          </a:bodyPr>
-          <a:lstStyle>
-            <a:lvl1pPr marL="228600" lvl="0" indent="-228600" algn="ctr" defTabSz="914400" rtl="0" eaLnBrk="1" latinLnBrk="0" hangingPunct="1">
-              <a:lnSpc>
-                <a:spcPct val="100000"/>
-              </a:lnSpc>
-              <a:spcBef>
-                <a:spcPts val="0"/>
-              </a:spcBef>
-              <a:spcAft>
-                <a:spcPts val="0"/>
-              </a:spcAft>
-              <a:buClr>
-                <a:schemeClr val="dk2"/>
-              </a:buClr>
-              <a:buSzPts val="1400"/>
-              <a:buFont typeface="Arial" panose="020B0604020202020204" pitchFamily="34" charset="0"/>
-              <a:buNone/>
-              <a:defRPr sz="2800" kern="1200">
-                <a:solidFill>
-                  <a:schemeClr val="accent2"/>
-                </a:solidFill>
-                <a:latin typeface="+mn-lt"/>
-                <a:ea typeface="+mn-ea"/>
-                <a:cs typeface="+mn-cs"/>
-              </a:defRPr>
-            </a:lvl1pPr>
-            <a:lvl2pPr marL="685800" lvl="1" indent="-228600" algn="l" defTabSz="914400" rtl="0" eaLnBrk="1" latinLnBrk="0" hangingPunct="1">
-              <a:lnSpc>
-                <a:spcPct val="90000"/>
-              </a:lnSpc>
-              <a:spcBef>
-                <a:spcPts val="0"/>
-              </a:spcBef>
-              <a:spcAft>
-                <a:spcPts val="0"/>
-              </a:spcAft>
-              <a:buSzPts val="1400"/>
-              <a:buFont typeface="Arial" panose="020B0604020202020204" pitchFamily="34" charset="0"/>
-              <a:buNone/>
-              <a:defRPr sz="2400" kern="1200">
-                <a:solidFill>
-                  <a:schemeClr val="tx1"/>
-                </a:solidFill>
-                <a:latin typeface="+mn-lt"/>
-                <a:ea typeface="+mn-ea"/>
-                <a:cs typeface="+mn-cs"/>
-              </a:defRPr>
-            </a:lvl2pPr>
-            <a:lvl3pPr marL="1143000" lvl="2" indent="-228600" algn="l" defTabSz="914400" rtl="0" eaLnBrk="1" latinLnBrk="0" hangingPunct="1">
-              <a:lnSpc>
-                <a:spcPct val="90000"/>
-              </a:lnSpc>
-              <a:spcBef>
-                <a:spcPts val="2133"/>
-              </a:spcBef>
-              <a:spcAft>
-                <a:spcPts val="0"/>
-              </a:spcAft>
-              <a:buSzPts val="1400"/>
-              <a:buFont typeface="Arial" panose="020B0604020202020204" pitchFamily="34" charset="0"/>
-              <a:buNone/>
-              <a:defRPr sz="2000" kern="1200">
-                <a:solidFill>
-                  <a:schemeClr val="tx1"/>
-                </a:solidFill>
-                <a:latin typeface="+mn-lt"/>
-                <a:ea typeface="+mn-ea"/>
-                <a:cs typeface="+mn-cs"/>
-              </a:defRPr>
-            </a:lvl3pPr>
-            <a:lvl4pPr marL="1600200" lvl="3" indent="-228600" algn="l" defTabSz="914400" rtl="0" eaLnBrk="1" latinLnBrk="0" hangingPunct="1">
-              <a:lnSpc>
-                <a:spcPct val="90000"/>
-              </a:lnSpc>
-              <a:spcBef>
-                <a:spcPts val="2133"/>
-              </a:spcBef>
-              <a:spcAft>
-                <a:spcPts val="0"/>
-              </a:spcAft>
-              <a:buSzPts val="1400"/>
-              <a:buFont typeface="Arial" panose="020B0604020202020204" pitchFamily="34" charset="0"/>
-              <a:buNone/>
-              <a:defRPr sz="1800" kern="1200">
-                <a:solidFill>
-                  <a:schemeClr val="tx1"/>
-                </a:solidFill>
-                <a:latin typeface="+mn-lt"/>
-                <a:ea typeface="+mn-ea"/>
-                <a:cs typeface="+mn-cs"/>
-              </a:defRPr>
-            </a:lvl4pPr>
-            <a:lvl5pPr marL="2057400" lvl="4" indent="-228600" algn="l" defTabSz="914400" rtl="0" eaLnBrk="1" latinLnBrk="0" hangingPunct="1">
-              <a:lnSpc>
-                <a:spcPct val="90000"/>
-              </a:lnSpc>
-              <a:spcBef>
-                <a:spcPts val="2133"/>
-              </a:spcBef>
-              <a:spcAft>
-                <a:spcPts val="0"/>
-              </a:spcAft>
-              <a:buSzPts val="1400"/>
-              <a:buFont typeface="Arial" panose="020B0604020202020204" pitchFamily="34" charset="0"/>
-              <a:buNone/>
-              <a:defRPr sz="1800" kern="1200">
-                <a:solidFill>
-                  <a:schemeClr val="tx1"/>
-                </a:solidFill>
-                <a:latin typeface="+mn-lt"/>
-                <a:ea typeface="+mn-ea"/>
-                <a:cs typeface="+mn-cs"/>
-              </a:defRPr>
-            </a:lvl5pPr>
-            <a:lvl6pPr marL="2514600" lvl="5" indent="-228600" algn="l" defTabSz="914400" rtl="0" eaLnBrk="1" latinLnBrk="0" hangingPunct="1">
-              <a:lnSpc>
-                <a:spcPct val="90000"/>
-              </a:lnSpc>
-              <a:spcBef>
-                <a:spcPts val="2133"/>
-              </a:spcBef>
-              <a:spcAft>
-                <a:spcPts val="0"/>
-              </a:spcAft>
-              <a:buSzPts val="1400"/>
-              <a:buFont typeface="Arial" panose="020B0604020202020204" pitchFamily="34" charset="0"/>
-              <a:buNone/>
-              <a:defRPr sz="1800" kern="1200">
-                <a:solidFill>
-                  <a:schemeClr val="tx1"/>
-                </a:solidFill>
-                <a:latin typeface="+mn-lt"/>
-                <a:ea typeface="+mn-ea"/>
-                <a:cs typeface="+mn-cs"/>
-              </a:defRPr>
-            </a:lvl6pPr>
-            <a:lvl7pPr marL="2971800" lvl="6" indent="-228600" algn="l" defTabSz="914400" rtl="0" eaLnBrk="1" latinLnBrk="0" hangingPunct="1">
-              <a:lnSpc>
-                <a:spcPct val="90000"/>
-              </a:lnSpc>
-              <a:spcBef>
-                <a:spcPts val="2133"/>
-              </a:spcBef>
-              <a:spcAft>
-                <a:spcPts val="0"/>
-              </a:spcAft>
-              <a:buSzPts val="1400"/>
-              <a:buFont typeface="Arial" panose="020B0604020202020204" pitchFamily="34" charset="0"/>
-              <a:buNone/>
-              <a:defRPr sz="1800" kern="1200">
-                <a:solidFill>
-                  <a:schemeClr val="tx1"/>
-                </a:solidFill>
-                <a:latin typeface="+mn-lt"/>
-                <a:ea typeface="+mn-ea"/>
-                <a:cs typeface="+mn-cs"/>
-              </a:defRPr>
-            </a:lvl7pPr>
-            <a:lvl8pPr marL="3429000" lvl="7" indent="-228600" algn="l" defTabSz="914400" rtl="0" eaLnBrk="1" latinLnBrk="0" hangingPunct="1">
-              <a:lnSpc>
-                <a:spcPct val="90000"/>
-              </a:lnSpc>
-              <a:spcBef>
-                <a:spcPts val="2133"/>
-              </a:spcBef>
-              <a:spcAft>
-                <a:spcPts val="0"/>
-              </a:spcAft>
-              <a:buSzPts val="1400"/>
-              <a:buFont typeface="Arial" panose="020B0604020202020204" pitchFamily="34" charset="0"/>
-              <a:buNone/>
-              <a:defRPr sz="1800" kern="1200">
-                <a:solidFill>
-                  <a:schemeClr val="tx1"/>
-                </a:solidFill>
-                <a:latin typeface="+mn-lt"/>
-                <a:ea typeface="+mn-ea"/>
-                <a:cs typeface="+mn-cs"/>
-              </a:defRPr>
-            </a:lvl8pPr>
-            <a:lvl9pPr marL="3886200" lvl="8" indent="-228600" algn="l" defTabSz="914400" rtl="0" eaLnBrk="1" latinLnBrk="0" hangingPunct="1">
-              <a:lnSpc>
-                <a:spcPct val="90000"/>
-              </a:lnSpc>
-              <a:spcBef>
-                <a:spcPts val="2133"/>
-              </a:spcBef>
-              <a:spcAft>
-                <a:spcPts val="2133"/>
-              </a:spcAft>
-              <a:buSzPts val="1400"/>
-              <a:buFont typeface="Arial" panose="020B0604020202020204" pitchFamily="34" charset="0"/>
-              <a:buNone/>
-              <a:defRPr sz="1800" kern="1200">
-                <a:solidFill>
-                  <a:schemeClr val="tx1"/>
-                </a:solidFill>
-                <a:latin typeface="+mn-lt"/>
-                <a:ea typeface="+mn-ea"/>
-                <a:cs typeface="+mn-cs"/>
-              </a:defRPr>
-            </a:lvl9pPr>
-          </a:lstStyle>
-          <a:p>
-            <a:pPr marL="25400" indent="0" algn="just"/>
-            <a:endParaRPr lang="en-US" sz="1400" dirty="0">
-              <a:solidFill>
-                <a:schemeClr val="tx1">
-                  <a:lumMod val="95000"/>
-                  <a:lumOff val="5000"/>
-                </a:schemeClr>
-              </a:solidFill>
-              <a:latin typeface="Nunito Light" pitchFamily="2" charset="0"/>
+              <a:latin typeface="Arial" panose="020B0604020202020204" pitchFamily="34" charset="0"/>
+              <a:cs typeface="Arial" panose="020B0604020202020204" pitchFamily="34" charset="0"/>
             </a:endParaRPr>
           </a:p>
         </p:txBody>
@@ -28774,6 +29961,234 @@
               <a:t>14</a:t>
             </a:fld>
             <a:endParaRPr lang="fr-FR" sz="2800" dirty="0"/>
+          </a:p>
+        </p:txBody>
+      </p:sp>
+      <p:sp>
+        <p:nvSpPr>
+          <p:cNvPr id="6" name="TextBox 5">
+            <a:extLst>
+              <a:ext uri="{FF2B5EF4-FFF2-40B4-BE49-F238E27FC236}">
+                <a16:creationId xmlns:a16="http://schemas.microsoft.com/office/drawing/2014/main" id="{3AEA982D-38BF-10C3-4824-D90165C24C52}"/>
+              </a:ext>
+            </a:extLst>
+          </p:cNvPr>
+          <p:cNvSpPr txBox="1"/>
+          <p:nvPr/>
+        </p:nvSpPr>
+        <p:spPr>
+          <a:xfrm>
+            <a:off x="837903" y="725211"/>
+            <a:ext cx="10515600" cy="5269189"/>
+          </a:xfrm>
+          <a:prstGeom prst="roundRect">
+            <a:avLst>
+              <a:gd name="adj" fmla="val 5000"/>
+            </a:avLst>
+          </a:prstGeom>
+          <a:solidFill>
+            <a:srgbClr val="005B2C">
+              <a:alpha val="8000"/>
+            </a:srgbClr>
+          </a:solidFill>
+          <a:ln w="19050">
+            <a:solidFill>
+              <a:srgbClr val="C28300"/>
+            </a:solidFill>
+          </a:ln>
+        </p:spPr>
+        <p:txBody>
+          <a:bodyPr wrap="square" lIns="180000" tIns="120000" rIns="180000" bIns="120000" anchor="t">
+            <a:noAutofit/>
+          </a:bodyPr>
+          <a:lstStyle/>
+          <a:p>
+            <a:pPr fontAlgn="t">
+              <a:spcBef>
+                <a:spcPts val="300"/>
+              </a:spcBef>
+              <a:spcAft>
+                <a:spcPts val="300"/>
+              </a:spcAft>
+              <a:buNone/>
+            </a:pPr>
+            <a:r>
+              <a:rPr lang="fr-FR" sz="2000" b="1" i="0" dirty="0">
+                <a:solidFill>
+                  <a:srgbClr val="005B2C"/>
+                </a:solidFill>
+                <a:effectLst/>
+              </a:rPr>
+              <a:t>Convergence avec les séries sub-sahariennes</a:t>
+            </a:r>
+            <a:r>
+              <a:rPr lang="fr-FR" sz="2000" b="0" i="0" dirty="0">
+                <a:solidFill>
+                  <a:srgbClr val="1F1F1F"/>
+                </a:solidFill>
+                <a:effectLst/>
+              </a:rPr>
+              <a:t> : dominance des toxidermies médicamenteuses (vs dermatoses auto-immunes en Occident), surreprésentation des formes </a:t>
+            </a:r>
+            <a:r>
+              <a:rPr lang="fr-FR" sz="2000" b="0" i="0" dirty="0" err="1">
+                <a:solidFill>
+                  <a:srgbClr val="1F1F1F"/>
+                </a:solidFill>
+                <a:effectLst/>
+              </a:rPr>
+              <a:t>nécrolytiques</a:t>
+            </a:r>
+            <a:r>
+              <a:rPr lang="fr-FR" sz="2000" b="0" i="0" dirty="0">
+                <a:solidFill>
+                  <a:srgbClr val="1F1F1F"/>
+                </a:solidFill>
+                <a:effectLst/>
+              </a:rPr>
+              <a:t> (SJS/TEN &gt;&gt; incidence occidentale de 1–6/million/an) et rôle central des sulfamides antipaludiques (</a:t>
+            </a:r>
+            <a:r>
+              <a:rPr lang="fr-FR" sz="2000" b="0" i="0" dirty="0" err="1">
+                <a:solidFill>
+                  <a:srgbClr val="1F1F1F"/>
+                </a:solidFill>
+                <a:effectLst/>
+              </a:rPr>
+              <a:t>Sulfadoxine</a:t>
+            </a:r>
+            <a:r>
+              <a:rPr lang="fr-FR" sz="2000" b="0" i="0" dirty="0">
+                <a:solidFill>
+                  <a:srgbClr val="1F1F1F"/>
+                </a:solidFill>
+                <a:effectLst/>
+              </a:rPr>
+              <a:t>-pyriméthamine : 23 % des toxidermies documentées)</a:t>
+            </a:r>
+          </a:p>
+          <a:p>
+            <a:pPr fontAlgn="t">
+              <a:spcBef>
+                <a:spcPts val="300"/>
+              </a:spcBef>
+              <a:spcAft>
+                <a:spcPts val="300"/>
+              </a:spcAft>
+              <a:buNone/>
+            </a:pPr>
+            <a:r>
+              <a:rPr lang="fr-FR" sz="2000" b="1" i="0" dirty="0">
+                <a:solidFill>
+                  <a:srgbClr val="005B2C"/>
+                </a:solidFill>
+                <a:effectLst/>
+              </a:rPr>
+              <a:t>Ancrage épidémiologique tropical confirmé pour les infections staphylococciques</a:t>
+            </a:r>
+            <a:r>
+              <a:rPr lang="fr-FR" sz="2000" b="0" i="0" dirty="0">
+                <a:solidFill>
+                  <a:srgbClr val="1F1F1F"/>
+                </a:solidFill>
+                <a:effectLst/>
+              </a:rPr>
+              <a:t> : Impétigo bulleux et Épidermolyse staphylococcique (92,3 % du contingent infectieux) cohérents avec les prévalences de 10–20 % rapportées en Afrique subsaharienne chez les enfants d'âge préscolaire</a:t>
+            </a:r>
+          </a:p>
+          <a:p>
+            <a:pPr fontAlgn="t">
+              <a:spcBef>
+                <a:spcPts val="300"/>
+              </a:spcBef>
+              <a:spcAft>
+                <a:spcPts val="300"/>
+              </a:spcAft>
+              <a:buNone/>
+            </a:pPr>
+            <a:r>
+              <a:rPr lang="fr-FR" sz="2000" b="1" i="0" dirty="0">
+                <a:solidFill>
+                  <a:srgbClr val="005B2C"/>
+                </a:solidFill>
+                <a:effectLst/>
+              </a:rPr>
+              <a:t>Rareté des dermatoses auto-immunes (4,7 %) conforme aux constantes pédiatriques universelles</a:t>
+            </a:r>
+            <a:r>
+              <a:rPr lang="fr-FR" sz="2000" b="0" i="0" dirty="0">
+                <a:solidFill>
+                  <a:srgbClr val="1F1F1F"/>
+                </a:solidFill>
+                <a:effectLst/>
+              </a:rPr>
+              <a:t> (pemphigus/pemphigoïde : 1,4–3,7 % des cas tous âges ; dermatose </a:t>
+            </a:r>
+            <a:r>
+              <a:rPr lang="fr-FR" sz="2000" b="0" i="0" dirty="0" err="1">
+                <a:solidFill>
+                  <a:srgbClr val="1F1F1F"/>
+                </a:solidFill>
+                <a:effectLst/>
+              </a:rPr>
+              <a:t>IgA</a:t>
+            </a:r>
+            <a:r>
+              <a:rPr lang="fr-FR" sz="2000" b="0" i="0" dirty="0">
+                <a:solidFill>
+                  <a:srgbClr val="1F1F1F"/>
+                </a:solidFill>
+                <a:effectLst/>
+              </a:rPr>
+              <a:t> linéaire : 0,5–2,3/million/an), mais possiblement sous-estimée par absence d'accès local à l'immunofluorescence directe</a:t>
+            </a:r>
+          </a:p>
+          <a:p>
+            <a:pPr fontAlgn="t">
+              <a:spcBef>
+                <a:spcPts val="300"/>
+              </a:spcBef>
+              <a:spcAft>
+                <a:spcPts val="300"/>
+              </a:spcAft>
+              <a:buNone/>
+            </a:pPr>
+            <a:r>
+              <a:rPr lang="fr-FR" sz="2000" b="1" i="0" dirty="0">
+                <a:solidFill>
+                  <a:srgbClr val="005B2C"/>
+                </a:solidFill>
+                <a:effectLst/>
+              </a:rPr>
+              <a:t>Spécificité régionale</a:t>
+            </a:r>
+            <a:r>
+              <a:rPr lang="fr-FR" sz="2000" b="0" i="0" dirty="0">
+                <a:solidFill>
+                  <a:srgbClr val="1F1F1F"/>
+                </a:solidFill>
+                <a:effectLst/>
+              </a:rPr>
+              <a:t> : pression pharmacologique </a:t>
+            </a:r>
+            <a:r>
+              <a:rPr lang="fr-FR" sz="2000" b="0" i="0" dirty="0" err="1">
+                <a:solidFill>
+                  <a:srgbClr val="1F1F1F"/>
+                </a:solidFill>
+                <a:effectLst/>
+              </a:rPr>
+              <a:t>antipalustre</a:t>
+            </a:r>
+            <a:r>
+              <a:rPr lang="fr-FR" sz="2000" b="0" i="0" dirty="0">
+                <a:solidFill>
+                  <a:srgbClr val="1F1F1F"/>
+                </a:solidFill>
+                <a:effectLst/>
+              </a:rPr>
+              <a:t> élevée (zones endémiques) générant un profil de risque médicamenteux distinct des pays à revenu élevé, où les anti-inflammatoires et antibiotiques dominent l'imputabilité des toxidermies sévères pédiatriques</a:t>
+            </a:r>
           </a:p>
         </p:txBody>
       </p:sp>
@@ -28798,7 +30213,7 @@
         <p:cNvPr id="1" name="Shape 609">
           <a:extLst>
             <a:ext uri="{FF2B5EF4-FFF2-40B4-BE49-F238E27FC236}">
-              <a16:creationId xmlns:a16="http://schemas.microsoft.com/office/drawing/2014/main" id="{E3192CBD-EC78-D3A2-B8E7-39437E9269E7}"/>
+              <a16:creationId xmlns:a16="http://schemas.microsoft.com/office/drawing/2014/main" id="{A7C43478-71EB-07C6-81B9-DDFCB4D0CFAE}"/>
             </a:ext>
           </a:extLst>
         </p:cNvPr>
@@ -28815,62 +30230,10 @@
       </p:grpSpPr>
       <p:sp>
         <p:nvSpPr>
-          <p:cNvPr id="6" name="Ellipse 5">
-            <a:extLst>
-              <a:ext uri="{FF2B5EF4-FFF2-40B4-BE49-F238E27FC236}">
-                <a16:creationId xmlns:a16="http://schemas.microsoft.com/office/drawing/2014/main" id="{E45A0F9E-910A-2473-8499-ADFFB288CE98}"/>
-              </a:ext>
-            </a:extLst>
-          </p:cNvPr>
-          <p:cNvSpPr/>
-          <p:nvPr/>
-        </p:nvSpPr>
-        <p:spPr>
-          <a:xfrm>
-            <a:off x="10617200" y="-2511137"/>
-            <a:ext cx="4605482" cy="4605482"/>
-          </a:xfrm>
-          <a:prstGeom prst="ellipse">
-            <a:avLst/>
-          </a:prstGeom>
-          <a:solidFill>
-            <a:srgbClr val="C28300"/>
-          </a:solidFill>
-          <a:ln>
-            <a:noFill/>
-          </a:ln>
-        </p:spPr>
-        <p:style>
-          <a:lnRef idx="2">
-            <a:schemeClr val="accent1">
-              <a:shade val="50000"/>
-            </a:schemeClr>
-          </a:lnRef>
-          <a:fillRef idx="1">
-            <a:schemeClr val="accent1"/>
-          </a:fillRef>
-          <a:effectRef idx="0">
-            <a:schemeClr val="accent1"/>
-          </a:effectRef>
-          <a:fontRef idx="minor">
-            <a:schemeClr val="lt1"/>
-          </a:fontRef>
-        </p:style>
-        <p:txBody>
-          <a:bodyPr rtlCol="0" anchor="ctr"/>
-          <a:lstStyle/>
-          <a:p>
-            <a:pPr algn="ctr"/>
-            <a:endParaRPr lang="fr-FR"/>
-          </a:p>
-        </p:txBody>
-      </p:sp>
-      <p:sp>
-        <p:nvSpPr>
           <p:cNvPr id="9" name="Ellipse 8">
             <a:extLst>
               <a:ext uri="{FF2B5EF4-FFF2-40B4-BE49-F238E27FC236}">
-                <a16:creationId xmlns:a16="http://schemas.microsoft.com/office/drawing/2014/main" id="{548A113D-8994-44ED-B775-E2E3FBDC347B}"/>
+                <a16:creationId xmlns:a16="http://schemas.microsoft.com/office/drawing/2014/main" id="{5DE2DBDB-046B-FF0D-70F9-9BA7358BFD63}"/>
               </a:ext>
             </a:extLst>
           </p:cNvPr>
@@ -28922,7 +30285,7 @@
           <p:cNvPr id="10" name="Ellipse 9">
             <a:extLst>
               <a:ext uri="{FF2B5EF4-FFF2-40B4-BE49-F238E27FC236}">
-                <a16:creationId xmlns:a16="http://schemas.microsoft.com/office/drawing/2014/main" id="{0A1AB784-5487-EE61-725C-7313DAF6A415}"/>
+                <a16:creationId xmlns:a16="http://schemas.microsoft.com/office/drawing/2014/main" id="{BDCFBE6E-EAE5-96FA-DBA6-E120C12029C0}"/>
               </a:ext>
             </a:extLst>
           </p:cNvPr>
@@ -28974,7 +30337,7 @@
           <p:cNvPr id="11" name="Ellipse 10">
             <a:extLst>
               <a:ext uri="{FF2B5EF4-FFF2-40B4-BE49-F238E27FC236}">
-                <a16:creationId xmlns:a16="http://schemas.microsoft.com/office/drawing/2014/main" id="{1A5C0851-CBA9-DA15-56EA-ADA42801C80B}"/>
+                <a16:creationId xmlns:a16="http://schemas.microsoft.com/office/drawing/2014/main" id="{54FE5A7B-0437-B1DF-8E0A-37002DE25D17}"/>
               </a:ext>
             </a:extLst>
           </p:cNvPr>
@@ -29026,7 +30389,7 @@
           <p:cNvPr id="14" name="Rectangle 13">
             <a:extLst>
               <a:ext uri="{FF2B5EF4-FFF2-40B4-BE49-F238E27FC236}">
-                <a16:creationId xmlns:a16="http://schemas.microsoft.com/office/drawing/2014/main" id="{3241C97B-D618-46CD-D95C-4D41F4A3998D}"/>
+                <a16:creationId xmlns:a16="http://schemas.microsoft.com/office/drawing/2014/main" id="{D4E44701-AD2E-64E6-4B75-7F25C69EA341}"/>
               </a:ext>
             </a:extLst>
           </p:cNvPr>
@@ -29078,7 +30441,7 @@
           <p:cNvPr id="15" name="Rectangle 14">
             <a:extLst>
               <a:ext uri="{FF2B5EF4-FFF2-40B4-BE49-F238E27FC236}">
-                <a16:creationId xmlns:a16="http://schemas.microsoft.com/office/drawing/2014/main" id="{3746FCC8-74C8-88EE-E5CA-DB8BD33CF1E2}"/>
+                <a16:creationId xmlns:a16="http://schemas.microsoft.com/office/drawing/2014/main" id="{F1D1012B-BA16-1A8A-C935-94CF2B313FEE}"/>
               </a:ext>
             </a:extLst>
           </p:cNvPr>
@@ -29127,10 +30490,10 @@
       </p:sp>
       <p:sp>
         <p:nvSpPr>
-          <p:cNvPr id="18" name="Google Shape;610;p48">
+          <p:cNvPr id="12" name="Google Shape;611;p48">
             <a:extLst>
               <a:ext uri="{FF2B5EF4-FFF2-40B4-BE49-F238E27FC236}">
-                <a16:creationId xmlns:a16="http://schemas.microsoft.com/office/drawing/2014/main" id="{15AF7A23-AB45-2A5F-2A76-E8A2AF205462}"/>
+                <a16:creationId xmlns:a16="http://schemas.microsoft.com/office/drawing/2014/main" id="{C03DDC1E-E0A4-CBAA-2DE0-A716EAAB97BC}"/>
               </a:ext>
             </a:extLst>
           </p:cNvPr>
@@ -29141,8 +30504,281 @@
         </p:nvSpPr>
         <p:spPr>
           <a:xfrm>
-            <a:off x="2562846" y="439446"/>
-            <a:ext cx="7066305" cy="910110"/>
+            <a:off x="6095998" y="1981310"/>
+            <a:ext cx="4111780" cy="3325140"/>
+          </a:xfrm>
+          <a:prstGeom prst="rect">
+            <a:avLst/>
+          </a:prstGeom>
+        </p:spPr>
+        <p:txBody>
+          <a:bodyPr spcFirstLastPara="1" vert="horz" wrap="square" lIns="91425" tIns="91425" rIns="91425" bIns="91425" rtlCol="0" anchor="t" anchorCtr="0">
+            <a:noAutofit/>
+          </a:bodyPr>
+          <a:lstStyle>
+            <a:lvl1pPr marL="228600" lvl="0" indent="-228600" algn="ctr" defTabSz="914400" rtl="0" eaLnBrk="1" latinLnBrk="0" hangingPunct="1">
+              <a:lnSpc>
+                <a:spcPct val="100000"/>
+              </a:lnSpc>
+              <a:spcBef>
+                <a:spcPts val="0"/>
+              </a:spcBef>
+              <a:spcAft>
+                <a:spcPts val="0"/>
+              </a:spcAft>
+              <a:buClr>
+                <a:schemeClr val="dk2"/>
+              </a:buClr>
+              <a:buSzPts val="1400"/>
+              <a:buFont typeface="Arial" panose="020B0604020202020204" pitchFamily="34" charset="0"/>
+              <a:buNone/>
+              <a:defRPr sz="2800" kern="1200">
+                <a:solidFill>
+                  <a:schemeClr val="accent2"/>
+                </a:solidFill>
+                <a:latin typeface="+mn-lt"/>
+                <a:ea typeface="+mn-ea"/>
+                <a:cs typeface="+mn-cs"/>
+              </a:defRPr>
+            </a:lvl1pPr>
+            <a:lvl2pPr marL="685800" lvl="1" indent="-228600" algn="l" defTabSz="914400" rtl="0" eaLnBrk="1" latinLnBrk="0" hangingPunct="1">
+              <a:lnSpc>
+                <a:spcPct val="90000"/>
+              </a:lnSpc>
+              <a:spcBef>
+                <a:spcPts val="0"/>
+              </a:spcBef>
+              <a:spcAft>
+                <a:spcPts val="0"/>
+              </a:spcAft>
+              <a:buSzPts val="1400"/>
+              <a:buFont typeface="Arial" panose="020B0604020202020204" pitchFamily="34" charset="0"/>
+              <a:buNone/>
+              <a:defRPr sz="2400" kern="1200">
+                <a:solidFill>
+                  <a:schemeClr val="tx1"/>
+                </a:solidFill>
+                <a:latin typeface="+mn-lt"/>
+                <a:ea typeface="+mn-ea"/>
+                <a:cs typeface="+mn-cs"/>
+              </a:defRPr>
+            </a:lvl2pPr>
+            <a:lvl3pPr marL="1143000" lvl="2" indent="-228600" algn="l" defTabSz="914400" rtl="0" eaLnBrk="1" latinLnBrk="0" hangingPunct="1">
+              <a:lnSpc>
+                <a:spcPct val="90000"/>
+              </a:lnSpc>
+              <a:spcBef>
+                <a:spcPts val="2133"/>
+              </a:spcBef>
+              <a:spcAft>
+                <a:spcPts val="0"/>
+              </a:spcAft>
+              <a:buSzPts val="1400"/>
+              <a:buFont typeface="Arial" panose="020B0604020202020204" pitchFamily="34" charset="0"/>
+              <a:buNone/>
+              <a:defRPr sz="1800" kern="1200">
+                <a:solidFill>
+                  <a:schemeClr val="tx1"/>
+                </a:solidFill>
+                <a:latin typeface="+mn-lt"/>
+                <a:ea typeface="+mn-ea"/>
+                <a:cs typeface="+mn-cs"/>
+              </a:defRPr>
+            </a:lvl3pPr>
+            <a:lvl4pPr marL="1600200" lvl="3" indent="-228600" algn="l" defTabSz="914400" rtl="0" eaLnBrk="1" latinLnBrk="0" hangingPunct="1">
+              <a:lnSpc>
+                <a:spcPct val="90000"/>
+              </a:lnSpc>
+              <a:spcBef>
+                <a:spcPts val="2133"/>
+              </a:spcBef>
+              <a:spcAft>
+                <a:spcPts val="0"/>
+              </a:spcAft>
+              <a:buSzPts val="1400"/>
+              <a:buFont typeface="Arial" panose="020B0604020202020204" pitchFamily="34" charset="0"/>
+              <a:buNone/>
+              <a:defRPr sz="1800" kern="1200">
+                <a:solidFill>
+                  <a:schemeClr val="tx1"/>
+                </a:solidFill>
+                <a:latin typeface="+mn-lt"/>
+                <a:ea typeface="+mn-ea"/>
+                <a:cs typeface="+mn-cs"/>
+              </a:defRPr>
+            </a:lvl4pPr>
+            <a:lvl5pPr marL="2057400" lvl="4" indent="-228600" algn="l" defTabSz="914400" rtl="0" eaLnBrk="1" latinLnBrk="0" hangingPunct="1">
+              <a:lnSpc>
+                <a:spcPct val="90000"/>
+              </a:lnSpc>
+              <a:spcBef>
+                <a:spcPts val="2133"/>
+              </a:spcBef>
+              <a:spcAft>
+                <a:spcPts val="0"/>
+              </a:spcAft>
+              <a:buSzPts val="1400"/>
+              <a:buFont typeface="Arial" panose="020B0604020202020204" pitchFamily="34" charset="0"/>
+              <a:buNone/>
+              <a:defRPr sz="1800" kern="1200">
+                <a:solidFill>
+                  <a:schemeClr val="tx1"/>
+                </a:solidFill>
+                <a:latin typeface="+mn-lt"/>
+                <a:ea typeface="+mn-ea"/>
+                <a:cs typeface="+mn-cs"/>
+              </a:defRPr>
+            </a:lvl5pPr>
+            <a:lvl6pPr marL="2514600" lvl="5" indent="-228600" algn="l" defTabSz="914400" rtl="0" eaLnBrk="1" latinLnBrk="0" hangingPunct="1">
+              <a:lnSpc>
+                <a:spcPct val="90000"/>
+              </a:lnSpc>
+              <a:spcBef>
+                <a:spcPts val="2133"/>
+              </a:spcBef>
+              <a:spcAft>
+                <a:spcPts val="0"/>
+              </a:spcAft>
+              <a:buSzPts val="1400"/>
+              <a:buFont typeface="Arial" panose="020B0604020202020204" pitchFamily="34" charset="0"/>
+              <a:buNone/>
+              <a:defRPr sz="1800" kern="1200">
+                <a:solidFill>
+                  <a:schemeClr val="tx1"/>
+                </a:solidFill>
+                <a:latin typeface="+mn-lt"/>
+                <a:ea typeface="+mn-ea"/>
+                <a:cs typeface="+mn-cs"/>
+              </a:defRPr>
+            </a:lvl6pPr>
+            <a:lvl7pPr marL="2971800" lvl="6" indent="-228600" algn="l" defTabSz="914400" rtl="0" eaLnBrk="1" latinLnBrk="0" hangingPunct="1">
+              <a:lnSpc>
+                <a:spcPct val="90000"/>
+              </a:lnSpc>
+              <a:spcBef>
+                <a:spcPts val="2133"/>
+              </a:spcBef>
+              <a:spcAft>
+                <a:spcPts val="0"/>
+              </a:spcAft>
+              <a:buSzPts val="1400"/>
+              <a:buFont typeface="Arial" panose="020B0604020202020204" pitchFamily="34" charset="0"/>
+              <a:buNone/>
+              <a:defRPr sz="1800" kern="1200">
+                <a:solidFill>
+                  <a:schemeClr val="tx1"/>
+                </a:solidFill>
+                <a:latin typeface="+mn-lt"/>
+                <a:ea typeface="+mn-ea"/>
+                <a:cs typeface="+mn-cs"/>
+              </a:defRPr>
+            </a:lvl7pPr>
+            <a:lvl8pPr marL="3429000" lvl="7" indent="-228600" algn="l" defTabSz="914400" rtl="0" eaLnBrk="1" latinLnBrk="0" hangingPunct="1">
+              <a:lnSpc>
+                <a:spcPct val="90000"/>
+              </a:lnSpc>
+              <a:spcBef>
+                <a:spcPts val="2133"/>
+              </a:spcBef>
+              <a:spcAft>
+                <a:spcPts val="0"/>
+              </a:spcAft>
+              <a:buSzPts val="1400"/>
+              <a:buFont typeface="Arial" panose="020B0604020202020204" pitchFamily="34" charset="0"/>
+              <a:buNone/>
+              <a:defRPr sz="1800" kern="1200">
+                <a:solidFill>
+                  <a:schemeClr val="tx1"/>
+                </a:solidFill>
+                <a:latin typeface="+mn-lt"/>
+                <a:ea typeface="+mn-ea"/>
+                <a:cs typeface="+mn-cs"/>
+              </a:defRPr>
+            </a:lvl8pPr>
+            <a:lvl9pPr marL="3886200" lvl="8" indent="-228600" algn="l" defTabSz="914400" rtl="0" eaLnBrk="1" latinLnBrk="0" hangingPunct="1">
+              <a:lnSpc>
+                <a:spcPct val="90000"/>
+              </a:lnSpc>
+              <a:spcBef>
+                <a:spcPts val="2133"/>
+              </a:spcBef>
+              <a:spcAft>
+                <a:spcPts val="2133"/>
+              </a:spcAft>
+              <a:buSzPts val="1400"/>
+              <a:buFont typeface="Arial" panose="020B0604020202020204" pitchFamily="34" charset="0"/>
+              <a:buNone/>
+              <a:defRPr sz="1800" kern="1200">
+                <a:solidFill>
+                  <a:schemeClr val="tx1"/>
+                </a:solidFill>
+                <a:latin typeface="+mn-lt"/>
+                <a:ea typeface="+mn-ea"/>
+                <a:cs typeface="+mn-cs"/>
+              </a:defRPr>
+            </a:lvl9pPr>
+          </a:lstStyle>
+          <a:p>
+            <a:pPr marL="25400" indent="0" algn="just"/>
+            <a:endParaRPr lang="en-US" sz="1400" dirty="0">
+              <a:solidFill>
+                <a:schemeClr val="tx1">
+                  <a:lumMod val="95000"/>
+                  <a:lumOff val="5000"/>
+                </a:schemeClr>
+              </a:solidFill>
+              <a:latin typeface="Nunito Light" pitchFamily="2" charset="0"/>
+            </a:endParaRPr>
+          </a:p>
+        </p:txBody>
+      </p:sp>
+      <p:sp>
+        <p:nvSpPr>
+          <p:cNvPr id="2" name="Espace réservé du numéro de diapositive 1">
+            <a:extLst>
+              <a:ext uri="{FF2B5EF4-FFF2-40B4-BE49-F238E27FC236}">
+                <a16:creationId xmlns:a16="http://schemas.microsoft.com/office/drawing/2014/main" id="{898E0875-1376-30FC-FAD0-73B64CD9CEC0}"/>
+              </a:ext>
+            </a:extLst>
+          </p:cNvPr>
+          <p:cNvSpPr>
+            <a:spLocks noGrp="1"/>
+          </p:cNvSpPr>
+          <p:nvPr>
+            <p:ph type="sldNum" sz="quarter" idx="12"/>
+          </p:nvPr>
+        </p:nvSpPr>
+        <p:spPr/>
+        <p:txBody>
+          <a:bodyPr/>
+          <a:lstStyle/>
+          <a:p>
+            <a:fld id="{BFD622BF-1CCB-4095-83BA-C642E4725D37}" type="slidenum">
+              <a:rPr lang="fr-FR" sz="2800" smtClean="0"/>
+              <a:t>15</a:t>
+            </a:fld>
+            <a:endParaRPr lang="fr-FR" sz="2800" dirty="0"/>
+          </a:p>
+        </p:txBody>
+      </p:sp>
+      <p:sp>
+        <p:nvSpPr>
+          <p:cNvPr id="5" name="Google Shape;610;p48">
+            <a:extLst>
+              <a:ext uri="{FF2B5EF4-FFF2-40B4-BE49-F238E27FC236}">
+                <a16:creationId xmlns:a16="http://schemas.microsoft.com/office/drawing/2014/main" id="{81629D32-A494-52A6-3AEA-5AABA2A055D8}"/>
+              </a:ext>
+            </a:extLst>
+          </p:cNvPr>
+          <p:cNvSpPr txBox="1">
+            <a:spLocks/>
+          </p:cNvSpPr>
+          <p:nvPr/>
+        </p:nvSpPr>
+        <p:spPr>
+          <a:xfrm>
+            <a:off x="1080654" y="121792"/>
+            <a:ext cx="9781310" cy="910110"/>
           </a:xfrm>
           <a:prstGeom prst="rect">
             <a:avLst/>
@@ -29178,107 +30814,246 @@
               </a:spcBef>
             </a:pPr>
             <a:r>
-              <a:rPr lang="fr-FR" sz="5400" b="1" dirty="0">
+              <a:rPr lang="fr-FR" sz="4000" b="1" dirty="0">
                 <a:solidFill>
                   <a:srgbClr val="005B2C"/>
                 </a:solidFill>
                 <a:latin typeface="Arial" panose="020B0604020202020204" pitchFamily="34" charset="0"/>
                 <a:cs typeface="Arial" panose="020B0604020202020204" pitchFamily="34" charset="0"/>
               </a:rPr>
-              <a:t>Conclusion</a:t>
-            </a:r>
+              <a:t>Implications, limites et perspectives</a:t>
+            </a:r>
+          </a:p>
+          <a:p>
+            <a:pPr>
+              <a:spcBef>
+                <a:spcPts val="0"/>
+              </a:spcBef>
+            </a:pPr>
+            <a:endParaRPr lang="fr-FR" sz="4000" b="1" dirty="0">
+              <a:solidFill>
+                <a:srgbClr val="005B2C"/>
+              </a:solidFill>
+              <a:latin typeface="Arial" panose="020B0604020202020204" pitchFamily="34" charset="0"/>
+              <a:cs typeface="Arial" panose="020B0604020202020204" pitchFamily="34" charset="0"/>
+            </a:endParaRPr>
           </a:p>
         </p:txBody>
       </p:sp>
       <p:sp>
         <p:nvSpPr>
-          <p:cNvPr id="19" name="Google Shape;611;p48">
+          <p:cNvPr id="6" name="TextBox 5">
             <a:extLst>
               <a:ext uri="{FF2B5EF4-FFF2-40B4-BE49-F238E27FC236}">
-                <a16:creationId xmlns:a16="http://schemas.microsoft.com/office/drawing/2014/main" id="{9C9F97B3-C1BB-A58A-C2CB-35CD44F8B2C8}"/>
+                <a16:creationId xmlns:a16="http://schemas.microsoft.com/office/drawing/2014/main" id="{92F1BAD8-0FC7-816B-86E8-ECA62C8EE41B}"/>
               </a:ext>
             </a:extLst>
           </p:cNvPr>
-          <p:cNvSpPr txBox="1">
-            <a:spLocks noGrp="1"/>
-          </p:cNvSpPr>
-          <p:nvPr>
-            <p:ph type="subTitle" idx="4294967295"/>
-          </p:nvPr>
+          <p:cNvSpPr txBox="1"/>
+          <p:nvPr/>
         </p:nvSpPr>
         <p:spPr>
           <a:xfrm>
-            <a:off x="998102" y="1919212"/>
-            <a:ext cx="10195791" cy="3935845"/>
+            <a:off x="837903" y="1031311"/>
+            <a:ext cx="10515600" cy="5430000"/>
           </a:xfrm>
-          <a:prstGeom prst="rect">
-            <a:avLst/>
+          <a:prstGeom prst="roundRect">
+            <a:avLst>
+              <a:gd name="adj" fmla="val 5000"/>
+            </a:avLst>
           </a:prstGeom>
+          <a:solidFill>
+            <a:srgbClr val="005B2C">
+              <a:alpha val="8000"/>
+            </a:srgbClr>
+          </a:solidFill>
+          <a:ln w="19050">
+            <a:solidFill>
+              <a:srgbClr val="C28300"/>
+            </a:solidFill>
+          </a:ln>
         </p:spPr>
         <p:txBody>
-          <a:bodyPr spcFirstLastPara="1" wrap="square" lIns="91425" tIns="91425" rIns="91425" bIns="91425" anchor="t" anchorCtr="0">
+          <a:bodyPr wrap="square" lIns="180000" tIns="120000" rIns="180000" bIns="120000" anchor="t">
             <a:noAutofit/>
           </a:bodyPr>
           <a:lstStyle/>
           <a:p>
-            <a:pPr marL="25400" indent="0">
+            <a:pPr fontAlgn="t">
               <a:spcBef>
-                <a:spcPts val="0"/>
+                <a:spcPts val="300"/>
               </a:spcBef>
+              <a:spcAft>
+                <a:spcPts val="300"/>
+              </a:spcAft>
               <a:buNone/>
             </a:pPr>
             <a:r>
-              <a:rPr lang="fr-BE" dirty="0"/>
-              <a:t>Les dermatoses bulleuses chez le sujet âgé sont présentes en milieu hospitalier au Bénin</a:t>
-            </a:r>
-          </a:p>
-          <a:p>
-            <a:pPr marL="25400" indent="0">
+              <a:rPr lang="fr-FR" sz="2000" b="1" i="0" dirty="0">
+                <a:solidFill>
+                  <a:srgbClr val="005B2C"/>
+                </a:solidFill>
+                <a:effectLst/>
+              </a:rPr>
+              <a:t>Implications cliniques</a:t>
+            </a:r>
+            <a:r>
+              <a:rPr lang="fr-FR" sz="2000" b="0" i="0" dirty="0">
+                <a:solidFill>
+                  <a:srgbClr val="1F1F1F"/>
+                </a:solidFill>
+                <a:effectLst/>
+              </a:rPr>
+              <a:t> : (1) Interrogatoire médicamenteux systématique et recherche de porte d'entrée staphylococcique prioritaires ; (2) Pharmacovigilance renforcée pour </a:t>
+            </a:r>
+            <a:r>
+              <a:rPr lang="fr-FR" sz="2000" b="0" i="0" dirty="0" err="1">
+                <a:solidFill>
+                  <a:srgbClr val="1F1F1F"/>
+                </a:solidFill>
+                <a:effectLst/>
+              </a:rPr>
+              <a:t>Sulfadoxine</a:t>
+            </a:r>
+            <a:r>
+              <a:rPr lang="fr-FR" sz="2000" b="0" i="0" dirty="0">
+                <a:solidFill>
+                  <a:srgbClr val="1F1F1F"/>
+                </a:solidFill>
+                <a:effectLst/>
+              </a:rPr>
+              <a:t>-pyriméthamine en pédiatrie ; (3) Critères d'orientation précoce des formes ≥ 30 % de surface vers structures de référence avec réanimation dermatologique</a:t>
+            </a:r>
+          </a:p>
+          <a:p>
+            <a:pPr fontAlgn="t">
               <a:spcBef>
-                <a:spcPts val="0"/>
+                <a:spcPts val="300"/>
               </a:spcBef>
+              <a:spcAft>
+                <a:spcPts val="300"/>
+              </a:spcAft>
               <a:buNone/>
             </a:pPr>
             <a:r>
-              <a:rPr lang="fr-BE" dirty="0"/>
-              <a:t>Elles sont surtout dominées par la pemphigoïde bulleuse</a:t>
-            </a:r>
-          </a:p>
-        </p:txBody>
-      </p:sp>
-      <p:sp>
-        <p:nvSpPr>
-          <p:cNvPr id="2" name="Espace réservé du numéro de diapositive 1">
-            <a:extLst>
-              <a:ext uri="{FF2B5EF4-FFF2-40B4-BE49-F238E27FC236}">
-                <a16:creationId xmlns:a16="http://schemas.microsoft.com/office/drawing/2014/main" id="{AB250D79-E301-2D3F-A332-55D3097903E7}"/>
-              </a:ext>
-            </a:extLst>
-          </p:cNvPr>
-          <p:cNvSpPr>
-            <a:spLocks noGrp="1"/>
-          </p:cNvSpPr>
-          <p:nvPr>
-            <p:ph type="sldNum" sz="quarter" idx="12"/>
-          </p:nvPr>
-        </p:nvSpPr>
-        <p:spPr/>
-        <p:txBody>
-          <a:bodyPr/>
-          <a:lstStyle/>
-          <a:p>
-            <a:fld id="{BFD622BF-1CCB-4095-83BA-C642E4725D37}" type="slidenum">
-              <a:rPr lang="fr-FR" sz="2800" smtClean="0"/>
-              <a:t>15</a:t>
-            </a:fld>
-            <a:endParaRPr lang="fr-FR" sz="2800" dirty="0"/>
+              <a:rPr lang="fr-FR" sz="2000" b="1" i="0" dirty="0">
+                <a:solidFill>
+                  <a:srgbClr val="005B2C"/>
+                </a:solidFill>
+                <a:effectLst/>
+              </a:rPr>
+              <a:t>Implications de santé publique</a:t>
+            </a:r>
+            <a:r>
+              <a:rPr lang="fr-FR" sz="2000" b="0" i="0" dirty="0">
+                <a:solidFill>
+                  <a:srgbClr val="1F1F1F"/>
+                </a:solidFill>
+                <a:effectLst/>
+              </a:rPr>
+              <a:t> : prescription rationnelle antipaludique/antibiotique, sensibilisation communautaire aux signes d'alerte cutanéo-muqueux médicamenteux, amélioration de l'hygiène collective pour réduire l'incidence de l'impétigo bulleux</a:t>
+            </a:r>
+          </a:p>
+          <a:p>
+            <a:pPr fontAlgn="t">
+              <a:spcBef>
+                <a:spcPts val="300"/>
+              </a:spcBef>
+              <a:spcAft>
+                <a:spcPts val="300"/>
+              </a:spcAft>
+              <a:buNone/>
+            </a:pPr>
+            <a:r>
+              <a:rPr lang="fr-FR" sz="2000" b="1" i="0" dirty="0">
+                <a:solidFill>
+                  <a:srgbClr val="005B2C"/>
+                </a:solidFill>
+                <a:effectLst/>
+              </a:rPr>
+              <a:t>Limites méthodologiques majeures</a:t>
+            </a:r>
+            <a:r>
+              <a:rPr lang="fr-FR" sz="2000" b="0" i="0" dirty="0">
+                <a:solidFill>
+                  <a:srgbClr val="1F1F1F"/>
+                </a:solidFill>
+                <a:effectLst/>
+              </a:rPr>
+              <a:t> : étude rétrospective monocentrique (biais de recrutement hospitalier, surreprésentation des formes graves) ; effectif limité (n = 43, catégories minoritaires &lt; 3 cas) ; absence de confirmation </a:t>
+            </a:r>
+            <a:r>
+              <a:rPr lang="fr-FR" sz="2000" b="0" i="0" dirty="0" err="1">
+                <a:solidFill>
+                  <a:srgbClr val="1F1F1F"/>
+                </a:solidFill>
+                <a:effectLst/>
+              </a:rPr>
+              <a:t>immunopathologique</a:t>
+            </a:r>
+            <a:r>
+              <a:rPr lang="fr-FR" sz="2000" b="0" i="0" dirty="0">
+                <a:solidFill>
+                  <a:srgbClr val="1F1F1F"/>
+                </a:solidFill>
+                <a:effectLst/>
+              </a:rPr>
+              <a:t> systématique (immunofluorescence, sérologie) limitant la fiabilité diagnostique des dermatoses auto-immunes</a:t>
+            </a:r>
+          </a:p>
+          <a:p>
+            <a:pPr fontAlgn="t">
+              <a:spcBef>
+                <a:spcPts val="300"/>
+              </a:spcBef>
+              <a:spcAft>
+                <a:spcPts val="300"/>
+              </a:spcAft>
+              <a:buNone/>
+            </a:pPr>
+            <a:r>
+              <a:rPr lang="fr-FR" sz="2000" b="1" i="0" dirty="0">
+                <a:solidFill>
+                  <a:srgbClr val="005B2C"/>
+                </a:solidFill>
+                <a:effectLst/>
+              </a:rPr>
+              <a:t>Perspectives de recherche</a:t>
+            </a:r>
+            <a:r>
+              <a:rPr lang="fr-FR" sz="2000" b="0" i="0" dirty="0">
+                <a:solidFill>
+                  <a:srgbClr val="1F1F1F"/>
+                </a:solidFill>
+                <a:effectLst/>
+              </a:rPr>
+              <a:t> : études prospectives multicentriques avec caractérisation </a:t>
+            </a:r>
+            <a:r>
+              <a:rPr lang="fr-FR" sz="2000" b="0" i="0" dirty="0" err="1">
+                <a:solidFill>
+                  <a:srgbClr val="1F1F1F"/>
+                </a:solidFill>
+                <a:effectLst/>
+              </a:rPr>
+              <a:t>immunopathologique</a:t>
+            </a:r>
+            <a:r>
+              <a:rPr lang="fr-FR" sz="2000" b="0" i="0" dirty="0">
+                <a:solidFill>
+                  <a:srgbClr val="1F1F1F"/>
+                </a:solidFill>
+                <a:effectLst/>
+              </a:rPr>
+              <a:t> systématique ; registres régionaux de pharmacovigilance pédiatrique ; analyse génétique HLA des susceptibilités aux toxidermies dans les populations ouest-africaines ; évaluation des déterminants socio-économiques et environnementaux de l'incidence élevée des formes infectieuses et médicamenteuses</a:t>
+            </a:r>
           </a:p>
         </p:txBody>
       </p:sp>
     </p:spTree>
     <p:extLst>
       <p:ext uri="{BB962C8B-B14F-4D97-AF65-F5344CB8AC3E}">
-        <p14:creationId xmlns:p14="http://schemas.microsoft.com/office/powerpoint/2010/main" val="1468068276"/>
+        <p14:creationId xmlns:p14="http://schemas.microsoft.com/office/powerpoint/2010/main" val="3558351091"/>
       </p:ext>
     </p:extLst>
   </p:cSld>
@@ -29529,7 +31304,7 @@
         </p:nvSpPr>
         <p:spPr>
           <a:xfrm>
-            <a:off x="2562846" y="439446"/>
+            <a:off x="2562844" y="63608"/>
             <a:ext cx="7066305" cy="910110"/>
           </a:xfrm>
           <a:prstGeom prst="rect">
@@ -29684,58 +31459,6 @@
       </p:sp>
       <p:sp>
         <p:nvSpPr>
-          <p:cNvPr id="16" name="Google Shape;611;p48">
-            <a:extLst>
-              <a:ext uri="{FF2B5EF4-FFF2-40B4-BE49-F238E27FC236}">
-                <a16:creationId xmlns:a16="http://schemas.microsoft.com/office/drawing/2014/main" id="{FFE7A9D1-5E6D-4452-9A19-2C98C4727456}"/>
-              </a:ext>
-            </a:extLst>
-          </p:cNvPr>
-          <p:cNvSpPr txBox="1">
-            <a:spLocks noGrp="1"/>
-          </p:cNvSpPr>
-          <p:nvPr>
-            <p:ph type="subTitle" idx="4294967295"/>
-          </p:nvPr>
-        </p:nvSpPr>
-        <p:spPr>
-          <a:xfrm>
-            <a:off x="998102" y="1919212"/>
-            <a:ext cx="10195791" cy="4091015"/>
-          </a:xfrm>
-          <a:prstGeom prst="rect">
-            <a:avLst/>
-          </a:prstGeom>
-        </p:spPr>
-        <p:txBody>
-          <a:bodyPr spcFirstLastPara="1" wrap="square" lIns="91425" tIns="91425" rIns="91425" bIns="91425" anchor="t" anchorCtr="0">
-            <a:noAutofit/>
-          </a:bodyPr>
-          <a:lstStyle/>
-          <a:p>
-            <a:pPr marL="25400" lvl="0" indent="0" algn="ctr" rtl="0">
-              <a:spcBef>
-                <a:spcPts val="0"/>
-              </a:spcBef>
-              <a:spcAft>
-                <a:spcPts val="0"/>
-              </a:spcAft>
-              <a:buNone/>
-            </a:pPr>
-            <a:endParaRPr sz="2400" dirty="0">
-              <a:solidFill>
-                <a:schemeClr val="tx1">
-                  <a:lumMod val="95000"/>
-                  <a:lumOff val="5000"/>
-                </a:schemeClr>
-              </a:solidFill>
-              <a:latin typeface="Nunito Light" pitchFamily="2" charset="0"/>
-            </a:endParaRPr>
-          </a:p>
-        </p:txBody>
-      </p:sp>
-      <p:sp>
-        <p:nvSpPr>
           <p:cNvPr id="2" name="Espace réservé du numéro de diapositive 1">
             <a:extLst>
               <a:ext uri="{FF2B5EF4-FFF2-40B4-BE49-F238E27FC236}">
@@ -29760,6 +31483,226 @@
               <a:t>16</a:t>
             </a:fld>
             <a:endParaRPr lang="fr-FR" sz="2800" dirty="0"/>
+          </a:p>
+        </p:txBody>
+      </p:sp>
+      <p:sp>
+        <p:nvSpPr>
+          <p:cNvPr id="13" name="TextBox 12">
+            <a:extLst>
+              <a:ext uri="{FF2B5EF4-FFF2-40B4-BE49-F238E27FC236}">
+                <a16:creationId xmlns:a16="http://schemas.microsoft.com/office/drawing/2014/main" id="{F73294F5-C63A-CC6E-D564-61DC7F92A909}"/>
+              </a:ext>
+            </a:extLst>
+          </p:cNvPr>
+          <p:cNvSpPr txBox="1"/>
+          <p:nvPr/>
+        </p:nvSpPr>
+        <p:spPr>
+          <a:xfrm>
+            <a:off x="838200" y="1100000"/>
+            <a:ext cx="10228117" cy="5366550"/>
+          </a:xfrm>
+          <a:prstGeom prst="roundRect">
+            <a:avLst>
+              <a:gd name="adj" fmla="val 5000"/>
+            </a:avLst>
+          </a:prstGeom>
+          <a:solidFill>
+            <a:srgbClr val="005B2C">
+              <a:alpha val="8000"/>
+            </a:srgbClr>
+          </a:solidFill>
+          <a:ln w="19050">
+            <a:solidFill>
+              <a:srgbClr val="C28300"/>
+            </a:solidFill>
+          </a:ln>
+        </p:spPr>
+        <p:txBody>
+          <a:bodyPr wrap="square" lIns="180000" tIns="144000" rIns="180000" bIns="144000">
+            <a:spAutoFit/>
+          </a:bodyPr>
+          <a:lstStyle/>
+          <a:p>
+            <a:pPr marL="0" marR="0">
+              <a:buNone/>
+            </a:pPr>
+            <a:r>
+              <a:rPr lang="en-US" sz="2000" kern="0">
+                <a:effectLst/>
+                <a:ea typeface="Times New Roman" panose="02020603050405020304" pitchFamily="18" charset="0"/>
+                <a:cs typeface="Segoe UI" panose="020B0502040204020203" pitchFamily="34" charset="0"/>
+              </a:rPr>
+              <a:t>•</a:t>
+            </a:r>
+            <a:r>
+              <a:rPr lang="fr-FR" sz="2000" kern="0">
+                <a:effectLst/>
+                <a:ea typeface="Times New Roman" panose="02020603050405020304" pitchFamily="18" charset="0"/>
+                <a:cs typeface="Times New Roman" panose="02020603050405020304" pitchFamily="18" charset="0"/>
+              </a:rPr>
+              <a:t>  </a:t>
+            </a:r>
+            <a:r>
+              <a:rPr lang="fr-FR" sz="2000" b="1" kern="0">
+                <a:solidFill>
+                  <a:srgbClr val="005B2C"/>
+                </a:solidFill>
+                <a:effectLst/>
+                <a:ea typeface="Times New Roman" panose="02020603050405020304" pitchFamily="18" charset="0"/>
+                <a:cs typeface="Times New Roman" panose="02020603050405020304" pitchFamily="18" charset="0"/>
+              </a:rPr>
+              <a:t>Introduction</a:t>
+            </a:r>
+            <a:r>
+              <a:rPr lang="fr-FR" sz="2000" kern="0">
+                <a:effectLst/>
+                <a:ea typeface="Times New Roman" panose="02020603050405020304" pitchFamily="18" charset="0"/>
+                <a:cs typeface="Times New Roman" panose="02020603050405020304" pitchFamily="18" charset="0"/>
+              </a:rPr>
+              <a:t> : Dermatoses bulleuses : groupe hétérogène de pathologies cutanées et/ou muqueuses à potentiel de gravité élevé ; données épidémiologiques limitées en contexte sub-saharien justifiant un panorama local structuré</a:t>
+            </a:r>
+            <a:endParaRPr lang="en-US" sz="2800" kern="100">
+              <a:effectLst/>
+              <a:ea typeface="Aptos" panose="020B0004020202020204" pitchFamily="34" charset="0"/>
+              <a:cs typeface="Times New Roman" panose="02020603050405020304" pitchFamily="18" charset="0"/>
+            </a:endParaRPr>
+          </a:p>
+          <a:p>
+            <a:pPr marL="0" marR="0">
+              <a:buNone/>
+            </a:pPr>
+            <a:r>
+              <a:rPr lang="en-US" sz="2000" kern="0">
+                <a:effectLst/>
+                <a:ea typeface="Times New Roman" panose="02020603050405020304" pitchFamily="18" charset="0"/>
+                <a:cs typeface="Segoe UI" panose="020B0502040204020203" pitchFamily="34" charset="0"/>
+              </a:rPr>
+              <a:t>•</a:t>
+            </a:r>
+            <a:r>
+              <a:rPr lang="fr-FR" sz="2000" kern="0">
+                <a:effectLst/>
+                <a:ea typeface="Times New Roman" panose="02020603050405020304" pitchFamily="18" charset="0"/>
+                <a:cs typeface="Times New Roman" panose="02020603050405020304" pitchFamily="18" charset="0"/>
+              </a:rPr>
+              <a:t>  </a:t>
+            </a:r>
+            <a:r>
+              <a:rPr lang="fr-FR" sz="2000" b="1" kern="0">
+                <a:solidFill>
+                  <a:srgbClr val="005B2C"/>
+                </a:solidFill>
+                <a:effectLst/>
+                <a:ea typeface="Times New Roman" panose="02020603050405020304" pitchFamily="18" charset="0"/>
+                <a:cs typeface="Times New Roman" panose="02020603050405020304" pitchFamily="18" charset="0"/>
+              </a:rPr>
+              <a:t>Méthodes</a:t>
+            </a:r>
+            <a:r>
+              <a:rPr lang="fr-FR" sz="2000" kern="0">
+                <a:effectLst/>
+                <a:ea typeface="Times New Roman" panose="02020603050405020304" pitchFamily="18" charset="0"/>
+                <a:cs typeface="Times New Roman" panose="02020603050405020304" pitchFamily="18" charset="0"/>
+              </a:rPr>
+              <a:t> : Étude transversale, rétrospective, descriptive ; CNHU-HKM de Cotonou (janvier 2016 – mars 2026) ; 43 enfants ; registres de consultations, analyse via Kobo Toolbox/Excel ; limites : monocentrique, rétrospectif, absence de confirmation immunopathologique systématique</a:t>
+            </a:r>
+            <a:endParaRPr lang="en-US" sz="2800" kern="100">
+              <a:effectLst/>
+              <a:ea typeface="Aptos" panose="020B0004020202020204" pitchFamily="34" charset="0"/>
+              <a:cs typeface="Times New Roman" panose="02020603050405020304" pitchFamily="18" charset="0"/>
+            </a:endParaRPr>
+          </a:p>
+          <a:p>
+            <a:pPr marL="0" marR="0">
+              <a:buNone/>
+            </a:pPr>
+            <a:r>
+              <a:rPr lang="en-US" sz="2000" kern="0">
+                <a:effectLst/>
+                <a:ea typeface="Times New Roman" panose="02020603050405020304" pitchFamily="18" charset="0"/>
+                <a:cs typeface="Segoe UI" panose="020B0502040204020203" pitchFamily="34" charset="0"/>
+              </a:rPr>
+              <a:t>•</a:t>
+            </a:r>
+            <a:r>
+              <a:rPr lang="fr-FR" sz="2000" kern="0">
+                <a:effectLst/>
+                <a:ea typeface="Times New Roman" panose="02020603050405020304" pitchFamily="18" charset="0"/>
+                <a:cs typeface="Times New Roman" panose="02020603050405020304" pitchFamily="18" charset="0"/>
+              </a:rPr>
+              <a:t>  </a:t>
+            </a:r>
+            <a:r>
+              <a:rPr lang="fr-FR" sz="2000" b="1" kern="0">
+                <a:solidFill>
+                  <a:srgbClr val="005B2C"/>
+                </a:solidFill>
+                <a:effectLst/>
+                <a:ea typeface="Times New Roman" panose="02020603050405020304" pitchFamily="18" charset="0"/>
+                <a:cs typeface="Times New Roman" panose="02020603050405020304" pitchFamily="18" charset="0"/>
+              </a:rPr>
+              <a:t>Résultats</a:t>
+            </a:r>
+            <a:r>
+              <a:rPr lang="fr-FR" sz="2000" kern="0">
+                <a:effectLst/>
+                <a:ea typeface="Times New Roman" panose="02020603050405020304" pitchFamily="18" charset="0"/>
+                <a:cs typeface="Times New Roman" panose="02020603050405020304" pitchFamily="18" charset="0"/>
+              </a:rPr>
+              <a:t> : Prédominance toxidermies (62,8 %) et infections staphylococciques (30,2 %) ; couple SJS/TEN (44,2 %) au cœur du spectre ; Sulfadoxine-pyriméthamine principal inducteur ; gradient de gravité étiologique majeur : 70,4 % des toxidermies ≥ 11 % de surface vs 15,4 % des infections (risque × 4,5)</a:t>
+            </a:r>
+            <a:endParaRPr lang="en-US" sz="2800" kern="100">
+              <a:effectLst/>
+              <a:ea typeface="Aptos" panose="020B0004020202020204" pitchFamily="34" charset="0"/>
+              <a:cs typeface="Times New Roman" panose="02020603050405020304" pitchFamily="18" charset="0"/>
+            </a:endParaRPr>
+          </a:p>
+          <a:p>
+            <a:pPr marL="0" marR="0">
+              <a:buNone/>
+            </a:pPr>
+            <a:r>
+              <a:rPr lang="en-US" sz="2000" kern="0">
+                <a:effectLst/>
+                <a:ea typeface="Times New Roman" panose="02020603050405020304" pitchFamily="18" charset="0"/>
+                <a:cs typeface="Segoe UI" panose="020B0502040204020203" pitchFamily="34" charset="0"/>
+              </a:rPr>
+              <a:t>•</a:t>
+            </a:r>
+            <a:r>
+              <a:rPr lang="fr-FR" sz="2000" kern="0">
+                <a:effectLst/>
+                <a:ea typeface="Times New Roman" panose="02020603050405020304" pitchFamily="18" charset="0"/>
+                <a:cs typeface="Times New Roman" panose="02020603050405020304" pitchFamily="18" charset="0"/>
+              </a:rPr>
+              <a:t>  </a:t>
+            </a:r>
+            <a:r>
+              <a:rPr lang="fr-FR" sz="2000" b="1" kern="0">
+                <a:solidFill>
+                  <a:srgbClr val="005B2C"/>
+                </a:solidFill>
+                <a:effectLst/>
+                <a:ea typeface="Times New Roman" panose="02020603050405020304" pitchFamily="18" charset="0"/>
+                <a:cs typeface="Times New Roman" panose="02020603050405020304" pitchFamily="18" charset="0"/>
+              </a:rPr>
+              <a:t>Discussion</a:t>
+            </a:r>
+            <a:r>
+              <a:rPr lang="fr-FR" sz="2000" kern="0">
+                <a:effectLst/>
+                <a:ea typeface="Times New Roman" panose="02020603050405020304" pitchFamily="18" charset="0"/>
+                <a:cs typeface="Times New Roman" panose="02020603050405020304" pitchFamily="18" charset="0"/>
+              </a:rPr>
+              <a:t> : Profil dominé par causes acquises et évitables ; hiérarchie diagnostique orientée vers interrogatoire médicamenteux et recherche infectieuse ; implications : pharmacovigilance renforcée, orientation rapide des formes sévères, prescription rationnelle ; perspectives : études prospectives multicentriques, registres régionaux de pharmacovigilance, accès aux outils immunopathologiques</a:t>
+            </a:r>
+            <a:endParaRPr lang="en-US" sz="2800" kern="100">
+              <a:effectLst/>
+              <a:ea typeface="Aptos" panose="020B0004020202020204" pitchFamily="34" charset="0"/>
+              <a:cs typeface="Times New Roman" panose="02020603050405020304" pitchFamily="18" charset="0"/>
+            </a:endParaRPr>
           </a:p>
         </p:txBody>
       </p:sp>
@@ -30017,7 +31960,7 @@
         </p:nvSpPr>
         <p:spPr>
           <a:xfrm>
-            <a:off x="2562846" y="565655"/>
+            <a:off x="2511136" y="43708"/>
             <a:ext cx="7066305" cy="910110"/>
           </a:xfrm>
           <a:prstGeom prst="rect">
@@ -30063,58 +32006,6 @@
               </a:rPr>
               <a:t>Références</a:t>
             </a:r>
-          </a:p>
-        </p:txBody>
-      </p:sp>
-      <p:sp>
-        <p:nvSpPr>
-          <p:cNvPr id="13" name="Google Shape;611;p48">
-            <a:extLst>
-              <a:ext uri="{FF2B5EF4-FFF2-40B4-BE49-F238E27FC236}">
-                <a16:creationId xmlns:a16="http://schemas.microsoft.com/office/drawing/2014/main" id="{D03FC42F-88CF-478E-8ABF-4EA48708492C}"/>
-              </a:ext>
-            </a:extLst>
-          </p:cNvPr>
-          <p:cNvSpPr txBox="1">
-            <a:spLocks noGrp="1"/>
-          </p:cNvSpPr>
-          <p:nvPr>
-            <p:ph type="subTitle" idx="4294967295"/>
-          </p:nvPr>
-        </p:nvSpPr>
-        <p:spPr>
-          <a:xfrm>
-            <a:off x="998102" y="1919213"/>
-            <a:ext cx="10195791" cy="1284000"/>
-          </a:xfrm>
-          <a:prstGeom prst="rect">
-            <a:avLst/>
-          </a:prstGeom>
-        </p:spPr>
-        <p:txBody>
-          <a:bodyPr spcFirstLastPara="1" wrap="square" lIns="91425" tIns="91425" rIns="91425" bIns="91425" anchor="t" anchorCtr="0">
-            <a:noAutofit/>
-          </a:bodyPr>
-          <a:lstStyle/>
-          <a:p>
-            <a:pPr marL="25400" lvl="0" indent="0" algn="ctr" rtl="0">
-              <a:spcBef>
-                <a:spcPts val="0"/>
-              </a:spcBef>
-              <a:spcAft>
-                <a:spcPts val="0"/>
-              </a:spcAft>
-              <a:buNone/>
-            </a:pPr>
-            <a:endParaRPr sz="2400" dirty="0">
-              <a:solidFill>
-                <a:schemeClr val="tx1">
-                  <a:lumMod val="95000"/>
-                  <a:lumOff val="5000"/>
-                </a:schemeClr>
-              </a:solidFill>
-              <a:latin typeface="Nunito Light" pitchFamily="2" charset="0"/>
-            </a:endParaRPr>
           </a:p>
         </p:txBody>
       </p:sp>
@@ -30251,6 +32142,795 @@
           </a:p>
         </p:txBody>
       </p:sp>
+      <p:sp>
+        <p:nvSpPr>
+          <p:cNvPr id="4" name="TextBox 3">
+            <a:extLst>
+              <a:ext uri="{FF2B5EF4-FFF2-40B4-BE49-F238E27FC236}">
+                <a16:creationId xmlns:a16="http://schemas.microsoft.com/office/drawing/2014/main" id="{A5A43C10-A770-F925-924A-45EA6581B35C}"/>
+              </a:ext>
+            </a:extLst>
+          </p:cNvPr>
+          <p:cNvSpPr txBox="1"/>
+          <p:nvPr/>
+        </p:nvSpPr>
+        <p:spPr>
+          <a:xfrm>
+            <a:off x="854029" y="1087333"/>
+            <a:ext cx="10380517" cy="4683333"/>
+          </a:xfrm>
+          <a:prstGeom prst="rect">
+            <a:avLst/>
+          </a:prstGeom>
+          <a:noFill/>
+        </p:spPr>
+        <p:txBody>
+          <a:bodyPr wrap="square">
+            <a:spAutoFit/>
+          </a:bodyPr>
+          <a:lstStyle/>
+          <a:p>
+            <a:pPr marL="0" marR="0">
+              <a:lnSpc>
+                <a:spcPts val="1500"/>
+              </a:lnSpc>
+              <a:spcAft>
+                <a:spcPts val="800"/>
+              </a:spcAft>
+              <a:buNone/>
+            </a:pPr>
+            <a:r>
+              <a:rPr lang="en-US" sz="1800" kern="0" dirty="0">
+                <a:effectLst/>
+                <a:ea typeface="Times New Roman" panose="02020603050405020304" pitchFamily="18" charset="0"/>
+                <a:cs typeface="Segoe UI" panose="020B0502040204020203" pitchFamily="34" charset="0"/>
+              </a:rPr>
+              <a:t>·</a:t>
+            </a:r>
+            <a:r>
+              <a:rPr lang="en-US" sz="1800" kern="0" dirty="0">
+                <a:effectLst/>
+                <a:ea typeface="Times New Roman" panose="02020603050405020304" pitchFamily="18" charset="0"/>
+                <a:cs typeface="Times New Roman" panose="02020603050405020304" pitchFamily="18" charset="0"/>
+              </a:rPr>
+              <a:t>  </a:t>
+            </a:r>
+            <a:r>
+              <a:rPr lang="en-US" sz="1800" b="1" kern="0" dirty="0" err="1">
+                <a:effectLst/>
+                <a:ea typeface="Times New Roman" panose="02020603050405020304" pitchFamily="18" charset="0"/>
+                <a:cs typeface="Times New Roman" panose="02020603050405020304" pitchFamily="18" charset="0"/>
+              </a:rPr>
+              <a:t>Bastuji</a:t>
+            </a:r>
+            <a:r>
+              <a:rPr lang="en-US" sz="1800" b="1" kern="0" dirty="0">
+                <a:effectLst/>
+                <a:ea typeface="Times New Roman" panose="02020603050405020304" pitchFamily="18" charset="0"/>
+                <a:cs typeface="Times New Roman" panose="02020603050405020304" pitchFamily="18" charset="0"/>
+              </a:rPr>
+              <a:t>-Garin S, </a:t>
+            </a:r>
+            <a:r>
+              <a:rPr lang="en-US" sz="1800" b="1" kern="0" dirty="0" err="1">
+                <a:effectLst/>
+                <a:ea typeface="Times New Roman" panose="02020603050405020304" pitchFamily="18" charset="0"/>
+                <a:cs typeface="Times New Roman" panose="02020603050405020304" pitchFamily="18" charset="0"/>
+              </a:rPr>
+              <a:t>Rzany</a:t>
+            </a:r>
+            <a:r>
+              <a:rPr lang="en-US" sz="1800" b="1" kern="0" dirty="0">
+                <a:effectLst/>
+                <a:ea typeface="Times New Roman" panose="02020603050405020304" pitchFamily="18" charset="0"/>
+                <a:cs typeface="Times New Roman" panose="02020603050405020304" pitchFamily="18" charset="0"/>
+              </a:rPr>
+              <a:t> B, Stern RS, et al.</a:t>
+            </a:r>
+            <a:r>
+              <a:rPr lang="en-US" sz="1800" kern="0" dirty="0">
+                <a:effectLst/>
+                <a:ea typeface="Times New Roman" panose="02020603050405020304" pitchFamily="18" charset="0"/>
+                <a:cs typeface="Times New Roman" panose="02020603050405020304" pitchFamily="18" charset="0"/>
+              </a:rPr>
+              <a:t> Clinical classification of cases of toxic epidermal necrolysis, Stevens-Johnson syndrome, and erythema multiforme. </a:t>
+            </a:r>
+            <a:r>
+              <a:rPr lang="en-US" sz="1800" i="1" kern="0" dirty="0">
+                <a:effectLst/>
+                <a:ea typeface="Times New Roman" panose="02020603050405020304" pitchFamily="18" charset="0"/>
+                <a:cs typeface="Times New Roman" panose="02020603050405020304" pitchFamily="18" charset="0"/>
+              </a:rPr>
+              <a:t>Arch Dermatol.</a:t>
+            </a:r>
+            <a:r>
+              <a:rPr lang="en-US" sz="1800" kern="0" dirty="0">
+                <a:effectLst/>
+                <a:ea typeface="Times New Roman" panose="02020603050405020304" pitchFamily="18" charset="0"/>
+                <a:cs typeface="Times New Roman" panose="02020603050405020304" pitchFamily="18" charset="0"/>
+              </a:rPr>
+              <a:t> 1993;149(1):92-96.</a:t>
+            </a:r>
+            <a:endParaRPr lang="en-US" sz="2400" kern="100" dirty="0">
+              <a:effectLst/>
+              <a:ea typeface="Aptos" panose="020B0004020202020204" pitchFamily="34" charset="0"/>
+              <a:cs typeface="Times New Roman" panose="02020603050405020304" pitchFamily="18" charset="0"/>
+            </a:endParaRPr>
+          </a:p>
+          <a:p>
+            <a:pPr marL="0" marR="0">
+              <a:lnSpc>
+                <a:spcPts val="1500"/>
+              </a:lnSpc>
+              <a:spcAft>
+                <a:spcPts val="800"/>
+              </a:spcAft>
+              <a:buNone/>
+            </a:pPr>
+            <a:r>
+              <a:rPr lang="en-US" sz="1800" kern="0" dirty="0">
+                <a:effectLst/>
+                <a:ea typeface="Times New Roman" panose="02020603050405020304" pitchFamily="18" charset="0"/>
+                <a:cs typeface="Segoe UI" panose="020B0502040204020203" pitchFamily="34" charset="0"/>
+              </a:rPr>
+              <a:t>·</a:t>
+            </a:r>
+            <a:r>
+              <a:rPr lang="en-US" sz="1800" kern="0" dirty="0">
+                <a:effectLst/>
+                <a:ea typeface="Times New Roman" panose="02020603050405020304" pitchFamily="18" charset="0"/>
+                <a:cs typeface="Times New Roman" panose="02020603050405020304" pitchFamily="18" charset="0"/>
+              </a:rPr>
+              <a:t>  </a:t>
+            </a:r>
+            <a:r>
+              <a:rPr lang="en-US" sz="1800" b="1" kern="0" dirty="0">
+                <a:effectLst/>
+                <a:ea typeface="Times New Roman" panose="02020603050405020304" pitchFamily="18" charset="0"/>
+                <a:cs typeface="Times New Roman" panose="02020603050405020304" pitchFamily="18" charset="0"/>
+              </a:rPr>
+              <a:t>Mockenhaupt M.</a:t>
+            </a:r>
+            <a:r>
+              <a:rPr lang="en-US" sz="1800" kern="0" dirty="0">
+                <a:effectLst/>
+                <a:ea typeface="Times New Roman" panose="02020603050405020304" pitchFamily="18" charset="0"/>
+                <a:cs typeface="Times New Roman" panose="02020603050405020304" pitchFamily="18" charset="0"/>
+              </a:rPr>
+              <a:t> The current understanding of Stevens-Johnson syndrome and toxic epidermal necrolysis. </a:t>
+            </a:r>
+            <a:r>
+              <a:rPr lang="en-US" sz="1800" i="1" kern="0" dirty="0">
+                <a:effectLst/>
+                <a:ea typeface="Times New Roman" panose="02020603050405020304" pitchFamily="18" charset="0"/>
+                <a:cs typeface="Times New Roman" panose="02020603050405020304" pitchFamily="18" charset="0"/>
+              </a:rPr>
+              <a:t>Expert Rev Clin Immunol.</a:t>
+            </a:r>
+            <a:r>
+              <a:rPr lang="en-US" sz="1800" kern="0" dirty="0">
+                <a:effectLst/>
+                <a:ea typeface="Times New Roman" panose="02020603050405020304" pitchFamily="18" charset="0"/>
+                <a:cs typeface="Times New Roman" panose="02020603050405020304" pitchFamily="18" charset="0"/>
+              </a:rPr>
+              <a:t> 2011;7(6):803-815.</a:t>
+            </a:r>
+            <a:endParaRPr lang="en-US" sz="2400" kern="100" dirty="0">
+              <a:effectLst/>
+              <a:ea typeface="Aptos" panose="020B0004020202020204" pitchFamily="34" charset="0"/>
+              <a:cs typeface="Times New Roman" panose="02020603050405020304" pitchFamily="18" charset="0"/>
+            </a:endParaRPr>
+          </a:p>
+          <a:p>
+            <a:pPr marL="0" marR="0">
+              <a:lnSpc>
+                <a:spcPts val="1500"/>
+              </a:lnSpc>
+              <a:spcAft>
+                <a:spcPts val="800"/>
+              </a:spcAft>
+              <a:buNone/>
+            </a:pPr>
+            <a:r>
+              <a:rPr lang="en-US" sz="1800" kern="0" dirty="0">
+                <a:effectLst/>
+                <a:ea typeface="Times New Roman" panose="02020603050405020304" pitchFamily="18" charset="0"/>
+                <a:cs typeface="Segoe UI" panose="020B0502040204020203" pitchFamily="34" charset="0"/>
+              </a:rPr>
+              <a:t>·</a:t>
+            </a:r>
+            <a:r>
+              <a:rPr lang="en-US" sz="1800" kern="0" dirty="0">
+                <a:effectLst/>
+                <a:ea typeface="Times New Roman" panose="02020603050405020304" pitchFamily="18" charset="0"/>
+                <a:cs typeface="Times New Roman" panose="02020603050405020304" pitchFamily="18" charset="0"/>
+              </a:rPr>
+              <a:t>  </a:t>
+            </a:r>
+            <a:r>
+              <a:rPr lang="en-US" sz="1800" b="1" kern="0" dirty="0">
+                <a:effectLst/>
+                <a:ea typeface="Times New Roman" panose="02020603050405020304" pitchFamily="18" charset="0"/>
+                <a:cs typeface="Times New Roman" panose="02020603050405020304" pitchFamily="18" charset="0"/>
+              </a:rPr>
+              <a:t>Fortuna G, Salas-Alanis JC, Guidetti E, Marinkovich MP.</a:t>
+            </a:r>
+            <a:r>
+              <a:rPr lang="en-US" sz="1800" kern="0" dirty="0">
+                <a:effectLst/>
+                <a:ea typeface="Times New Roman" panose="02020603050405020304" pitchFamily="18" charset="0"/>
+                <a:cs typeface="Times New Roman" panose="02020603050405020304" pitchFamily="18" charset="0"/>
+              </a:rPr>
+              <a:t> A review of autoimmune blistering diseases: the immunologic spectrum and clinical management. </a:t>
+            </a:r>
+            <a:r>
+              <a:rPr lang="en-US" sz="1800" i="1" kern="0" dirty="0">
+                <a:effectLst/>
+                <a:ea typeface="Times New Roman" panose="02020603050405020304" pitchFamily="18" charset="0"/>
+                <a:cs typeface="Times New Roman" panose="02020603050405020304" pitchFamily="18" charset="0"/>
+              </a:rPr>
+              <a:t>Clin Rev Allergy Immunol.</a:t>
+            </a:r>
+            <a:r>
+              <a:rPr lang="en-US" sz="1800" kern="0" dirty="0">
+                <a:effectLst/>
+                <a:ea typeface="Times New Roman" panose="02020603050405020304" pitchFamily="18" charset="0"/>
+                <a:cs typeface="Times New Roman" panose="02020603050405020304" pitchFamily="18" charset="0"/>
+              </a:rPr>
+              <a:t> 2012;43(3):194-213.</a:t>
+            </a:r>
+            <a:endParaRPr lang="en-US" sz="2400" kern="100" dirty="0">
+              <a:effectLst/>
+              <a:ea typeface="Aptos" panose="020B0004020202020204" pitchFamily="34" charset="0"/>
+              <a:cs typeface="Times New Roman" panose="02020603050405020304" pitchFamily="18" charset="0"/>
+            </a:endParaRPr>
+          </a:p>
+          <a:p>
+            <a:pPr marL="0" marR="0">
+              <a:lnSpc>
+                <a:spcPts val="1500"/>
+              </a:lnSpc>
+              <a:spcAft>
+                <a:spcPts val="800"/>
+              </a:spcAft>
+              <a:buNone/>
+            </a:pPr>
+            <a:r>
+              <a:rPr lang="en-US" sz="1800" kern="0" dirty="0">
+                <a:effectLst/>
+                <a:ea typeface="Times New Roman" panose="02020603050405020304" pitchFamily="18" charset="0"/>
+                <a:cs typeface="Segoe UI" panose="020B0502040204020203" pitchFamily="34" charset="0"/>
+              </a:rPr>
+              <a:t>·</a:t>
+            </a:r>
+            <a:r>
+              <a:rPr lang="en-US" sz="1800" kern="0" dirty="0">
+                <a:effectLst/>
+                <a:ea typeface="Times New Roman" panose="02020603050405020304" pitchFamily="18" charset="0"/>
+                <a:cs typeface="Times New Roman" panose="02020603050405020304" pitchFamily="18" charset="0"/>
+              </a:rPr>
+              <a:t>  </a:t>
+            </a:r>
+            <a:r>
+              <a:rPr lang="en-US" sz="1800" b="1" kern="0" dirty="0">
+                <a:effectLst/>
+                <a:ea typeface="Times New Roman" panose="02020603050405020304" pitchFamily="18" charset="0"/>
+                <a:cs typeface="Times New Roman" panose="02020603050405020304" pitchFamily="18" charset="0"/>
+              </a:rPr>
+              <a:t>Bowen AC, Mahé A, Hay RJ, et al.</a:t>
+            </a:r>
+            <a:r>
+              <a:rPr lang="en-US" sz="1800" kern="0" dirty="0">
+                <a:effectLst/>
+                <a:ea typeface="Times New Roman" panose="02020603050405020304" pitchFamily="18" charset="0"/>
+                <a:cs typeface="Times New Roman" panose="02020603050405020304" pitchFamily="18" charset="0"/>
+              </a:rPr>
+              <a:t> The global epidemiology of impetigo: a systematic review of the population prevalence of impetigo and pyoderma. </a:t>
+            </a:r>
+            <a:r>
+              <a:rPr lang="fr-FR" sz="1800" i="1" kern="0" dirty="0" err="1">
+                <a:effectLst/>
+                <a:ea typeface="Times New Roman" panose="02020603050405020304" pitchFamily="18" charset="0"/>
+                <a:cs typeface="Times New Roman" panose="02020603050405020304" pitchFamily="18" charset="0"/>
+              </a:rPr>
+              <a:t>PLoS</a:t>
+            </a:r>
+            <a:r>
+              <a:rPr lang="fr-FR" sz="1800" i="1" kern="0" dirty="0">
+                <a:effectLst/>
+                <a:ea typeface="Times New Roman" panose="02020603050405020304" pitchFamily="18" charset="0"/>
+                <a:cs typeface="Times New Roman" panose="02020603050405020304" pitchFamily="18" charset="0"/>
+              </a:rPr>
+              <a:t> One.</a:t>
+            </a:r>
+            <a:r>
+              <a:rPr lang="fr-FR" sz="1800" kern="0" dirty="0">
+                <a:effectLst/>
+                <a:ea typeface="Times New Roman" panose="02020603050405020304" pitchFamily="18" charset="0"/>
+                <a:cs typeface="Times New Roman" panose="02020603050405020304" pitchFamily="18" charset="0"/>
+              </a:rPr>
+              <a:t> 2015;10(8):e0136789.</a:t>
+            </a:r>
+            <a:endParaRPr lang="en-US" sz="2400" kern="100" dirty="0">
+              <a:effectLst/>
+              <a:ea typeface="Aptos" panose="020B0004020202020204" pitchFamily="34" charset="0"/>
+              <a:cs typeface="Times New Roman" panose="02020603050405020304" pitchFamily="18" charset="0"/>
+            </a:endParaRPr>
+          </a:p>
+          <a:p>
+            <a:pPr marL="0" marR="0">
+              <a:lnSpc>
+                <a:spcPts val="1500"/>
+              </a:lnSpc>
+              <a:spcAft>
+                <a:spcPts val="800"/>
+              </a:spcAft>
+              <a:buNone/>
+            </a:pPr>
+            <a:r>
+              <a:rPr lang="en-US" sz="1800" kern="0" dirty="0">
+                <a:effectLst/>
+                <a:ea typeface="Times New Roman" panose="02020603050405020304" pitchFamily="18" charset="0"/>
+                <a:cs typeface="Segoe UI" panose="020B0502040204020203" pitchFamily="34" charset="0"/>
+              </a:rPr>
+              <a:t>·</a:t>
+            </a:r>
+            <a:r>
+              <a:rPr lang="fr-FR" sz="1800" kern="0" dirty="0">
+                <a:effectLst/>
+                <a:ea typeface="Times New Roman" panose="02020603050405020304" pitchFamily="18" charset="0"/>
+                <a:cs typeface="Times New Roman" panose="02020603050405020304" pitchFamily="18" charset="0"/>
+              </a:rPr>
+              <a:t>  </a:t>
+            </a:r>
+            <a:r>
+              <a:rPr lang="fr-FR" sz="1800" b="1" kern="0" dirty="0" err="1">
+                <a:effectLst/>
+                <a:ea typeface="Times New Roman" panose="02020603050405020304" pitchFamily="18" charset="0"/>
+                <a:cs typeface="Times New Roman" panose="02020603050405020304" pitchFamily="18" charset="0"/>
+              </a:rPr>
+              <a:t>Leaute-Labreze</a:t>
+            </a:r>
+            <a:r>
+              <a:rPr lang="fr-FR" sz="1800" b="1" kern="0" dirty="0">
+                <a:effectLst/>
+                <a:ea typeface="Times New Roman" panose="02020603050405020304" pitchFamily="18" charset="0"/>
+                <a:cs typeface="Times New Roman" panose="02020603050405020304" pitchFamily="18" charset="0"/>
+              </a:rPr>
+              <a:t> C, </a:t>
+            </a:r>
+            <a:r>
+              <a:rPr lang="fr-FR" sz="1800" b="1" kern="0" dirty="0" err="1">
+                <a:effectLst/>
+                <a:ea typeface="Times New Roman" panose="02020603050405020304" pitchFamily="18" charset="0"/>
+                <a:cs typeface="Times New Roman" panose="02020603050405020304" pitchFamily="18" charset="0"/>
+              </a:rPr>
+              <a:t>Lamireau</a:t>
+            </a:r>
+            <a:r>
+              <a:rPr lang="fr-FR" sz="1800" b="1" kern="0" dirty="0">
+                <a:effectLst/>
+                <a:ea typeface="Times New Roman" panose="02020603050405020304" pitchFamily="18" charset="0"/>
+                <a:cs typeface="Times New Roman" panose="02020603050405020304" pitchFamily="18" charset="0"/>
+              </a:rPr>
+              <a:t> T, Chawki D, et al.</a:t>
+            </a:r>
+            <a:r>
+              <a:rPr lang="fr-FR" sz="1800" kern="0" dirty="0">
+                <a:effectLst/>
+                <a:ea typeface="Times New Roman" panose="02020603050405020304" pitchFamily="18" charset="0"/>
+                <a:cs typeface="Times New Roman" panose="02020603050405020304" pitchFamily="18" charset="0"/>
+              </a:rPr>
+              <a:t> </a:t>
+            </a:r>
+            <a:r>
+              <a:rPr lang="en-US" sz="1800" kern="0" dirty="0">
+                <a:effectLst/>
+                <a:ea typeface="Times New Roman" panose="02020603050405020304" pitchFamily="18" charset="0"/>
+                <a:cs typeface="Times New Roman" panose="02020603050405020304" pitchFamily="18" charset="0"/>
+              </a:rPr>
+              <a:t>Diagnosis, classification, and management of erythema multiforme and Stevens-Johnson syndrome. </a:t>
+            </a:r>
+            <a:r>
+              <a:rPr lang="en-US" sz="1800" i="1" kern="0" dirty="0">
+                <a:effectLst/>
+                <a:ea typeface="Times New Roman" panose="02020603050405020304" pitchFamily="18" charset="0"/>
+                <a:cs typeface="Times New Roman" panose="02020603050405020304" pitchFamily="18" charset="0"/>
+              </a:rPr>
+              <a:t>Arch Dis Child.</a:t>
+            </a:r>
+            <a:r>
+              <a:rPr lang="en-US" sz="1800" kern="0" dirty="0">
+                <a:effectLst/>
+                <a:ea typeface="Times New Roman" panose="02020603050405020304" pitchFamily="18" charset="0"/>
+                <a:cs typeface="Times New Roman" panose="02020603050405020304" pitchFamily="18" charset="0"/>
+              </a:rPr>
+              <a:t> 2000;83(4):347-352.</a:t>
+            </a:r>
+            <a:endParaRPr lang="en-US" sz="2400" kern="100" dirty="0">
+              <a:effectLst/>
+              <a:ea typeface="Aptos" panose="020B0004020202020204" pitchFamily="34" charset="0"/>
+              <a:cs typeface="Times New Roman" panose="02020603050405020304" pitchFamily="18" charset="0"/>
+            </a:endParaRPr>
+          </a:p>
+          <a:p>
+            <a:pPr marL="0" marR="0">
+              <a:lnSpc>
+                <a:spcPts val="1500"/>
+              </a:lnSpc>
+              <a:spcAft>
+                <a:spcPts val="800"/>
+              </a:spcAft>
+              <a:buNone/>
+            </a:pPr>
+            <a:r>
+              <a:rPr lang="en-US" sz="1800" kern="0" dirty="0">
+                <a:effectLst/>
+                <a:ea typeface="Times New Roman" panose="02020603050405020304" pitchFamily="18" charset="0"/>
+                <a:cs typeface="Segoe UI" panose="020B0502040204020203" pitchFamily="34" charset="0"/>
+              </a:rPr>
+              <a:t>·</a:t>
+            </a:r>
+            <a:r>
+              <a:rPr lang="en-US" sz="1800" kern="0" dirty="0">
+                <a:effectLst/>
+                <a:ea typeface="Times New Roman" panose="02020603050405020304" pitchFamily="18" charset="0"/>
+                <a:cs typeface="Times New Roman" panose="02020603050405020304" pitchFamily="18" charset="0"/>
+              </a:rPr>
+              <a:t>  </a:t>
+            </a:r>
+            <a:r>
+              <a:rPr lang="en-US" sz="1800" b="1" kern="0" dirty="0" err="1">
+                <a:effectLst/>
+                <a:ea typeface="Times New Roman" panose="02020603050405020304" pitchFamily="18" charset="0"/>
+                <a:cs typeface="Times New Roman" panose="02020603050405020304" pitchFamily="18" charset="0"/>
+              </a:rPr>
+              <a:t>Roujeau</a:t>
+            </a:r>
+            <a:r>
+              <a:rPr lang="en-US" sz="1800" b="1" kern="0" dirty="0">
+                <a:effectLst/>
+                <a:ea typeface="Times New Roman" panose="02020603050405020304" pitchFamily="18" charset="0"/>
+                <a:cs typeface="Times New Roman" panose="02020603050405020304" pitchFamily="18" charset="0"/>
+              </a:rPr>
+              <a:t> JC, Stern RS.</a:t>
+            </a:r>
+            <a:r>
+              <a:rPr lang="en-US" sz="1800" kern="0" dirty="0">
+                <a:effectLst/>
+                <a:ea typeface="Times New Roman" panose="02020603050405020304" pitchFamily="18" charset="0"/>
+                <a:cs typeface="Times New Roman" panose="02020603050405020304" pitchFamily="18" charset="0"/>
+              </a:rPr>
+              <a:t> Severe adverse cutaneous reactions to drugs. </a:t>
+            </a:r>
+            <a:r>
+              <a:rPr lang="en-US" sz="1800" i="1" kern="0" dirty="0">
+                <a:effectLst/>
+                <a:ea typeface="Times New Roman" panose="02020603050405020304" pitchFamily="18" charset="0"/>
+                <a:cs typeface="Times New Roman" panose="02020603050405020304" pitchFamily="18" charset="0"/>
+              </a:rPr>
+              <a:t>N Engl J Med.</a:t>
+            </a:r>
+            <a:r>
+              <a:rPr lang="en-US" sz="1800" kern="0" dirty="0">
+                <a:effectLst/>
+                <a:ea typeface="Times New Roman" panose="02020603050405020304" pitchFamily="18" charset="0"/>
+                <a:cs typeface="Times New Roman" panose="02020603050405020304" pitchFamily="18" charset="0"/>
+              </a:rPr>
+              <a:t> 1994;331(19):1272-1285.</a:t>
+            </a:r>
+            <a:endParaRPr lang="en-US" sz="2400" kern="100" dirty="0">
+              <a:effectLst/>
+              <a:ea typeface="Aptos" panose="020B0004020202020204" pitchFamily="34" charset="0"/>
+              <a:cs typeface="Times New Roman" panose="02020603050405020304" pitchFamily="18" charset="0"/>
+            </a:endParaRPr>
+          </a:p>
+          <a:p>
+            <a:pPr marL="0" marR="0">
+              <a:lnSpc>
+                <a:spcPts val="1500"/>
+              </a:lnSpc>
+              <a:spcAft>
+                <a:spcPts val="800"/>
+              </a:spcAft>
+              <a:buNone/>
+            </a:pPr>
+            <a:r>
+              <a:rPr lang="en-US" sz="1800" kern="0" dirty="0">
+                <a:effectLst/>
+                <a:ea typeface="Times New Roman" panose="02020603050405020304" pitchFamily="18" charset="0"/>
+                <a:cs typeface="Segoe UI" panose="020B0502040204020203" pitchFamily="34" charset="0"/>
+              </a:rPr>
+              <a:t>·</a:t>
+            </a:r>
+            <a:r>
+              <a:rPr lang="en-US" sz="1800" kern="0" dirty="0">
+                <a:effectLst/>
+                <a:ea typeface="Times New Roman" panose="02020603050405020304" pitchFamily="18" charset="0"/>
+                <a:cs typeface="Times New Roman" panose="02020603050405020304" pitchFamily="18" charset="0"/>
+              </a:rPr>
+              <a:t>  </a:t>
+            </a:r>
+            <a:r>
+              <a:rPr lang="en-US" sz="1800" b="1" kern="0" dirty="0">
+                <a:effectLst/>
+                <a:ea typeface="Times New Roman" panose="02020603050405020304" pitchFamily="18" charset="0"/>
+                <a:cs typeface="Times New Roman" panose="02020603050405020304" pitchFamily="18" charset="0"/>
+              </a:rPr>
+              <a:t>Ndiaye M, Diop A, Niang SO, et al.</a:t>
+            </a:r>
+            <a:r>
+              <a:rPr lang="en-US" sz="1800" kern="0" dirty="0">
+                <a:effectLst/>
+                <a:ea typeface="Times New Roman" panose="02020603050405020304" pitchFamily="18" charset="0"/>
+                <a:cs typeface="Times New Roman" panose="02020603050405020304" pitchFamily="18" charset="0"/>
+              </a:rPr>
+              <a:t> </a:t>
+            </a:r>
+            <a:r>
+              <a:rPr lang="fr-FR" sz="1800" kern="0" dirty="0">
+                <a:effectLst/>
+                <a:ea typeface="Times New Roman" panose="02020603050405020304" pitchFamily="18" charset="0"/>
+                <a:cs typeface="Times New Roman" panose="02020603050405020304" pitchFamily="18" charset="0"/>
+              </a:rPr>
+              <a:t>Toxidermies sévères en dermatologie pédiatrique à Dakar : aspects épidémiologiques et étiologiques. </a:t>
+            </a:r>
+            <a:r>
+              <a:rPr lang="en-US" sz="1800" i="1" kern="0" dirty="0">
+                <a:effectLst/>
+                <a:ea typeface="Times New Roman" panose="02020603050405020304" pitchFamily="18" charset="0"/>
+                <a:cs typeface="Times New Roman" panose="02020603050405020304" pitchFamily="18" charset="0"/>
+              </a:rPr>
+              <a:t>Ann Dermatol </a:t>
+            </a:r>
+            <a:r>
+              <a:rPr lang="en-US" sz="1800" i="1" kern="0" dirty="0" err="1">
+                <a:effectLst/>
+                <a:ea typeface="Times New Roman" panose="02020603050405020304" pitchFamily="18" charset="0"/>
+                <a:cs typeface="Times New Roman" panose="02020603050405020304" pitchFamily="18" charset="0"/>
+              </a:rPr>
+              <a:t>Venereol</a:t>
+            </a:r>
+            <a:r>
+              <a:rPr lang="en-US" sz="1800" i="1" kern="0" dirty="0">
+                <a:effectLst/>
+                <a:ea typeface="Times New Roman" panose="02020603050405020304" pitchFamily="18" charset="0"/>
+                <a:cs typeface="Times New Roman" panose="02020603050405020304" pitchFamily="18" charset="0"/>
+              </a:rPr>
+              <a:t>.</a:t>
+            </a:r>
+            <a:r>
+              <a:rPr lang="en-US" sz="1800" kern="0" dirty="0">
+                <a:effectLst/>
+                <a:ea typeface="Times New Roman" panose="02020603050405020304" pitchFamily="18" charset="0"/>
+                <a:cs typeface="Times New Roman" panose="02020603050405020304" pitchFamily="18" charset="0"/>
+              </a:rPr>
+              <a:t> 2016;143(12):S345.</a:t>
+            </a:r>
+            <a:endParaRPr lang="en-US" sz="2400" kern="100" dirty="0">
+              <a:effectLst/>
+              <a:ea typeface="Aptos" panose="020B0004020202020204" pitchFamily="34" charset="0"/>
+              <a:cs typeface="Times New Roman" panose="02020603050405020304" pitchFamily="18" charset="0"/>
+            </a:endParaRPr>
+          </a:p>
+          <a:p>
+            <a:pPr marL="0" marR="0">
+              <a:lnSpc>
+                <a:spcPts val="1500"/>
+              </a:lnSpc>
+              <a:spcAft>
+                <a:spcPts val="800"/>
+              </a:spcAft>
+              <a:buNone/>
+            </a:pPr>
+            <a:r>
+              <a:rPr lang="en-US" sz="1800" kern="0" dirty="0">
+                <a:effectLst/>
+                <a:ea typeface="Times New Roman" panose="02020603050405020304" pitchFamily="18" charset="0"/>
+                <a:cs typeface="Segoe UI" panose="020B0502040204020203" pitchFamily="34" charset="0"/>
+              </a:rPr>
+              <a:t>·</a:t>
+            </a:r>
+            <a:r>
+              <a:rPr lang="en-US" sz="1800" kern="0" dirty="0">
+                <a:effectLst/>
+                <a:ea typeface="Times New Roman" panose="02020603050405020304" pitchFamily="18" charset="0"/>
+                <a:cs typeface="Times New Roman" panose="02020603050405020304" pitchFamily="18" charset="0"/>
+              </a:rPr>
+              <a:t>  </a:t>
+            </a:r>
+            <a:r>
+              <a:rPr lang="en-US" sz="1800" b="1" kern="0" dirty="0">
+                <a:effectLst/>
+                <a:ea typeface="Times New Roman" panose="02020603050405020304" pitchFamily="18" charset="0"/>
+                <a:cs typeface="Times New Roman" panose="02020603050405020304" pitchFamily="18" charset="0"/>
+              </a:rPr>
+              <a:t>Mahé A, Faye O, N'Diaye HT, et al.</a:t>
+            </a:r>
+            <a:r>
+              <a:rPr lang="en-US" sz="1800" kern="0" dirty="0">
+                <a:effectLst/>
+                <a:ea typeface="Times New Roman" panose="02020603050405020304" pitchFamily="18" charset="0"/>
+                <a:cs typeface="Times New Roman" panose="02020603050405020304" pitchFamily="18" charset="0"/>
+              </a:rPr>
+              <a:t> Integration of basic dermatological care into primary health care services in Mali. </a:t>
+            </a:r>
+            <a:r>
+              <a:rPr lang="en-US" sz="1800" i="1" kern="0" dirty="0">
+                <a:effectLst/>
+                <a:ea typeface="Times New Roman" panose="02020603050405020304" pitchFamily="18" charset="0"/>
+                <a:cs typeface="Times New Roman" panose="02020603050405020304" pitchFamily="18" charset="0"/>
+              </a:rPr>
+              <a:t>Bull World Health Organ.</a:t>
+            </a:r>
+            <a:r>
+              <a:rPr lang="en-US" sz="1800" kern="0" dirty="0">
+                <a:effectLst/>
+                <a:ea typeface="Times New Roman" panose="02020603050405020304" pitchFamily="18" charset="0"/>
+                <a:cs typeface="Times New Roman" panose="02020603050405020304" pitchFamily="18" charset="0"/>
+              </a:rPr>
+              <a:t> 2005;83(12):935-941.</a:t>
+            </a:r>
+            <a:endParaRPr lang="en-US" sz="2400" kern="100" dirty="0">
+              <a:effectLst/>
+              <a:ea typeface="Aptos" panose="020B0004020202020204" pitchFamily="34" charset="0"/>
+              <a:cs typeface="Times New Roman" panose="02020603050405020304" pitchFamily="18" charset="0"/>
+            </a:endParaRPr>
+          </a:p>
+          <a:p>
+            <a:pPr marL="0" marR="0">
+              <a:lnSpc>
+                <a:spcPts val="1500"/>
+              </a:lnSpc>
+              <a:spcAft>
+                <a:spcPts val="800"/>
+              </a:spcAft>
+              <a:buNone/>
+            </a:pPr>
+            <a:r>
+              <a:rPr lang="en-US" sz="1800" kern="0" dirty="0">
+                <a:effectLst/>
+                <a:ea typeface="Times New Roman" panose="02020603050405020304" pitchFamily="18" charset="0"/>
+                <a:cs typeface="Segoe UI" panose="020B0502040204020203" pitchFamily="34" charset="0"/>
+              </a:rPr>
+              <a:t>·</a:t>
+            </a:r>
+            <a:r>
+              <a:rPr lang="en-US" sz="1800" kern="0" dirty="0">
+                <a:effectLst/>
+                <a:ea typeface="Times New Roman" panose="02020603050405020304" pitchFamily="18" charset="0"/>
+                <a:cs typeface="Times New Roman" panose="02020603050405020304" pitchFamily="18" charset="0"/>
+              </a:rPr>
+              <a:t>  </a:t>
+            </a:r>
+            <a:r>
+              <a:rPr lang="en-US" sz="1800" b="1" kern="0" dirty="0">
+                <a:effectLst/>
+                <a:ea typeface="Times New Roman" panose="02020603050405020304" pitchFamily="18" charset="0"/>
+                <a:cs typeface="Times New Roman" panose="02020603050405020304" pitchFamily="18" charset="0"/>
+              </a:rPr>
+              <a:t>World Health Organization.</a:t>
+            </a:r>
+            <a:r>
+              <a:rPr lang="en-US" sz="1800" kern="0" dirty="0">
+                <a:effectLst/>
+                <a:ea typeface="Times New Roman" panose="02020603050405020304" pitchFamily="18" charset="0"/>
+                <a:cs typeface="Times New Roman" panose="02020603050405020304" pitchFamily="18" charset="0"/>
+              </a:rPr>
+              <a:t> WHO guidelines for the treatment of skin and oral mucosal conditions in children. </a:t>
+            </a:r>
+            <a:r>
+              <a:rPr lang="en-US" sz="1800" i="1" kern="0" dirty="0">
+                <a:effectLst/>
+                <a:ea typeface="Times New Roman" panose="02020603050405020304" pitchFamily="18" charset="0"/>
+                <a:cs typeface="Times New Roman" panose="02020603050405020304" pitchFamily="18" charset="0"/>
+              </a:rPr>
+              <a:t>WHO Press.</a:t>
+            </a:r>
+            <a:r>
+              <a:rPr lang="en-US" sz="1800" kern="0" dirty="0">
+                <a:effectLst/>
+                <a:ea typeface="Times New Roman" panose="02020603050405020304" pitchFamily="18" charset="0"/>
+                <a:cs typeface="Times New Roman" panose="02020603050405020304" pitchFamily="18" charset="0"/>
+              </a:rPr>
+              <a:t> 2014.</a:t>
+            </a:r>
+            <a:endParaRPr lang="en-US" sz="2400" kern="100" dirty="0">
+              <a:effectLst/>
+              <a:ea typeface="Aptos" panose="020B0004020202020204" pitchFamily="34" charset="0"/>
+              <a:cs typeface="Times New Roman" panose="02020603050405020304" pitchFamily="18" charset="0"/>
+            </a:endParaRPr>
+          </a:p>
+          <a:p>
+            <a:pPr marL="0" marR="0">
+              <a:lnSpc>
+                <a:spcPts val="1500"/>
+              </a:lnSpc>
+              <a:spcAft>
+                <a:spcPts val="800"/>
+              </a:spcAft>
+              <a:buNone/>
+            </a:pPr>
+            <a:r>
+              <a:rPr lang="en-US" sz="1800" kern="0" dirty="0">
+                <a:effectLst/>
+                <a:ea typeface="Times New Roman" panose="02020603050405020304" pitchFamily="18" charset="0"/>
+                <a:cs typeface="Segoe UI" panose="020B0502040204020203" pitchFamily="34" charset="0"/>
+              </a:rPr>
+              <a:t>·</a:t>
+            </a:r>
+            <a:r>
+              <a:rPr lang="en-US" sz="1800" kern="0" dirty="0">
+                <a:effectLst/>
+                <a:ea typeface="Times New Roman" panose="02020603050405020304" pitchFamily="18" charset="0"/>
+                <a:cs typeface="Times New Roman" panose="02020603050405020304" pitchFamily="18" charset="0"/>
+              </a:rPr>
+              <a:t>  </a:t>
+            </a:r>
+            <a:r>
+              <a:rPr lang="en-US" sz="1800" b="1" kern="0" dirty="0" err="1">
+                <a:effectLst/>
+                <a:ea typeface="Times New Roman" panose="02020603050405020304" pitchFamily="18" charset="0"/>
+                <a:cs typeface="Times New Roman" panose="02020603050405020304" pitchFamily="18" charset="0"/>
+              </a:rPr>
+              <a:t>Koulu</a:t>
+            </a:r>
+            <a:r>
+              <a:rPr lang="en-US" sz="1800" b="1" kern="0" dirty="0">
+                <a:effectLst/>
+                <a:ea typeface="Times New Roman" panose="02020603050405020304" pitchFamily="18" charset="0"/>
+                <a:cs typeface="Times New Roman" panose="02020603050405020304" pitchFamily="18" charset="0"/>
+              </a:rPr>
+              <a:t> L, </a:t>
+            </a:r>
+            <a:r>
+              <a:rPr lang="en-US" sz="1800" b="1" kern="0" dirty="0" err="1">
+                <a:effectLst/>
+                <a:ea typeface="Times New Roman" panose="02020603050405020304" pitchFamily="18" charset="0"/>
+                <a:cs typeface="Times New Roman" panose="02020603050405020304" pitchFamily="18" charset="0"/>
+              </a:rPr>
+              <a:t>Kusari</a:t>
+            </a:r>
+            <a:r>
+              <a:rPr lang="en-US" sz="1800" b="1" kern="0" dirty="0">
+                <a:effectLst/>
+                <a:ea typeface="Times New Roman" panose="02020603050405020304" pitchFamily="18" charset="0"/>
+                <a:cs typeface="Times New Roman" panose="02020603050405020304" pitchFamily="18" charset="0"/>
+              </a:rPr>
+              <a:t> A, Greco MF, et al.</a:t>
+            </a:r>
+            <a:r>
+              <a:rPr lang="en-US" sz="1800" kern="0" dirty="0">
+                <a:effectLst/>
+                <a:ea typeface="Times New Roman" panose="02020603050405020304" pitchFamily="18" charset="0"/>
+                <a:cs typeface="Times New Roman" panose="02020603050405020304" pitchFamily="18" charset="0"/>
+              </a:rPr>
+              <a:t> Autoimmune blistering diseases in children: an update. </a:t>
+            </a:r>
+            <a:r>
+              <a:rPr lang="en-US" sz="1800" i="1" kern="0" dirty="0">
+                <a:effectLst/>
+                <a:ea typeface="Times New Roman" panose="02020603050405020304" pitchFamily="18" charset="0"/>
+                <a:cs typeface="Times New Roman" panose="02020603050405020304" pitchFamily="18" charset="0"/>
+              </a:rPr>
+              <a:t>Am J Clin Dermatol.</a:t>
+            </a:r>
+            <a:r>
+              <a:rPr lang="en-US" sz="1800" kern="0" dirty="0">
+                <a:effectLst/>
+                <a:ea typeface="Times New Roman" panose="02020603050405020304" pitchFamily="18" charset="0"/>
+                <a:cs typeface="Times New Roman" panose="02020603050405020304" pitchFamily="18" charset="0"/>
+              </a:rPr>
+              <a:t> 2019;20(4):467-481.</a:t>
+            </a:r>
+            <a:endParaRPr lang="en-US" sz="2400" kern="100" dirty="0">
+              <a:effectLst/>
+              <a:ea typeface="Aptos" panose="020B0004020202020204" pitchFamily="34" charset="0"/>
+              <a:cs typeface="Times New Roman" panose="02020603050405020304" pitchFamily="18" charset="0"/>
+            </a:endParaRPr>
+          </a:p>
+        </p:txBody>
+      </p:sp>
     </p:spTree>
     <p:extLst>
       <p:ext uri="{BB962C8B-B14F-4D97-AF65-F5344CB8AC3E}">
@@ -30265,494 +32945,6 @@
 </file>
 
 <file path=ppt/slides/slide18.xml><?xml version="1.0" encoding="utf-8"?>
-<p:sld xmlns:a="http://schemas.openxmlformats.org/drawingml/2006/main" xmlns:r="http://schemas.openxmlformats.org/officeDocument/2006/relationships" xmlns:p="http://schemas.openxmlformats.org/presentationml/2006/main" showMasterSp="0">
-  <p:cSld>
-    <p:spTree>
-      <p:nvGrpSpPr>
-        <p:cNvPr id="1" name="Shape 609"/>
-        <p:cNvGrpSpPr/>
-        <p:nvPr/>
-      </p:nvGrpSpPr>
-      <p:grpSpPr>
-        <a:xfrm>
-          <a:off x="0" y="0"/>
-          <a:ext cx="0" cy="0"/>
-          <a:chOff x="0" y="0"/>
-          <a:chExt cx="0" cy="0"/>
-        </a:xfrm>
-      </p:grpSpPr>
-      <p:sp>
-        <p:nvSpPr>
-          <p:cNvPr id="6" name="Ellipse 5">
-            <a:extLst>
-              <a:ext uri="{FF2B5EF4-FFF2-40B4-BE49-F238E27FC236}">
-                <a16:creationId xmlns:a16="http://schemas.microsoft.com/office/drawing/2014/main" id="{C4C57F98-1760-4FBE-949C-11C933D0129A}"/>
-              </a:ext>
-            </a:extLst>
-          </p:cNvPr>
-          <p:cNvSpPr/>
-          <p:nvPr/>
-        </p:nvSpPr>
-        <p:spPr>
-          <a:xfrm>
-            <a:off x="10617200" y="-2511137"/>
-            <a:ext cx="4605482" cy="4605482"/>
-          </a:xfrm>
-          <a:prstGeom prst="ellipse">
-            <a:avLst/>
-          </a:prstGeom>
-          <a:solidFill>
-            <a:srgbClr val="C28300"/>
-          </a:solidFill>
-          <a:ln>
-            <a:noFill/>
-          </a:ln>
-        </p:spPr>
-        <p:style>
-          <a:lnRef idx="2">
-            <a:schemeClr val="accent1">
-              <a:shade val="50000"/>
-            </a:schemeClr>
-          </a:lnRef>
-          <a:fillRef idx="1">
-            <a:schemeClr val="accent1"/>
-          </a:fillRef>
-          <a:effectRef idx="0">
-            <a:schemeClr val="accent1"/>
-          </a:effectRef>
-          <a:fontRef idx="minor">
-            <a:schemeClr val="lt1"/>
-          </a:fontRef>
-        </p:style>
-        <p:txBody>
-          <a:bodyPr rtlCol="0" anchor="ctr"/>
-          <a:lstStyle/>
-          <a:p>
-            <a:pPr algn="ctr"/>
-            <a:endParaRPr lang="fr-FR"/>
-          </a:p>
-        </p:txBody>
-      </p:sp>
-      <p:sp>
-        <p:nvSpPr>
-          <p:cNvPr id="9" name="Ellipse 8">
-            <a:extLst>
-              <a:ext uri="{FF2B5EF4-FFF2-40B4-BE49-F238E27FC236}">
-                <a16:creationId xmlns:a16="http://schemas.microsoft.com/office/drawing/2014/main" id="{192D4E69-C344-4127-889E-0D38F4865C93}"/>
-              </a:ext>
-            </a:extLst>
-          </p:cNvPr>
-          <p:cNvSpPr/>
-          <p:nvPr/>
-        </p:nvSpPr>
-        <p:spPr>
-          <a:xfrm>
-            <a:off x="-2549237" y="5037281"/>
-            <a:ext cx="3935845" cy="3935845"/>
-          </a:xfrm>
-          <a:prstGeom prst="ellipse">
-            <a:avLst/>
-          </a:prstGeom>
-          <a:solidFill>
-            <a:srgbClr val="005B2C"/>
-          </a:solidFill>
-          <a:ln>
-            <a:noFill/>
-          </a:ln>
-        </p:spPr>
-        <p:style>
-          <a:lnRef idx="2">
-            <a:schemeClr val="accent1">
-              <a:shade val="50000"/>
-            </a:schemeClr>
-          </a:lnRef>
-          <a:fillRef idx="1">
-            <a:schemeClr val="accent1"/>
-          </a:fillRef>
-          <a:effectRef idx="0">
-            <a:schemeClr val="accent1"/>
-          </a:effectRef>
-          <a:fontRef idx="minor">
-            <a:schemeClr val="lt1"/>
-          </a:fontRef>
-        </p:style>
-        <p:txBody>
-          <a:bodyPr rtlCol="0" anchor="ctr"/>
-          <a:lstStyle/>
-          <a:p>
-            <a:pPr algn="ctr"/>
-            <a:endParaRPr lang="fr-FR"/>
-          </a:p>
-        </p:txBody>
-      </p:sp>
-      <p:sp>
-        <p:nvSpPr>
-          <p:cNvPr id="10" name="Ellipse 9">
-            <a:extLst>
-              <a:ext uri="{FF2B5EF4-FFF2-40B4-BE49-F238E27FC236}">
-                <a16:creationId xmlns:a16="http://schemas.microsoft.com/office/drawing/2014/main" id="{8B7AC4C4-11AD-4163-A23E-85E2F9928E4E}"/>
-              </a:ext>
-            </a:extLst>
-          </p:cNvPr>
-          <p:cNvSpPr/>
-          <p:nvPr/>
-        </p:nvSpPr>
-        <p:spPr>
-          <a:xfrm>
-            <a:off x="-2511137" y="-3258570"/>
-            <a:ext cx="5022273" cy="5022273"/>
-          </a:xfrm>
-          <a:prstGeom prst="ellipse">
-            <a:avLst/>
-          </a:prstGeom>
-          <a:noFill/>
-          <a:ln w="28575">
-            <a:solidFill>
-              <a:srgbClr val="C28300"/>
-            </a:solidFill>
-          </a:ln>
-        </p:spPr>
-        <p:style>
-          <a:lnRef idx="2">
-            <a:schemeClr val="accent1">
-              <a:shade val="50000"/>
-            </a:schemeClr>
-          </a:lnRef>
-          <a:fillRef idx="1">
-            <a:schemeClr val="accent1"/>
-          </a:fillRef>
-          <a:effectRef idx="0">
-            <a:schemeClr val="accent1"/>
-          </a:effectRef>
-          <a:fontRef idx="minor">
-            <a:schemeClr val="lt1"/>
-          </a:fontRef>
-        </p:style>
-        <p:txBody>
-          <a:bodyPr rtlCol="0" anchor="ctr"/>
-          <a:lstStyle/>
-          <a:p>
-            <a:pPr algn="ctr"/>
-            <a:endParaRPr lang="fr-FR"/>
-          </a:p>
-        </p:txBody>
-      </p:sp>
-      <p:sp>
-        <p:nvSpPr>
-          <p:cNvPr id="11" name="Ellipse 10">
-            <a:extLst>
-              <a:ext uri="{FF2B5EF4-FFF2-40B4-BE49-F238E27FC236}">
-                <a16:creationId xmlns:a16="http://schemas.microsoft.com/office/drawing/2014/main" id="{E6B49FF3-3062-485B-9648-FEFC86CA8B1E}"/>
-              </a:ext>
-            </a:extLst>
-          </p:cNvPr>
-          <p:cNvSpPr/>
-          <p:nvPr/>
-        </p:nvSpPr>
-        <p:spPr>
-          <a:xfrm>
-            <a:off x="9355738" y="5596081"/>
-            <a:ext cx="5022273" cy="5022273"/>
-          </a:xfrm>
-          <a:prstGeom prst="ellipse">
-            <a:avLst/>
-          </a:prstGeom>
-          <a:noFill/>
-          <a:ln w="28575">
-            <a:solidFill>
-              <a:srgbClr val="005B2C"/>
-            </a:solidFill>
-          </a:ln>
-        </p:spPr>
-        <p:style>
-          <a:lnRef idx="2">
-            <a:schemeClr val="accent1">
-              <a:shade val="50000"/>
-            </a:schemeClr>
-          </a:lnRef>
-          <a:fillRef idx="1">
-            <a:schemeClr val="accent1"/>
-          </a:fillRef>
-          <a:effectRef idx="0">
-            <a:schemeClr val="accent1"/>
-          </a:effectRef>
-          <a:fontRef idx="minor">
-            <a:schemeClr val="lt1"/>
-          </a:fontRef>
-        </p:style>
-        <p:txBody>
-          <a:bodyPr rtlCol="0" anchor="ctr"/>
-          <a:lstStyle/>
-          <a:p>
-            <a:pPr algn="ctr"/>
-            <a:endParaRPr lang="fr-FR"/>
-          </a:p>
-        </p:txBody>
-      </p:sp>
-      <p:sp>
-        <p:nvSpPr>
-          <p:cNvPr id="12" name="Google Shape;610;p48">
-            <a:extLst>
-              <a:ext uri="{FF2B5EF4-FFF2-40B4-BE49-F238E27FC236}">
-                <a16:creationId xmlns:a16="http://schemas.microsoft.com/office/drawing/2014/main" id="{57716FDD-4F2E-42F2-B0DA-E9C910B3E985}"/>
-              </a:ext>
-            </a:extLst>
-          </p:cNvPr>
-          <p:cNvSpPr txBox="1">
-            <a:spLocks/>
-          </p:cNvSpPr>
-          <p:nvPr/>
-        </p:nvSpPr>
-        <p:spPr>
-          <a:xfrm>
-            <a:off x="2562846" y="565655"/>
-            <a:ext cx="7066305" cy="910110"/>
-          </a:xfrm>
-          <a:prstGeom prst="rect">
-            <a:avLst/>
-          </a:prstGeom>
-        </p:spPr>
-        <p:txBody>
-          <a:bodyPr spcFirstLastPara="1" vert="horz" wrap="square" lIns="91425" tIns="91425" rIns="91425" bIns="91425" rtlCol="0" anchor="t" anchorCtr="0">
-            <a:noAutofit/>
-          </a:bodyPr>
-          <a:lstStyle>
-            <a:lvl1pPr algn="ctr" defTabSz="914400" rtl="0" eaLnBrk="1" latinLnBrk="0" hangingPunct="1">
-              <a:lnSpc>
-                <a:spcPct val="90000"/>
-              </a:lnSpc>
-              <a:spcBef>
-                <a:spcPct val="0"/>
-              </a:spcBef>
-              <a:buNone/>
-              <a:defRPr sz="6000" kern="1200">
-                <a:solidFill>
-                  <a:schemeClr val="tx1"/>
-                </a:solidFill>
-                <a:latin typeface="+mj-lt"/>
-                <a:ea typeface="+mj-ea"/>
-                <a:cs typeface="+mj-cs"/>
-              </a:defRPr>
-            </a:lvl1pPr>
-          </a:lstStyle>
-          <a:p>
-            <a:pPr>
-              <a:spcBef>
-                <a:spcPts val="0"/>
-              </a:spcBef>
-            </a:pPr>
-            <a:r>
-              <a:rPr lang="fr-FR" sz="5400" b="1" dirty="0">
-                <a:solidFill>
-                  <a:srgbClr val="005B2C"/>
-                </a:solidFill>
-                <a:latin typeface="Arial" panose="020B0604020202020204" pitchFamily="34" charset="0"/>
-                <a:cs typeface="Arial" panose="020B0604020202020204" pitchFamily="34" charset="0"/>
-              </a:rPr>
-              <a:t>Références</a:t>
-            </a:r>
-          </a:p>
-        </p:txBody>
-      </p:sp>
-      <p:sp>
-        <p:nvSpPr>
-          <p:cNvPr id="13" name="Google Shape;611;p48">
-            <a:extLst>
-              <a:ext uri="{FF2B5EF4-FFF2-40B4-BE49-F238E27FC236}">
-                <a16:creationId xmlns:a16="http://schemas.microsoft.com/office/drawing/2014/main" id="{D03FC42F-88CF-478E-8ABF-4EA48708492C}"/>
-              </a:ext>
-            </a:extLst>
-          </p:cNvPr>
-          <p:cNvSpPr txBox="1">
-            <a:spLocks noGrp="1"/>
-          </p:cNvSpPr>
-          <p:nvPr>
-            <p:ph type="subTitle" idx="4294967295"/>
-          </p:nvPr>
-        </p:nvSpPr>
-        <p:spPr>
-          <a:xfrm>
-            <a:off x="998102" y="1919213"/>
-            <a:ext cx="10195791" cy="1284000"/>
-          </a:xfrm>
-          <a:prstGeom prst="rect">
-            <a:avLst/>
-          </a:prstGeom>
-        </p:spPr>
-        <p:txBody>
-          <a:bodyPr spcFirstLastPara="1" wrap="square" lIns="91425" tIns="91425" rIns="91425" bIns="91425" anchor="t" anchorCtr="0">
-            <a:noAutofit/>
-          </a:bodyPr>
-          <a:lstStyle/>
-          <a:p>
-            <a:pPr marL="25400" lvl="0" indent="0" algn="ctr" rtl="0">
-              <a:spcBef>
-                <a:spcPts val="0"/>
-              </a:spcBef>
-              <a:spcAft>
-                <a:spcPts val="0"/>
-              </a:spcAft>
-              <a:buNone/>
-            </a:pPr>
-            <a:endParaRPr sz="2400" dirty="0">
-              <a:solidFill>
-                <a:schemeClr val="tx1">
-                  <a:lumMod val="95000"/>
-                  <a:lumOff val="5000"/>
-                </a:schemeClr>
-              </a:solidFill>
-              <a:latin typeface="Nunito Light" pitchFamily="2" charset="0"/>
-            </a:endParaRPr>
-          </a:p>
-        </p:txBody>
-      </p:sp>
-      <p:sp>
-        <p:nvSpPr>
-          <p:cNvPr id="14" name="Rectangle 13">
-            <a:extLst>
-              <a:ext uri="{FF2B5EF4-FFF2-40B4-BE49-F238E27FC236}">
-                <a16:creationId xmlns:a16="http://schemas.microsoft.com/office/drawing/2014/main" id="{DDD6E80C-CC6B-4399-8F63-B7E5531957B7}"/>
-              </a:ext>
-            </a:extLst>
-          </p:cNvPr>
-          <p:cNvSpPr/>
-          <p:nvPr/>
-        </p:nvSpPr>
-        <p:spPr>
-          <a:xfrm>
-            <a:off x="0" y="6562165"/>
-            <a:ext cx="12192000" cy="295835"/>
-          </a:xfrm>
-          <a:prstGeom prst="rect">
-            <a:avLst/>
-          </a:prstGeom>
-          <a:solidFill>
-            <a:srgbClr val="005B2C"/>
-          </a:solidFill>
-          <a:ln>
-            <a:noFill/>
-          </a:ln>
-        </p:spPr>
-        <p:style>
-          <a:lnRef idx="2">
-            <a:schemeClr val="accent1">
-              <a:shade val="50000"/>
-            </a:schemeClr>
-          </a:lnRef>
-          <a:fillRef idx="1">
-            <a:schemeClr val="accent1"/>
-          </a:fillRef>
-          <a:effectRef idx="0">
-            <a:schemeClr val="accent1"/>
-          </a:effectRef>
-          <a:fontRef idx="minor">
-            <a:schemeClr val="lt1"/>
-          </a:fontRef>
-        </p:style>
-        <p:txBody>
-          <a:bodyPr rtlCol="0" anchor="ctr"/>
-          <a:lstStyle/>
-          <a:p>
-            <a:pPr algn="ctr"/>
-            <a:endParaRPr lang="fr-FR"/>
-          </a:p>
-        </p:txBody>
-      </p:sp>
-      <p:sp>
-        <p:nvSpPr>
-          <p:cNvPr id="15" name="Rectangle 14">
-            <a:extLst>
-              <a:ext uri="{FF2B5EF4-FFF2-40B4-BE49-F238E27FC236}">
-                <a16:creationId xmlns:a16="http://schemas.microsoft.com/office/drawing/2014/main" id="{08A1D530-A847-4B35-8CB3-1F3EB89E2742}"/>
-              </a:ext>
-            </a:extLst>
-          </p:cNvPr>
-          <p:cNvSpPr/>
-          <p:nvPr/>
-        </p:nvSpPr>
-        <p:spPr>
-          <a:xfrm>
-            <a:off x="7742436" y="6562165"/>
-            <a:ext cx="4449564" cy="295835"/>
-          </a:xfrm>
-          <a:prstGeom prst="rect">
-            <a:avLst/>
-          </a:prstGeom>
-          <a:solidFill>
-            <a:srgbClr val="C28300"/>
-          </a:solidFill>
-          <a:ln>
-            <a:noFill/>
-          </a:ln>
-        </p:spPr>
-        <p:style>
-          <a:lnRef idx="2">
-            <a:schemeClr val="accent1">
-              <a:shade val="50000"/>
-            </a:schemeClr>
-          </a:lnRef>
-          <a:fillRef idx="1">
-            <a:schemeClr val="accent1"/>
-          </a:fillRef>
-          <a:effectRef idx="0">
-            <a:schemeClr val="accent1"/>
-          </a:effectRef>
-          <a:fontRef idx="minor">
-            <a:schemeClr val="lt1"/>
-          </a:fontRef>
-        </p:style>
-        <p:txBody>
-          <a:bodyPr rtlCol="0" anchor="ctr"/>
-          <a:lstStyle/>
-          <a:p>
-            <a:pPr algn="ctr"/>
-            <a:endParaRPr lang="fr-FR" dirty="0"/>
-          </a:p>
-        </p:txBody>
-      </p:sp>
-      <p:sp>
-        <p:nvSpPr>
-          <p:cNvPr id="2" name="Espace réservé du numéro de diapositive 1">
-            <a:extLst>
-              <a:ext uri="{FF2B5EF4-FFF2-40B4-BE49-F238E27FC236}">
-                <a16:creationId xmlns:a16="http://schemas.microsoft.com/office/drawing/2014/main" id="{859113AF-C3F3-45B4-A1BF-95B497DD5D73}"/>
-              </a:ext>
-            </a:extLst>
-          </p:cNvPr>
-          <p:cNvSpPr>
-            <a:spLocks noGrp="1"/>
-          </p:cNvSpPr>
-          <p:nvPr>
-            <p:ph type="sldNum" sz="quarter" idx="12"/>
-          </p:nvPr>
-        </p:nvSpPr>
-        <p:spPr/>
-        <p:txBody>
-          <a:bodyPr/>
-          <a:lstStyle/>
-          <a:p>
-            <a:fld id="{BFD622BF-1CCB-4095-83BA-C642E4725D37}" type="slidenum">
-              <a:rPr lang="fr-FR" sz="2800" smtClean="0"/>
-              <a:t>18</a:t>
-            </a:fld>
-            <a:endParaRPr lang="fr-FR" sz="2800" dirty="0"/>
-          </a:p>
-        </p:txBody>
-      </p:sp>
-    </p:spTree>
-    <p:extLst>
-      <p:ext uri="{BB962C8B-B14F-4D97-AF65-F5344CB8AC3E}">
-        <p14:creationId xmlns:p14="http://schemas.microsoft.com/office/powerpoint/2010/main" val="2768038514"/>
-      </p:ext>
-    </p:extLst>
-  </p:cSld>
-  <p:clrMapOvr>
-    <a:masterClrMapping/>
-  </p:clrMapOvr>
-</p:sld>
-</file>
-
-<file path=ppt/slides/slide19.xml><?xml version="1.0" encoding="utf-8"?>
 <p:sld xmlns:a="http://schemas.openxmlformats.org/drawingml/2006/main" xmlns:r="http://schemas.openxmlformats.org/officeDocument/2006/relationships" xmlns:p="http://schemas.openxmlformats.org/presentationml/2006/main" showMasterSp="0">
   <p:cSld>
     <p:spTree>
@@ -31929,7 +34121,7 @@
         </p:nvSpPr>
         <p:spPr>
           <a:xfrm>
-            <a:off x="2562846" y="439446"/>
+            <a:off x="2562847" y="92904"/>
             <a:ext cx="7066305" cy="910110"/>
           </a:xfrm>
           <a:prstGeom prst="rect">
@@ -31974,80 +34166,6 @@
                 <a:cs typeface="Arial" panose="020B0604020202020204" pitchFamily="34" charset="0"/>
               </a:rPr>
               <a:t>Introduction</a:t>
-            </a:r>
-          </a:p>
-        </p:txBody>
-      </p:sp>
-      <p:sp>
-        <p:nvSpPr>
-          <p:cNvPr id="19" name="Google Shape;611;p48">
-            <a:extLst>
-              <a:ext uri="{FF2B5EF4-FFF2-40B4-BE49-F238E27FC236}">
-                <a16:creationId xmlns:a16="http://schemas.microsoft.com/office/drawing/2014/main" id="{5E634149-5F8B-42EA-9A1A-2421A680FFF2}"/>
-              </a:ext>
-            </a:extLst>
-          </p:cNvPr>
-          <p:cNvSpPr txBox="1">
-            <a:spLocks noGrp="1"/>
-          </p:cNvSpPr>
-          <p:nvPr>
-            <p:ph type="subTitle" idx="4294967295"/>
-          </p:nvPr>
-        </p:nvSpPr>
-        <p:spPr>
-          <a:xfrm>
-            <a:off x="998102" y="1349556"/>
-            <a:ext cx="10195791" cy="4462281"/>
-          </a:xfrm>
-          <a:prstGeom prst="rect">
-            <a:avLst/>
-          </a:prstGeom>
-        </p:spPr>
-        <p:txBody>
-          <a:bodyPr spcFirstLastPara="1" wrap="square" lIns="91425" tIns="91425" rIns="91425" bIns="91425" anchor="t" anchorCtr="0">
-            <a:noAutofit/>
-          </a:bodyPr>
-          <a:lstStyle/>
-          <a:p>
-            <a:pPr marL="25400" indent="0">
-              <a:spcBef>
-                <a:spcPts val="0"/>
-              </a:spcBef>
-              <a:buNone/>
-            </a:pPr>
-            <a:r>
-              <a:rPr lang="fr-BE" dirty="0"/>
-              <a:t>Les dermatoses bulleuses constituent un groupe hétérogène de pathologies cutanées et/ou muqueuses d’étiologies variables (auto-immunes, infectieuses, toxiques …)</a:t>
-            </a:r>
-          </a:p>
-          <a:p>
-            <a:pPr marL="25400" indent="0">
-              <a:spcBef>
-                <a:spcPts val="0"/>
-              </a:spcBef>
-              <a:buNone/>
-            </a:pPr>
-            <a:endParaRPr lang="fr-BE" dirty="0"/>
-          </a:p>
-          <a:p>
-            <a:pPr marL="25400" indent="0">
-              <a:spcBef>
-                <a:spcPts val="0"/>
-              </a:spcBef>
-              <a:buNone/>
-            </a:pPr>
-            <a:endParaRPr lang="fr-BE" dirty="0"/>
-          </a:p>
-          <a:p>
-            <a:pPr marL="25400" indent="0">
-              <a:spcBef>
-                <a:spcPts val="0"/>
-              </a:spcBef>
-              <a:buNone/>
-            </a:pPr>
-            <a:r>
-              <a:rPr lang="fr-BE" dirty="0"/>
-              <a:t>But : répertorier l’ensemble des dermatoses bulleuses du sujet âgé vues en consultation dermatologique au CNHU-HKM de Cotonou</a:t>
             </a:r>
           </a:p>
         </p:txBody>
@@ -32078,6 +34196,277 @@
               <a:t>3</a:t>
             </a:fld>
             <a:endParaRPr lang="fr-FR" sz="2800" dirty="0"/>
+          </a:p>
+        </p:txBody>
+      </p:sp>
+      <p:sp>
+        <p:nvSpPr>
+          <p:cNvPr id="3" name="TextBox 2">
+            <a:extLst>
+              <a:ext uri="{FF2B5EF4-FFF2-40B4-BE49-F238E27FC236}">
+                <a16:creationId xmlns:a16="http://schemas.microsoft.com/office/drawing/2014/main" id="{F7DAEE4B-BD4A-88B3-1731-970398F426EE}"/>
+              </a:ext>
+            </a:extLst>
+          </p:cNvPr>
+          <p:cNvSpPr txBox="1"/>
+          <p:nvPr/>
+        </p:nvSpPr>
+        <p:spPr>
+          <a:xfrm>
+            <a:off x="838200" y="960605"/>
+            <a:ext cx="10228117" cy="5366550"/>
+          </a:xfrm>
+          <a:prstGeom prst="roundRect">
+            <a:avLst>
+              <a:gd name="adj" fmla="val 5000"/>
+            </a:avLst>
+          </a:prstGeom>
+          <a:solidFill>
+            <a:srgbClr val="005B2C">
+              <a:alpha val="8000"/>
+            </a:srgbClr>
+          </a:solidFill>
+          <a:ln w="19050">
+            <a:solidFill>
+              <a:srgbClr val="C28300"/>
+            </a:solidFill>
+          </a:ln>
+        </p:spPr>
+        <p:txBody>
+          <a:bodyPr wrap="square" lIns="180000" tIns="144000" rIns="180000" bIns="144000">
+            <a:spAutoFit/>
+          </a:bodyPr>
+          <a:lstStyle/>
+          <a:p>
+            <a:pPr marL="0" marR="0">
+              <a:buNone/>
+            </a:pPr>
+            <a:r>
+              <a:rPr lang="en-US" sz="2000" kern="0" dirty="0">
+                <a:effectLst/>
+                <a:ea typeface="Times New Roman" panose="02020603050405020304" pitchFamily="18" charset="0"/>
+                <a:cs typeface="Segoe UI" panose="020B0502040204020203" pitchFamily="34" charset="0"/>
+              </a:rPr>
+              <a:t>•</a:t>
+            </a:r>
+            <a:r>
+              <a:rPr lang="fr-FR" sz="2000" kern="0" dirty="0">
+                <a:effectLst/>
+                <a:ea typeface="Times New Roman" panose="02020603050405020304" pitchFamily="18" charset="0"/>
+                <a:cs typeface="Times New Roman" panose="02020603050405020304" pitchFamily="18" charset="0"/>
+              </a:rPr>
+              <a:t>  </a:t>
+            </a:r>
+            <a:r>
+              <a:rPr lang="fr-FR" sz="2000" b="1" kern="0" dirty="0">
+                <a:solidFill>
+                  <a:srgbClr val="005B2C"/>
+                </a:solidFill>
+                <a:effectLst/>
+                <a:ea typeface="Times New Roman" panose="02020603050405020304" pitchFamily="18" charset="0"/>
+                <a:cs typeface="Times New Roman" panose="02020603050405020304" pitchFamily="18" charset="0"/>
+              </a:rPr>
+              <a:t>Dermatoses bulleuses : groupe hétérogène de pathologies cutanées et/ou muqueuses</a:t>
+            </a:r>
+            <a:r>
+              <a:rPr lang="fr-FR" sz="2000" kern="0" dirty="0">
+                <a:effectLst/>
+                <a:ea typeface="Times New Roman" panose="02020603050405020304" pitchFamily="18" charset="0"/>
+                <a:cs typeface="Times New Roman" panose="02020603050405020304" pitchFamily="18" charset="0"/>
+              </a:rPr>
+              <a:t> caractérisées par la présence de bulles, de mécanismes physiopathologiques multiples : auto-immuns (pemphigus, pemphigoïde), infectieux (staphylococciques), toxiques ou médicamenteux (syndromes de Stevens-Johnson et Lyell, érythème polymorphe), immunoallergiques ou héréditaires</a:t>
+            </a:r>
+            <a:endParaRPr lang="en-US" sz="2800" kern="100" dirty="0">
+              <a:effectLst/>
+              <a:ea typeface="Aptos" panose="020B0004020202020204" pitchFamily="34" charset="0"/>
+              <a:cs typeface="Times New Roman" panose="02020603050405020304" pitchFamily="18" charset="0"/>
+            </a:endParaRPr>
+          </a:p>
+          <a:p>
+            <a:pPr marL="0" marR="0">
+              <a:buNone/>
+            </a:pPr>
+            <a:r>
+              <a:rPr lang="en-US" sz="2000" kern="0" dirty="0">
+                <a:effectLst/>
+                <a:ea typeface="Times New Roman" panose="02020603050405020304" pitchFamily="18" charset="0"/>
+                <a:cs typeface="Segoe UI" panose="020B0502040204020203" pitchFamily="34" charset="0"/>
+              </a:rPr>
+              <a:t>•</a:t>
+            </a:r>
+            <a:r>
+              <a:rPr lang="fr-FR" sz="2000" kern="0" dirty="0">
+                <a:effectLst/>
+                <a:ea typeface="Times New Roman" panose="02020603050405020304" pitchFamily="18" charset="0"/>
+                <a:cs typeface="Times New Roman" panose="02020603050405020304" pitchFamily="18" charset="0"/>
+              </a:rPr>
+              <a:t>  </a:t>
+            </a:r>
+            <a:r>
+              <a:rPr lang="fr-FR" sz="2000" b="1" kern="0" dirty="0">
+                <a:solidFill>
+                  <a:srgbClr val="005B2C"/>
+                </a:solidFill>
+                <a:effectLst/>
+                <a:ea typeface="Times New Roman" panose="02020603050405020304" pitchFamily="18" charset="0"/>
+                <a:cs typeface="Times New Roman" panose="02020603050405020304" pitchFamily="18" charset="0"/>
+              </a:rPr>
+              <a:t>Enjeu clinique majeur</a:t>
+            </a:r>
+            <a:r>
+              <a:rPr lang="fr-FR" sz="2000" kern="0" dirty="0">
+                <a:effectLst/>
+                <a:ea typeface="Times New Roman" panose="02020603050405020304" pitchFamily="18" charset="0"/>
+                <a:cs typeface="Times New Roman" panose="02020603050405020304" pitchFamily="18" charset="0"/>
+              </a:rPr>
+              <a:t> : affections d'incidence relativement faible mais marquées par un </a:t>
+            </a:r>
+            <a:r>
+              <a:rPr lang="fr-FR" sz="2000" b="1" kern="0" dirty="0">
+                <a:solidFill>
+                  <a:srgbClr val="005B2C"/>
+                </a:solidFill>
+                <a:effectLst/>
+                <a:ea typeface="Times New Roman" panose="02020603050405020304" pitchFamily="18" charset="0"/>
+                <a:cs typeface="Times New Roman" panose="02020603050405020304" pitchFamily="18" charset="0"/>
+              </a:rPr>
+              <a:t>potentiel de gravité élevé</a:t>
+            </a:r>
+            <a:r>
+              <a:rPr lang="fr-FR" sz="2000" kern="0" dirty="0">
+                <a:effectLst/>
+                <a:ea typeface="Times New Roman" panose="02020603050405020304" pitchFamily="18" charset="0"/>
+                <a:cs typeface="Times New Roman" panose="02020603050405020304" pitchFamily="18" charset="0"/>
+              </a:rPr>
+              <a:t>, notamment dans les formes </a:t>
+            </a:r>
+            <a:r>
+              <a:rPr lang="fr-FR" sz="2000" kern="0" dirty="0" err="1">
+                <a:effectLst/>
+                <a:ea typeface="Times New Roman" panose="02020603050405020304" pitchFamily="18" charset="0"/>
+                <a:cs typeface="Times New Roman" panose="02020603050405020304" pitchFamily="18" charset="0"/>
+              </a:rPr>
+              <a:t>nécrolytiques</a:t>
+            </a:r>
+            <a:r>
+              <a:rPr lang="fr-FR" sz="2000" kern="0" dirty="0">
+                <a:effectLst/>
+                <a:ea typeface="Times New Roman" panose="02020603050405020304" pitchFamily="18" charset="0"/>
+                <a:cs typeface="Times New Roman" panose="02020603050405020304" pitchFamily="18" charset="0"/>
+              </a:rPr>
+              <a:t> et chez les sujets fragiles ; leur diagnostic précoce et leur prise en charge adaptée conditionnent fortement </a:t>
+            </a:r>
+            <a:r>
+              <a:rPr lang="fr-FR" sz="2000" kern="0">
+                <a:effectLst/>
+                <a:ea typeface="Times New Roman" panose="02020603050405020304" pitchFamily="18" charset="0"/>
+                <a:cs typeface="Times New Roman" panose="02020603050405020304" pitchFamily="18" charset="0"/>
+              </a:rPr>
+              <a:t>le </a:t>
+            </a:r>
+            <a:r>
+              <a:rPr lang="fr-FR" sz="2000" kern="0" dirty="0">
+                <a:cs typeface="Times New Roman" panose="02020603050405020304" pitchFamily="18" charset="0"/>
+              </a:rPr>
+              <a:t>pronostic vital et fonctionnel</a:t>
+            </a:r>
+            <a:endParaRPr lang="en-US" sz="2000" kern="0" dirty="0">
+              <a:cs typeface="Times New Roman" panose="02020603050405020304" pitchFamily="18" charset="0"/>
+            </a:endParaRPr>
+          </a:p>
+          <a:p>
+            <a:pPr marL="0" marR="0">
+              <a:buNone/>
+            </a:pPr>
+            <a:r>
+              <a:rPr lang="en-US" sz="2000" kern="0" dirty="0">
+                <a:effectLst/>
+                <a:ea typeface="Times New Roman" panose="02020603050405020304" pitchFamily="18" charset="0"/>
+                <a:cs typeface="Segoe UI" panose="020B0502040204020203" pitchFamily="34" charset="0"/>
+              </a:rPr>
+              <a:t>•</a:t>
+            </a:r>
+            <a:r>
+              <a:rPr lang="fr-FR" sz="2000" kern="0" dirty="0">
+                <a:effectLst/>
+                <a:ea typeface="Times New Roman" panose="02020603050405020304" pitchFamily="18" charset="0"/>
+                <a:cs typeface="Times New Roman" panose="02020603050405020304" pitchFamily="18" charset="0"/>
+              </a:rPr>
+              <a:t>  </a:t>
+            </a:r>
+            <a:r>
+              <a:rPr lang="fr-FR" sz="2000" b="1" kern="0" dirty="0">
+                <a:solidFill>
+                  <a:srgbClr val="005B2C"/>
+                </a:solidFill>
+                <a:effectLst/>
+                <a:ea typeface="Times New Roman" panose="02020603050405020304" pitchFamily="18" charset="0"/>
+                <a:cs typeface="Times New Roman" panose="02020603050405020304" pitchFamily="18" charset="0"/>
+              </a:rPr>
+              <a:t>Données épidémiologiques et étiologiques limitées en contexte sub-saharien</a:t>
+            </a:r>
+            <a:r>
+              <a:rPr lang="fr-FR" sz="2000" kern="0" dirty="0">
+                <a:effectLst/>
+                <a:ea typeface="Times New Roman" panose="02020603050405020304" pitchFamily="18" charset="0"/>
+                <a:cs typeface="Times New Roman" panose="02020603050405020304" pitchFamily="18" charset="0"/>
+              </a:rPr>
+              <a:t> : nécessité de disposer d'un panorama local structuré et chiffré pour orienter la démarche diagnostique de première intention, sensibiliser à la pharmacovigilance et adapter les stratégies de prise en charge</a:t>
+            </a:r>
+            <a:endParaRPr lang="en-US" sz="2800" kern="100" dirty="0">
+              <a:effectLst/>
+              <a:ea typeface="Aptos" panose="020B0004020202020204" pitchFamily="34" charset="0"/>
+              <a:cs typeface="Times New Roman" panose="02020603050405020304" pitchFamily="18" charset="0"/>
+            </a:endParaRPr>
+          </a:p>
+          <a:p>
+            <a:pPr marL="0" marR="0">
+              <a:buNone/>
+            </a:pPr>
+            <a:r>
+              <a:rPr lang="en-US" sz="2000" kern="0" dirty="0">
+                <a:effectLst/>
+                <a:ea typeface="Times New Roman" panose="02020603050405020304" pitchFamily="18" charset="0"/>
+                <a:cs typeface="Segoe UI" panose="020B0502040204020203" pitchFamily="34" charset="0"/>
+              </a:rPr>
+              <a:t>•</a:t>
+            </a:r>
+            <a:r>
+              <a:rPr lang="fr-FR" sz="2000" kern="0" dirty="0">
+                <a:effectLst/>
+                <a:ea typeface="Times New Roman" panose="02020603050405020304" pitchFamily="18" charset="0"/>
+                <a:cs typeface="Times New Roman" panose="02020603050405020304" pitchFamily="18" charset="0"/>
+              </a:rPr>
+              <a:t>  </a:t>
+            </a:r>
+            <a:r>
+              <a:rPr lang="fr-FR" sz="2000" b="1" kern="0" dirty="0">
+                <a:solidFill>
+                  <a:srgbClr val="005B2C"/>
+                </a:solidFill>
+                <a:effectLst/>
+                <a:ea typeface="Times New Roman" panose="02020603050405020304" pitchFamily="18" charset="0"/>
+                <a:cs typeface="Times New Roman" panose="02020603050405020304" pitchFamily="18" charset="0"/>
+              </a:rPr>
+              <a:t>But de l'étude</a:t>
+            </a:r>
+            <a:r>
+              <a:rPr lang="fr-FR" sz="2000" kern="0" dirty="0">
+                <a:effectLst/>
+                <a:ea typeface="Times New Roman" panose="02020603050405020304" pitchFamily="18" charset="0"/>
+                <a:cs typeface="Times New Roman" panose="02020603050405020304" pitchFamily="18" charset="0"/>
+              </a:rPr>
+              <a:t> : répertorier l'ensemble des dermatoses bulleuses vues en consultation </a:t>
+            </a:r>
+            <a:r>
+              <a:rPr lang="fr-FR" sz="2000" kern="0" dirty="0">
+                <a:cs typeface="Times New Roman" panose="02020603050405020304" pitchFamily="18" charset="0"/>
+              </a:rPr>
+              <a:t>dermatologique au CNHU-HKM de Cotonou, afin d'en décrire les caractéristiques démographiques, le profil étiologique et nosologique, ainsi que l'étendue lésionnelle</a:t>
+            </a:r>
+            <a:endParaRPr lang="en-US" sz="2000" kern="0" dirty="0">
+              <a:cs typeface="Times New Roman" panose="02020603050405020304" pitchFamily="18" charset="0"/>
+            </a:endParaRPr>
           </a:p>
         </p:txBody>
       </p:sp>
@@ -32714,7 +35103,7 @@
         </p:nvSpPr>
         <p:spPr>
           <a:xfrm>
-            <a:off x="2562846" y="439446"/>
+            <a:off x="2562844" y="78846"/>
             <a:ext cx="7066305" cy="910110"/>
           </a:xfrm>
           <a:prstGeom prst="rect">
@@ -32759,106 +35148,6 @@
                 <a:cs typeface="Arial" panose="020B0604020202020204" pitchFamily="34" charset="0"/>
               </a:rPr>
               <a:t>Cadre et méthodes</a:t>
-            </a:r>
-          </a:p>
-        </p:txBody>
-      </p:sp>
-      <p:sp>
-        <p:nvSpPr>
-          <p:cNvPr id="19" name="Google Shape;611;p48">
-            <a:extLst>
-              <a:ext uri="{FF2B5EF4-FFF2-40B4-BE49-F238E27FC236}">
-                <a16:creationId xmlns:a16="http://schemas.microsoft.com/office/drawing/2014/main" id="{5E634149-5F8B-42EA-9A1A-2421A680FFF2}"/>
-              </a:ext>
-            </a:extLst>
-          </p:cNvPr>
-          <p:cNvSpPr txBox="1">
-            <a:spLocks noGrp="1"/>
-          </p:cNvSpPr>
-          <p:nvPr>
-            <p:ph type="subTitle" idx="4294967295"/>
-          </p:nvPr>
-        </p:nvSpPr>
-        <p:spPr>
-          <a:xfrm>
-            <a:off x="998102" y="1349556"/>
-            <a:ext cx="10195791" cy="4462282"/>
-          </a:xfrm>
-          <a:prstGeom prst="rect">
-            <a:avLst/>
-          </a:prstGeom>
-        </p:spPr>
-        <p:txBody>
-          <a:bodyPr spcFirstLastPara="1" wrap="square" lIns="91425" tIns="91425" rIns="91425" bIns="91425" anchor="t" anchorCtr="0">
-            <a:noAutofit/>
-          </a:bodyPr>
-          <a:lstStyle/>
-          <a:p>
-            <a:pPr>
-              <a:buFontTx/>
-              <a:buChar char="-"/>
-            </a:pPr>
-            <a:r>
-              <a:rPr lang="fr-BE" dirty="0"/>
-              <a:t>Etude transversale rétrospective et descriptive</a:t>
-            </a:r>
-          </a:p>
-          <a:p>
-            <a:pPr>
-              <a:buFontTx/>
-              <a:buChar char="-"/>
-            </a:pPr>
-            <a:r>
-              <a:rPr lang="fr-BE" dirty="0"/>
-              <a:t>dossiers des patients âgés 18 et moins chez qui le diagnostic d’une dermatose bulleuse a été posé</a:t>
-            </a:r>
-          </a:p>
-          <a:p>
-            <a:pPr>
-              <a:buFontTx/>
-              <a:buChar char="-"/>
-            </a:pPr>
-            <a:r>
-              <a:rPr lang="fr-BE" dirty="0"/>
-              <a:t>Clinique Universitaire de Dermatologie-Vénérologie du CNHU-HKM</a:t>
-            </a:r>
-          </a:p>
-          <a:p>
-            <a:pPr>
-              <a:buFontTx/>
-              <a:buChar char="-"/>
-            </a:pPr>
-            <a:r>
-              <a:rPr lang="fr-BE" dirty="0"/>
-              <a:t>Période : janvier 2016 à mars 2026</a:t>
-            </a:r>
-          </a:p>
-          <a:p>
-            <a:pPr>
-              <a:buFontTx/>
-              <a:buChar char="-"/>
-            </a:pPr>
-            <a:r>
-              <a:rPr lang="fr-BE" dirty="0"/>
-              <a:t>Recueil à partir des registres de consultations</a:t>
-            </a:r>
-          </a:p>
-          <a:p>
-            <a:pPr>
-              <a:buFontTx/>
-              <a:buChar char="-"/>
-            </a:pPr>
-            <a:r>
-              <a:rPr lang="fr-BE" dirty="0"/>
-              <a:t>Saisie et analyse avec logiciels </a:t>
-            </a:r>
-            <a:r>
-              <a:rPr lang="fr-BE" dirty="0" err="1"/>
-              <a:t>Kobo</a:t>
-            </a:r>
-            <a:r>
-              <a:rPr lang="fr-BE" dirty="0"/>
-              <a:t> Toolbox et Excel</a:t>
             </a:r>
           </a:p>
         </p:txBody>
@@ -32889,6 +35178,392 @@
               <a:t>5</a:t>
             </a:fld>
             <a:endParaRPr lang="fr-FR" sz="2800" dirty="0"/>
+          </a:p>
+        </p:txBody>
+      </p:sp>
+      <p:sp>
+        <p:nvSpPr>
+          <p:cNvPr id="6" name="TextBox 5">
+            <a:extLst>
+              <a:ext uri="{FF2B5EF4-FFF2-40B4-BE49-F238E27FC236}">
+                <a16:creationId xmlns:a16="http://schemas.microsoft.com/office/drawing/2014/main" id="{0D9876F6-DBF5-CE09-8885-022D71CBDDD7}"/>
+              </a:ext>
+            </a:extLst>
+          </p:cNvPr>
+          <p:cNvSpPr txBox="1"/>
+          <p:nvPr/>
+        </p:nvSpPr>
+        <p:spPr>
+          <a:xfrm>
+            <a:off x="981937" y="944556"/>
+            <a:ext cx="10228117" cy="5049844"/>
+          </a:xfrm>
+          <a:prstGeom prst="roundRect">
+            <a:avLst>
+              <a:gd name="adj" fmla="val 5000"/>
+            </a:avLst>
+          </a:prstGeom>
+          <a:solidFill>
+            <a:srgbClr val="005B2C">
+              <a:alpha val="8000"/>
+            </a:srgbClr>
+          </a:solidFill>
+          <a:ln w="19050">
+            <a:solidFill>
+              <a:srgbClr val="C28300"/>
+            </a:solidFill>
+          </a:ln>
+        </p:spPr>
+        <p:txBody>
+          <a:bodyPr wrap="square" lIns="180000" tIns="144000" rIns="180000" bIns="144000">
+            <a:spAutoFit/>
+          </a:bodyPr>
+          <a:lstStyle/>
+          <a:p>
+            <a:pPr marL="0" marR="0">
+              <a:buNone/>
+            </a:pPr>
+            <a:r>
+              <a:rPr lang="en-US" sz="2000" kern="0" dirty="0">
+                <a:effectLst/>
+                <a:ea typeface="Times New Roman" panose="02020603050405020304" pitchFamily="18" charset="0"/>
+                <a:cs typeface="Segoe UI" panose="020B0502040204020203" pitchFamily="34" charset="0"/>
+              </a:rPr>
+              <a:t>•</a:t>
+            </a:r>
+            <a:r>
+              <a:rPr lang="fr-FR" sz="2000" kern="0" dirty="0">
+                <a:effectLst/>
+                <a:ea typeface="Times New Roman" panose="02020603050405020304" pitchFamily="18" charset="0"/>
+                <a:cs typeface="Times New Roman" panose="02020603050405020304" pitchFamily="18" charset="0"/>
+              </a:rPr>
+              <a:t>  </a:t>
+            </a:r>
+            <a:r>
+              <a:rPr lang="fr-FR" sz="2000" b="1" kern="0" dirty="0">
+                <a:solidFill>
+                  <a:srgbClr val="005B2C"/>
+                </a:solidFill>
+                <a:effectLst/>
+                <a:ea typeface="Times New Roman" panose="02020603050405020304" pitchFamily="18" charset="0"/>
+                <a:cs typeface="Times New Roman" panose="02020603050405020304" pitchFamily="18" charset="0"/>
+              </a:rPr>
+              <a:t>Type d'étude</a:t>
+            </a:r>
+            <a:r>
+              <a:rPr lang="fr-FR" sz="2000" kern="0" dirty="0">
+                <a:effectLst/>
+                <a:ea typeface="Times New Roman" panose="02020603050405020304" pitchFamily="18" charset="0"/>
+                <a:cs typeface="Times New Roman" panose="02020603050405020304" pitchFamily="18" charset="0"/>
+              </a:rPr>
+              <a:t> : transversale, rétrospective et descriptive, visant à dresser un état des lieux des dermatoses bulleuses observées sans visée comparative ni analytique inférentielle</a:t>
+            </a:r>
+            <a:endParaRPr lang="en-US" sz="2800" kern="100" dirty="0">
+              <a:effectLst/>
+              <a:ea typeface="Aptos" panose="020B0004020202020204" pitchFamily="34" charset="0"/>
+              <a:cs typeface="Times New Roman" panose="02020603050405020304" pitchFamily="18" charset="0"/>
+            </a:endParaRPr>
+          </a:p>
+          <a:p>
+            <a:pPr marL="0" marR="0">
+              <a:buNone/>
+            </a:pPr>
+            <a:r>
+              <a:rPr lang="en-US" sz="2000" kern="0" dirty="0">
+                <a:effectLst/>
+                <a:ea typeface="Times New Roman" panose="02020603050405020304" pitchFamily="18" charset="0"/>
+                <a:cs typeface="Segoe UI" panose="020B0502040204020203" pitchFamily="34" charset="0"/>
+              </a:rPr>
+              <a:t>•</a:t>
+            </a:r>
+            <a:r>
+              <a:rPr lang="fr-FR" sz="2000" kern="0" dirty="0">
+                <a:effectLst/>
+                <a:ea typeface="Times New Roman" panose="02020603050405020304" pitchFamily="18" charset="0"/>
+                <a:cs typeface="Times New Roman" panose="02020603050405020304" pitchFamily="18" charset="0"/>
+              </a:rPr>
+              <a:t>  </a:t>
+            </a:r>
+            <a:r>
+              <a:rPr lang="fr-FR" sz="2000" b="1" kern="0" dirty="0">
+                <a:solidFill>
+                  <a:srgbClr val="005B2C"/>
+                </a:solidFill>
+                <a:effectLst/>
+                <a:ea typeface="Times New Roman" panose="02020603050405020304" pitchFamily="18" charset="0"/>
+                <a:cs typeface="Times New Roman" panose="02020603050405020304" pitchFamily="18" charset="0"/>
+              </a:rPr>
+              <a:t>Population et critères d'inclusion</a:t>
+            </a:r>
+            <a:r>
+              <a:rPr lang="fr-FR" sz="2000" kern="0" dirty="0">
+                <a:effectLst/>
+                <a:ea typeface="Times New Roman" panose="02020603050405020304" pitchFamily="18" charset="0"/>
+                <a:cs typeface="Times New Roman" panose="02020603050405020304" pitchFamily="18" charset="0"/>
+              </a:rPr>
+              <a:t> : dossiers de patients (enfants de 18 ans et moins) chez qui le diagnostic d'une dermatose bulleuse a été posé en consultation dermatologique, sur la base des éléments cliniques consignés dans les registres</a:t>
+            </a:r>
+            <a:endParaRPr lang="en-US" sz="2800" kern="100" dirty="0">
+              <a:effectLst/>
+              <a:ea typeface="Aptos" panose="020B0004020202020204" pitchFamily="34" charset="0"/>
+              <a:cs typeface="Times New Roman" panose="02020603050405020304" pitchFamily="18" charset="0"/>
+            </a:endParaRPr>
+          </a:p>
+          <a:p>
+            <a:pPr marL="0" marR="0">
+              <a:buNone/>
+            </a:pPr>
+            <a:r>
+              <a:rPr lang="en-US" sz="2000" kern="0" dirty="0">
+                <a:effectLst/>
+                <a:ea typeface="Times New Roman" panose="02020603050405020304" pitchFamily="18" charset="0"/>
+                <a:cs typeface="Segoe UI" panose="020B0502040204020203" pitchFamily="34" charset="0"/>
+              </a:rPr>
+              <a:t>•</a:t>
+            </a:r>
+            <a:r>
+              <a:rPr lang="fr-FR" sz="2000" kern="0" dirty="0">
+                <a:effectLst/>
+                <a:ea typeface="Times New Roman" panose="02020603050405020304" pitchFamily="18" charset="0"/>
+                <a:cs typeface="Times New Roman" panose="02020603050405020304" pitchFamily="18" charset="0"/>
+              </a:rPr>
+              <a:t>  </a:t>
+            </a:r>
+            <a:r>
+              <a:rPr lang="fr-FR" sz="2000" b="1" kern="0" dirty="0">
+                <a:solidFill>
+                  <a:srgbClr val="005B2C"/>
+                </a:solidFill>
+                <a:effectLst/>
+                <a:ea typeface="Times New Roman" panose="02020603050405020304" pitchFamily="18" charset="0"/>
+                <a:cs typeface="Times New Roman" panose="02020603050405020304" pitchFamily="18" charset="0"/>
+              </a:rPr>
+              <a:t>Cadre de l'étude</a:t>
+            </a:r>
+            <a:r>
+              <a:rPr lang="fr-FR" sz="2000" kern="0" dirty="0">
+                <a:effectLst/>
+                <a:ea typeface="Times New Roman" panose="02020603050405020304" pitchFamily="18" charset="0"/>
+                <a:cs typeface="Times New Roman" panose="02020603050405020304" pitchFamily="18" charset="0"/>
+              </a:rPr>
+              <a:t> : Clinique Universitaire de Dermatologie-Vénérologie du </a:t>
+            </a:r>
+            <a:r>
+              <a:rPr lang="fr-FR" sz="2000" b="1" kern="0" dirty="0">
+                <a:solidFill>
+                  <a:srgbClr val="005B2C"/>
+                </a:solidFill>
+                <a:effectLst/>
+                <a:ea typeface="Times New Roman" panose="02020603050405020304" pitchFamily="18" charset="0"/>
+                <a:cs typeface="Times New Roman" panose="02020603050405020304" pitchFamily="18" charset="0"/>
+              </a:rPr>
+              <a:t>CNHU-HKM de Cotonou</a:t>
+            </a:r>
+            <a:r>
+              <a:rPr lang="fr-FR" sz="2000" kern="0" dirty="0">
+                <a:effectLst/>
+                <a:ea typeface="Times New Roman" panose="02020603050405020304" pitchFamily="18" charset="0"/>
+                <a:cs typeface="Times New Roman" panose="02020603050405020304" pitchFamily="18" charset="0"/>
+              </a:rPr>
+              <a:t>, structure de référence offrant une file active représentative des dermatoses bulleuses prises en charge sur l'ensemble du territoire</a:t>
+            </a:r>
+            <a:endParaRPr lang="en-US" sz="2800" kern="100" dirty="0">
+              <a:effectLst/>
+              <a:ea typeface="Aptos" panose="020B0004020202020204" pitchFamily="34" charset="0"/>
+              <a:cs typeface="Times New Roman" panose="02020603050405020304" pitchFamily="18" charset="0"/>
+            </a:endParaRPr>
+          </a:p>
+          <a:p>
+            <a:pPr marL="0" marR="0">
+              <a:buNone/>
+            </a:pPr>
+            <a:r>
+              <a:rPr lang="en-US" sz="2000" kern="0" dirty="0">
+                <a:effectLst/>
+                <a:ea typeface="Times New Roman" panose="02020603050405020304" pitchFamily="18" charset="0"/>
+                <a:cs typeface="Segoe UI" panose="020B0502040204020203" pitchFamily="34" charset="0"/>
+              </a:rPr>
+              <a:t>•</a:t>
+            </a:r>
+            <a:r>
+              <a:rPr lang="fr-FR" sz="2000" kern="0" dirty="0">
+                <a:effectLst/>
+                <a:ea typeface="Times New Roman" panose="02020603050405020304" pitchFamily="18" charset="0"/>
+                <a:cs typeface="Times New Roman" panose="02020603050405020304" pitchFamily="18" charset="0"/>
+              </a:rPr>
+              <a:t>  </a:t>
+            </a:r>
+            <a:r>
+              <a:rPr lang="fr-FR" sz="2000" b="1" kern="0" dirty="0">
+                <a:solidFill>
+                  <a:srgbClr val="005B2C"/>
+                </a:solidFill>
+                <a:effectLst/>
+                <a:ea typeface="Times New Roman" panose="02020603050405020304" pitchFamily="18" charset="0"/>
+                <a:cs typeface="Times New Roman" panose="02020603050405020304" pitchFamily="18" charset="0"/>
+              </a:rPr>
+              <a:t>Période d'étude</a:t>
+            </a:r>
+            <a:r>
+              <a:rPr lang="fr-FR" sz="2000" kern="0" dirty="0">
+                <a:effectLst/>
+                <a:ea typeface="Times New Roman" panose="02020603050405020304" pitchFamily="18" charset="0"/>
+                <a:cs typeface="Times New Roman" panose="02020603050405020304" pitchFamily="18" charset="0"/>
+              </a:rPr>
+              <a:t> : </a:t>
+            </a:r>
+            <a:r>
+              <a:rPr lang="fr-FR" sz="2000" b="1" kern="0" dirty="0">
+                <a:solidFill>
+                  <a:srgbClr val="005B2C"/>
+                </a:solidFill>
+                <a:effectLst/>
+                <a:ea typeface="Times New Roman" panose="02020603050405020304" pitchFamily="18" charset="0"/>
+                <a:cs typeface="Times New Roman" panose="02020603050405020304" pitchFamily="18" charset="0"/>
+              </a:rPr>
+              <a:t>janvier 2016 – mars 2026</a:t>
+            </a:r>
+            <a:r>
+              <a:rPr lang="fr-FR" sz="2000" kern="0" dirty="0">
+                <a:effectLst/>
+                <a:ea typeface="Times New Roman" panose="02020603050405020304" pitchFamily="18" charset="0"/>
+                <a:cs typeface="Times New Roman" panose="02020603050405020304" pitchFamily="18" charset="0"/>
+              </a:rPr>
+              <a:t> (&gt; 10 ans), conférant à la série une profondeur temporelle suffisante pour décrire le profil épidémiologique et étiologique</a:t>
+            </a:r>
+            <a:endParaRPr lang="en-US" sz="2800" kern="100" dirty="0">
+              <a:effectLst/>
+              <a:ea typeface="Aptos" panose="020B0004020202020204" pitchFamily="34" charset="0"/>
+              <a:cs typeface="Times New Roman" panose="02020603050405020304" pitchFamily="18" charset="0"/>
+            </a:endParaRPr>
+          </a:p>
+          <a:p>
+            <a:pPr marL="0" marR="0">
+              <a:buNone/>
+            </a:pPr>
+            <a:r>
+              <a:rPr lang="en-US" sz="2000" kern="0" dirty="0">
+                <a:effectLst/>
+                <a:ea typeface="Times New Roman" panose="02020603050405020304" pitchFamily="18" charset="0"/>
+                <a:cs typeface="Segoe UI" panose="020B0502040204020203" pitchFamily="34" charset="0"/>
+              </a:rPr>
+              <a:t>•</a:t>
+            </a:r>
+            <a:r>
+              <a:rPr lang="fr-FR" sz="2000" kern="0" dirty="0">
+                <a:effectLst/>
+                <a:ea typeface="Times New Roman" panose="02020603050405020304" pitchFamily="18" charset="0"/>
+                <a:cs typeface="Times New Roman" panose="02020603050405020304" pitchFamily="18" charset="0"/>
+              </a:rPr>
+              <a:t>  </a:t>
+            </a:r>
+            <a:r>
+              <a:rPr lang="fr-FR" sz="2000" b="1" kern="0" dirty="0">
+                <a:solidFill>
+                  <a:srgbClr val="005B2C"/>
+                </a:solidFill>
+                <a:effectLst/>
+                <a:ea typeface="Times New Roman" panose="02020603050405020304" pitchFamily="18" charset="0"/>
+                <a:cs typeface="Times New Roman" panose="02020603050405020304" pitchFamily="18" charset="0"/>
+              </a:rPr>
+              <a:t>Recueil et analyse des données</a:t>
+            </a:r>
+            <a:r>
+              <a:rPr lang="fr-FR" sz="2000" kern="0" dirty="0">
+                <a:effectLst/>
+                <a:ea typeface="Times New Roman" panose="02020603050405020304" pitchFamily="18" charset="0"/>
+                <a:cs typeface="Times New Roman" panose="02020603050405020304" pitchFamily="18" charset="0"/>
+              </a:rPr>
+              <a:t> : extraction à partir des registres de consultations, saisie via </a:t>
+            </a:r>
+            <a:r>
+              <a:rPr lang="fr-FR" sz="2000" b="1" kern="0" dirty="0">
+                <a:solidFill>
+                  <a:srgbClr val="005B2C"/>
+                </a:solidFill>
+                <a:effectLst/>
+                <a:ea typeface="Times New Roman" panose="02020603050405020304" pitchFamily="18" charset="0"/>
+                <a:cs typeface="Times New Roman" panose="02020603050405020304" pitchFamily="18" charset="0"/>
+              </a:rPr>
+              <a:t>Kobo Toolbox</a:t>
+            </a:r>
+            <a:r>
+              <a:rPr lang="fr-FR" sz="2000" kern="0" dirty="0">
+                <a:effectLst/>
+                <a:ea typeface="Times New Roman" panose="02020603050405020304" pitchFamily="18" charset="0"/>
+                <a:cs typeface="Times New Roman" panose="02020603050405020304" pitchFamily="18" charset="0"/>
+              </a:rPr>
+              <a:t> et traitement descriptif via </a:t>
+            </a:r>
+            <a:r>
+              <a:rPr lang="fr-FR" sz="2000" b="1" kern="0" dirty="0">
+                <a:solidFill>
+                  <a:srgbClr val="005B2C"/>
+                </a:solidFill>
+                <a:effectLst/>
+                <a:ea typeface="Times New Roman" panose="02020603050405020304" pitchFamily="18" charset="0"/>
+                <a:cs typeface="Times New Roman" panose="02020603050405020304" pitchFamily="18" charset="0"/>
+              </a:rPr>
+              <a:t>Excel</a:t>
+            </a:r>
+            <a:r>
+              <a:rPr lang="fr-FR" sz="2000" kern="0" dirty="0">
+                <a:effectLst/>
+                <a:ea typeface="Times New Roman" panose="02020603050405020304" pitchFamily="18" charset="0"/>
+                <a:cs typeface="Times New Roman" panose="02020603050405020304" pitchFamily="18" charset="0"/>
+              </a:rPr>
+              <a:t> (effectifs, proportions, tris croisés)</a:t>
+            </a:r>
+            <a:endParaRPr lang="en-US" sz="2800" kern="100" dirty="0">
+              <a:effectLst/>
+              <a:ea typeface="Aptos" panose="020B0004020202020204" pitchFamily="34" charset="0"/>
+              <a:cs typeface="Times New Roman" panose="02020603050405020304" pitchFamily="18" charset="0"/>
+            </a:endParaRPr>
+          </a:p>
+          <a:p>
+            <a:pPr marL="0" marR="0">
+              <a:buNone/>
+            </a:pPr>
+            <a:r>
+              <a:rPr lang="en-US" sz="2000" kern="0" dirty="0">
+                <a:effectLst/>
+                <a:ea typeface="Times New Roman" panose="02020603050405020304" pitchFamily="18" charset="0"/>
+                <a:cs typeface="Segoe UI" panose="020B0502040204020203" pitchFamily="34" charset="0"/>
+              </a:rPr>
+              <a:t>•</a:t>
+            </a:r>
+            <a:r>
+              <a:rPr lang="fr-FR" sz="2000" kern="0" dirty="0">
+                <a:effectLst/>
+                <a:ea typeface="Times New Roman" panose="02020603050405020304" pitchFamily="18" charset="0"/>
+                <a:cs typeface="Times New Roman" panose="02020603050405020304" pitchFamily="18" charset="0"/>
+              </a:rPr>
+              <a:t>  </a:t>
+            </a:r>
+            <a:r>
+              <a:rPr lang="fr-FR" sz="2000" b="1" kern="0" dirty="0">
+                <a:solidFill>
+                  <a:srgbClr val="005B2C"/>
+                </a:solidFill>
+                <a:effectLst/>
+                <a:ea typeface="Times New Roman" panose="02020603050405020304" pitchFamily="18" charset="0"/>
+                <a:cs typeface="Times New Roman" panose="02020603050405020304" pitchFamily="18" charset="0"/>
+              </a:rPr>
+              <a:t>Limites méthodologiques</a:t>
+            </a:r>
+            <a:r>
+              <a:rPr lang="fr-FR" sz="2000" kern="0" dirty="0">
+                <a:effectLst/>
+                <a:ea typeface="Times New Roman" panose="02020603050405020304" pitchFamily="18" charset="0"/>
+                <a:cs typeface="Times New Roman" panose="02020603050405020304" pitchFamily="18" charset="0"/>
+              </a:rPr>
+              <a:t> : caractère rétrospectif et monocentrique exposant à un biais de recrutement hospitalier et à d'éventuelles données manquantes inhérentes à l'exploitation de registres</a:t>
+            </a:r>
+            <a:endParaRPr lang="en-US" sz="2800" kern="100" dirty="0">
+              <a:effectLst/>
+              <a:ea typeface="Aptos" panose="020B0004020202020204" pitchFamily="34" charset="0"/>
+              <a:cs typeface="Times New Roman" panose="02020603050405020304" pitchFamily="18" charset="0"/>
+            </a:endParaRPr>
           </a:p>
         </p:txBody>
       </p:sp>
@@ -34312,7 +36987,7 @@
             </a:avLst>
           </a:prstGeom>
           <a:solidFill>
-            <a:srgbClr val="4A8C5C"/>
+            <a:srgbClr val="005B2C"/>
           </a:solidFill>
           <a:ln w="12700">
             <a:noFill/>
